--- a/output/education/2026-03-27_family-medicine-board-revision/family-medicine-board-revision_slides_residents.pptx
+++ b/output/education/2026-03-27_family-medicine-board-revision/family-medicine-board-revision_slides_residents.pptx
@@ -3161,7 +3161,7 @@
           <a:noFill/>
         </p:spPr>
         <p:txBody>
-          <a:bodyPr wrap="square">
+          <a:bodyPr wrap="square" lIns="45720" rIns="45720" tIns="27432" bIns="27432">
             <a:spAutoFit/>
           </a:bodyPr>
           <a:lstStyle/>
@@ -3197,7 +3197,7 @@
           <a:noFill/>
         </p:spPr>
         <p:txBody>
-          <a:bodyPr wrap="square">
+          <a:bodyPr wrap="square" lIns="45720" rIns="45720" tIns="27432" bIns="27432">
             <a:spAutoFit/>
           </a:bodyPr>
           <a:lstStyle/>
@@ -3225,7 +3225,7 @@
         <p:spPr>
           <a:xfrm>
             <a:off x="5303520" y="365760"/>
-            <a:ext cx="3474720" cy="1463040"/>
+            <a:ext cx="3474720" cy="1554480"/>
           </a:xfrm>
           <a:prstGeom prst="rect">
             <a:avLst/>
@@ -3268,7 +3268,7 @@
         <p:spPr>
           <a:xfrm>
             <a:off x="5303520" y="411480"/>
-            <a:ext cx="3474720" cy="822960"/>
+            <a:ext cx="3474720" cy="914400"/>
           </a:xfrm>
           <a:prstGeom prst="rect">
             <a:avLst/>
@@ -3276,7 +3276,7 @@
           <a:noFill/>
         </p:spPr>
         <p:txBody>
-          <a:bodyPr wrap="square">
+          <a:bodyPr wrap="square" lIns="45720" rIns="45720" tIns="27432" bIns="27432">
             <a:spAutoFit/>
           </a:bodyPr>
           <a:lstStyle/>
@@ -3303,7 +3303,7 @@
         </p:nvSpPr>
         <p:spPr>
           <a:xfrm>
-            <a:off x="5303520" y="1143000"/>
+            <a:off x="5303520" y="1234440"/>
             <a:ext cx="3474720" cy="320040"/>
           </a:xfrm>
           <a:prstGeom prst="rect">
@@ -3312,7 +3312,7 @@
           <a:noFill/>
         </p:spPr>
         <p:txBody>
-          <a:bodyPr wrap="square">
+          <a:bodyPr wrap="square" lIns="45720" rIns="45720" tIns="27432" bIns="27432">
             <a:spAutoFit/>
           </a:bodyPr>
           <a:lstStyle/>
@@ -3339,7 +3339,7 @@
         </p:nvSpPr>
         <p:spPr>
           <a:xfrm>
-            <a:off x="5303520" y="1463040"/>
+            <a:off x="5303520" y="1554480"/>
             <a:ext cx="3474720" cy="274320"/>
           </a:xfrm>
           <a:prstGeom prst="rect">
@@ -3348,7 +3348,7 @@
           <a:noFill/>
         </p:spPr>
         <p:txBody>
-          <a:bodyPr wrap="square">
+          <a:bodyPr wrap="square" lIns="45720" rIns="45720" tIns="27432" bIns="27432">
             <a:spAutoFit/>
           </a:bodyPr>
           <a:lstStyle/>
@@ -3472,7 +3472,7 @@
           <a:noFill/>
         </p:spPr>
         <p:txBody>
-          <a:bodyPr wrap="square">
+          <a:bodyPr wrap="square" lIns="45720" rIns="45720" tIns="27432" bIns="27432">
             <a:spAutoFit/>
           </a:bodyPr>
           <a:lstStyle/>
@@ -3508,7 +3508,7 @@
           <a:noFill/>
         </p:spPr>
         <p:txBody>
-          <a:bodyPr wrap="square">
+          <a:bodyPr wrap="square" lIns="45720" rIns="45720" tIns="27432" bIns="27432">
             <a:spAutoFit/>
           </a:bodyPr>
           <a:lstStyle/>
@@ -3544,7 +3544,7 @@
           <a:noFill/>
         </p:spPr>
         <p:txBody>
-          <a:bodyPr wrap="square">
+          <a:bodyPr wrap="square" lIns="45720" rIns="45720" tIns="27432" bIns="27432">
             <a:spAutoFit/>
           </a:bodyPr>
           <a:lstStyle/>
@@ -3609,7 +3609,7 @@
           <a:noFill/>
         </p:spPr>
         <p:txBody>
-          <a:bodyPr wrap="square">
+          <a:bodyPr wrap="square" lIns="45720" rIns="45720" tIns="27432" bIns="27432">
             <a:spAutoFit/>
           </a:bodyPr>
           <a:lstStyle/>
@@ -3714,7 +3714,7 @@
           <a:noFill/>
         </p:spPr>
         <p:txBody>
-          <a:bodyPr wrap="square">
+          <a:bodyPr wrap="square" lIns="45720" rIns="45720" tIns="27432" bIns="27432">
             <a:spAutoFit/>
           </a:bodyPr>
           <a:lstStyle/>
@@ -3750,7 +3750,7 @@
           <a:noFill/>
         </p:spPr>
         <p:txBody>
-          <a:bodyPr wrap="square">
+          <a:bodyPr wrap="square" lIns="45720" rIns="45720" tIns="27432" bIns="27432">
             <a:spAutoFit/>
           </a:bodyPr>
           <a:lstStyle/>
@@ -3831,7 +3831,7 @@
           <a:noFill/>
         </p:spPr>
         <p:txBody>
-          <a:bodyPr wrap="square">
+          <a:bodyPr wrap="square" lIns="45720" rIns="45720" tIns="27432" bIns="27432">
             <a:spAutoFit/>
           </a:bodyPr>
           <a:lstStyle/>
@@ -3912,7 +3912,7 @@
           <a:noFill/>
         </p:spPr>
         <p:txBody>
-          <a:bodyPr wrap="square">
+          <a:bodyPr wrap="square" lIns="45720" rIns="45720" tIns="27432" bIns="27432">
             <a:spAutoFit/>
           </a:bodyPr>
           <a:lstStyle/>
@@ -3993,7 +3993,7 @@
           <a:noFill/>
         </p:spPr>
         <p:txBody>
-          <a:bodyPr wrap="square">
+          <a:bodyPr wrap="square" lIns="45720" rIns="45720" tIns="27432" bIns="27432">
             <a:spAutoFit/>
           </a:bodyPr>
           <a:lstStyle/>
@@ -4117,7 +4117,7 @@
           <a:noFill/>
         </p:spPr>
         <p:txBody>
-          <a:bodyPr wrap="square">
+          <a:bodyPr wrap="square" lIns="45720" rIns="45720" tIns="27432" bIns="27432">
             <a:spAutoFit/>
           </a:bodyPr>
           <a:lstStyle/>
@@ -4222,7 +4222,7 @@
           <a:noFill/>
         </p:spPr>
         <p:txBody>
-          <a:bodyPr wrap="square">
+          <a:bodyPr wrap="square" lIns="45720" rIns="45720" tIns="27432" bIns="27432">
             <a:spAutoFit/>
           </a:bodyPr>
           <a:lstStyle/>
@@ -4258,7 +4258,7 @@
           <a:noFill/>
         </p:spPr>
         <p:txBody>
-          <a:bodyPr wrap="square">
+          <a:bodyPr wrap="square" lIns="45720" rIns="45720" tIns="27432" bIns="27432">
             <a:spAutoFit/>
           </a:bodyPr>
           <a:lstStyle/>
@@ -4294,7 +4294,7 @@
           <a:noFill/>
         </p:spPr>
         <p:txBody>
-          <a:bodyPr wrap="square">
+          <a:bodyPr wrap="square" lIns="45720" rIns="45720" tIns="27432" bIns="27432">
             <a:spAutoFit/>
           </a:bodyPr>
           <a:lstStyle/>
@@ -4355,7 +4355,7 @@
                       </a:r>
                     </a:p>
                   </a:txBody>
-                  <a:tcPr>
+                  <a:tcPr marL="45720" marR="45720" marT="18288" marB="18288">
                     <a:solidFill>
                       <a:srgbClr val="0D2B3E"/>
                     </a:solidFill>
@@ -4379,7 +4379,7 @@
                       </a:r>
                     </a:p>
                   </a:txBody>
-                  <a:tcPr>
+                  <a:tcPr marL="45720" marR="45720" marT="18288" marB="18288">
                     <a:solidFill>
                       <a:srgbClr val="0D2B3E"/>
                     </a:solidFill>
@@ -4403,7 +4403,7 @@
                       </a:r>
                     </a:p>
                   </a:txBody>
-                  <a:tcPr>
+                  <a:tcPr marL="45720" marR="45720" marT="18288" marB="18288">
                     <a:solidFill>
                       <a:srgbClr val="0D2B3E"/>
                     </a:solidFill>
@@ -4429,7 +4429,7 @@
                       </a:r>
                     </a:p>
                   </a:txBody>
-                  <a:tcPr>
+                  <a:tcPr marL="45720" marR="45720" marT="18288" marB="18288">
                     <a:solidFill>
                       <a:srgbClr val="E8F0F0"/>
                     </a:solidFill>
@@ -4453,7 +4453,7 @@
                       </a:r>
                     </a:p>
                   </a:txBody>
-                  <a:tcPr>
+                  <a:tcPr marL="45720" marR="45720" marT="18288" marB="18288">
                     <a:solidFill>
                       <a:srgbClr val="E8F0F0"/>
                     </a:solidFill>
@@ -4477,7 +4477,7 @@
                       </a:r>
                     </a:p>
                   </a:txBody>
-                  <a:tcPr>
+                  <a:tcPr marL="45720" marR="45720" marT="18288" marB="18288">
                     <a:solidFill>
                       <a:srgbClr val="E8F0F0"/>
                     </a:solidFill>
@@ -4503,7 +4503,7 @@
                       </a:r>
                     </a:p>
                   </a:txBody>
-                  <a:tcPr>
+                  <a:tcPr marL="45720" marR="45720" marT="18288" marB="18288">
                     <a:solidFill>
                       <a:srgbClr val="F5F0E8"/>
                     </a:solidFill>
@@ -4527,7 +4527,7 @@
                       </a:r>
                     </a:p>
                   </a:txBody>
-                  <a:tcPr>
+                  <a:tcPr marL="45720" marR="45720" marT="18288" marB="18288">
                     <a:solidFill>
                       <a:srgbClr val="F5F0E8"/>
                     </a:solidFill>
@@ -4551,7 +4551,7 @@
                       </a:r>
                     </a:p>
                   </a:txBody>
-                  <a:tcPr>
+                  <a:tcPr marL="45720" marR="45720" marT="18288" marB="18288">
                     <a:solidFill>
                       <a:srgbClr val="F5F0E8"/>
                     </a:solidFill>
@@ -4577,7 +4577,7 @@
                       </a:r>
                     </a:p>
                   </a:txBody>
-                  <a:tcPr>
+                  <a:tcPr marL="45720" marR="45720" marT="18288" marB="18288">
                     <a:solidFill>
                       <a:srgbClr val="E8F0F0"/>
                     </a:solidFill>
@@ -4601,7 +4601,7 @@
                       </a:r>
                     </a:p>
                   </a:txBody>
-                  <a:tcPr>
+                  <a:tcPr marL="45720" marR="45720" marT="18288" marB="18288">
                     <a:solidFill>
                       <a:srgbClr val="E8F0F0"/>
                     </a:solidFill>
@@ -4625,7 +4625,7 @@
                       </a:r>
                     </a:p>
                   </a:txBody>
-                  <a:tcPr>
+                  <a:tcPr marL="45720" marR="45720" marT="18288" marB="18288">
                     <a:solidFill>
                       <a:srgbClr val="E8F0F0"/>
                     </a:solidFill>
@@ -4651,7 +4651,7 @@
                       </a:r>
                     </a:p>
                   </a:txBody>
-                  <a:tcPr>
+                  <a:tcPr marL="45720" marR="45720" marT="18288" marB="18288">
                     <a:solidFill>
                       <a:srgbClr val="F5F0E8"/>
                     </a:solidFill>
@@ -4675,7 +4675,7 @@
                       </a:r>
                     </a:p>
                   </a:txBody>
-                  <a:tcPr>
+                  <a:tcPr marL="45720" marR="45720" marT="18288" marB="18288">
                     <a:solidFill>
                       <a:srgbClr val="F5F0E8"/>
                     </a:solidFill>
@@ -4699,7 +4699,7 @@
                       </a:r>
                     </a:p>
                   </a:txBody>
-                  <a:tcPr>
+                  <a:tcPr marL="45720" marR="45720" marT="18288" marB="18288">
                     <a:solidFill>
                       <a:srgbClr val="F5F0E8"/>
                     </a:solidFill>
@@ -4725,7 +4725,7 @@
                       </a:r>
                     </a:p>
                   </a:txBody>
-                  <a:tcPr>
+                  <a:tcPr marL="45720" marR="45720" marT="18288" marB="18288">
                     <a:solidFill>
                       <a:srgbClr val="E8F0F0"/>
                     </a:solidFill>
@@ -4749,7 +4749,7 @@
                       </a:r>
                     </a:p>
                   </a:txBody>
-                  <a:tcPr>
+                  <a:tcPr marL="45720" marR="45720" marT="18288" marB="18288">
                     <a:solidFill>
                       <a:srgbClr val="E8F0F0"/>
                     </a:solidFill>
@@ -4773,7 +4773,7 @@
                       </a:r>
                     </a:p>
                   </a:txBody>
-                  <a:tcPr>
+                  <a:tcPr marL="45720" marR="45720" marT="18288" marB="18288">
                     <a:solidFill>
                       <a:srgbClr val="E8F0F0"/>
                     </a:solidFill>
@@ -4799,7 +4799,7 @@
                       </a:r>
                     </a:p>
                   </a:txBody>
-                  <a:tcPr>
+                  <a:tcPr marL="45720" marR="45720" marT="18288" marB="18288">
                     <a:solidFill>
                       <a:srgbClr val="F5F0E8"/>
                     </a:solidFill>
@@ -4823,7 +4823,7 @@
                       </a:r>
                     </a:p>
                   </a:txBody>
-                  <a:tcPr>
+                  <a:tcPr marL="45720" marR="45720" marT="18288" marB="18288">
                     <a:solidFill>
                       <a:srgbClr val="F5F0E8"/>
                     </a:solidFill>
@@ -4847,7 +4847,7 @@
                       </a:r>
                     </a:p>
                   </a:txBody>
-                  <a:tcPr>
+                  <a:tcPr marL="45720" marR="45720" marT="18288" marB="18288">
                     <a:solidFill>
                       <a:srgbClr val="F5F0E8"/>
                     </a:solidFill>
@@ -4873,7 +4873,7 @@
                       </a:r>
                     </a:p>
                   </a:txBody>
-                  <a:tcPr>
+                  <a:tcPr marL="45720" marR="45720" marT="18288" marB="18288">
                     <a:solidFill>
                       <a:srgbClr val="E8F0F0"/>
                     </a:solidFill>
@@ -4897,7 +4897,7 @@
                       </a:r>
                     </a:p>
                   </a:txBody>
-                  <a:tcPr>
+                  <a:tcPr marL="45720" marR="45720" marT="18288" marB="18288">
                     <a:solidFill>
                       <a:srgbClr val="E8F0F0"/>
                     </a:solidFill>
@@ -4921,7 +4921,7 @@
                       </a:r>
                     </a:p>
                   </a:txBody>
-                  <a:tcPr>
+                  <a:tcPr marL="45720" marR="45720" marT="18288" marB="18288">
                     <a:solidFill>
                       <a:srgbClr val="E8F0F0"/>
                     </a:solidFill>
@@ -4947,7 +4947,7 @@
                       </a:r>
                     </a:p>
                   </a:txBody>
-                  <a:tcPr>
+                  <a:tcPr marL="45720" marR="45720" marT="18288" marB="18288">
                     <a:solidFill>
                       <a:srgbClr val="F5F0E8"/>
                     </a:solidFill>
@@ -4971,7 +4971,7 @@
                       </a:r>
                     </a:p>
                   </a:txBody>
-                  <a:tcPr>
+                  <a:tcPr marL="45720" marR="45720" marT="18288" marB="18288">
                     <a:solidFill>
                       <a:srgbClr val="F5F0E8"/>
                     </a:solidFill>
@@ -4995,7 +4995,7 @@
                       </a:r>
                     </a:p>
                   </a:txBody>
-                  <a:tcPr>
+                  <a:tcPr marL="45720" marR="45720" marT="18288" marB="18288">
                     <a:solidFill>
                       <a:srgbClr val="F5F0E8"/>
                     </a:solidFill>
@@ -5023,7 +5023,7 @@
           <a:noFill/>
         </p:spPr>
         <p:txBody>
-          <a:bodyPr wrap="square">
+          <a:bodyPr wrap="square" lIns="45720" rIns="45720" tIns="27432" bIns="27432">
             <a:spAutoFit/>
           </a:bodyPr>
           <a:lstStyle/>
@@ -5059,7 +5059,7 @@
           <a:noFill/>
         </p:spPr>
         <p:txBody>
-          <a:bodyPr wrap="square">
+          <a:bodyPr wrap="square" lIns="45720" rIns="45720" tIns="27432" bIns="27432">
             <a:spAutoFit/>
           </a:bodyPr>
           <a:lstStyle/>
@@ -5394,7 +5394,7 @@
           <a:noFill/>
         </p:spPr>
         <p:txBody>
-          <a:bodyPr wrap="square">
+          <a:bodyPr wrap="square" lIns="45720" rIns="45720" tIns="27432" bIns="27432">
             <a:spAutoFit/>
           </a:bodyPr>
           <a:lstStyle/>
@@ -5503,7 +5503,7 @@
           <a:noFill/>
         </p:spPr>
         <p:txBody>
-          <a:bodyPr wrap="square">
+          <a:bodyPr wrap="square" lIns="45720" rIns="45720" tIns="27432" bIns="27432">
             <a:spAutoFit/>
           </a:bodyPr>
           <a:lstStyle/>
@@ -5539,7 +5539,7 @@
           <a:noFill/>
         </p:spPr>
         <p:txBody>
-          <a:bodyPr wrap="square">
+          <a:bodyPr wrap="square" lIns="45720" rIns="45720" tIns="27432" bIns="27432">
             <a:spAutoFit/>
           </a:bodyPr>
           <a:lstStyle/>
@@ -5600,7 +5600,7 @@
                       </a:r>
                     </a:p>
                   </a:txBody>
-                  <a:tcPr>
+                  <a:tcPr marL="45720" marR="45720" marT="18288" marB="18288">
                     <a:solidFill>
                       <a:srgbClr val="0D2B3E"/>
                     </a:solidFill>
@@ -5624,7 +5624,7 @@
                       </a:r>
                     </a:p>
                   </a:txBody>
-                  <a:tcPr>
+                  <a:tcPr marL="45720" marR="45720" marT="18288" marB="18288">
                     <a:solidFill>
                       <a:srgbClr val="0D2B3E"/>
                     </a:solidFill>
@@ -5648,7 +5648,7 @@
                       </a:r>
                     </a:p>
                   </a:txBody>
-                  <a:tcPr>
+                  <a:tcPr marL="45720" marR="45720" marT="18288" marB="18288">
                     <a:solidFill>
                       <a:srgbClr val="0D2B3E"/>
                     </a:solidFill>
@@ -5674,7 +5674,7 @@
                       </a:r>
                     </a:p>
                   </a:txBody>
-                  <a:tcPr>
+                  <a:tcPr marL="45720" marR="45720" marT="18288" marB="18288">
                     <a:solidFill>
                       <a:srgbClr val="E8F0F0"/>
                     </a:solidFill>
@@ -5698,7 +5698,7 @@
                       </a:r>
                     </a:p>
                   </a:txBody>
-                  <a:tcPr>
+                  <a:tcPr marL="45720" marR="45720" marT="18288" marB="18288">
                     <a:solidFill>
                       <a:srgbClr val="E8F0F0"/>
                     </a:solidFill>
@@ -5722,7 +5722,7 @@
                       </a:r>
                     </a:p>
                   </a:txBody>
-                  <a:tcPr>
+                  <a:tcPr marL="45720" marR="45720" marT="18288" marB="18288">
                     <a:solidFill>
                       <a:srgbClr val="E8F0F0"/>
                     </a:solidFill>
@@ -5748,7 +5748,7 @@
                       </a:r>
                     </a:p>
                   </a:txBody>
-                  <a:tcPr>
+                  <a:tcPr marL="45720" marR="45720" marT="18288" marB="18288">
                     <a:solidFill>
                       <a:srgbClr val="F5F0E8"/>
                     </a:solidFill>
@@ -5772,7 +5772,7 @@
                       </a:r>
                     </a:p>
                   </a:txBody>
-                  <a:tcPr>
+                  <a:tcPr marL="45720" marR="45720" marT="18288" marB="18288">
                     <a:solidFill>
                       <a:srgbClr val="F5F0E8"/>
                     </a:solidFill>
@@ -5796,7 +5796,7 @@
                       </a:r>
                     </a:p>
                   </a:txBody>
-                  <a:tcPr>
+                  <a:tcPr marL="45720" marR="45720" marT="18288" marB="18288">
                     <a:solidFill>
                       <a:srgbClr val="F5F0E8"/>
                     </a:solidFill>
@@ -5822,7 +5822,7 @@
                       </a:r>
                     </a:p>
                   </a:txBody>
-                  <a:tcPr>
+                  <a:tcPr marL="45720" marR="45720" marT="18288" marB="18288">
                     <a:solidFill>
                       <a:srgbClr val="E8F0F0"/>
                     </a:solidFill>
@@ -5846,7 +5846,7 @@
                       </a:r>
                     </a:p>
                   </a:txBody>
-                  <a:tcPr>
+                  <a:tcPr marL="45720" marR="45720" marT="18288" marB="18288">
                     <a:solidFill>
                       <a:srgbClr val="E8F0F0"/>
                     </a:solidFill>
@@ -5870,7 +5870,7 @@
                       </a:r>
                     </a:p>
                   </a:txBody>
-                  <a:tcPr>
+                  <a:tcPr marL="45720" marR="45720" marT="18288" marB="18288">
                     <a:solidFill>
                       <a:srgbClr val="E8F0F0"/>
                     </a:solidFill>
@@ -5898,7 +5898,7 @@
           <a:noFill/>
         </p:spPr>
         <p:txBody>
-          <a:bodyPr wrap="square">
+          <a:bodyPr wrap="square" lIns="45720" rIns="45720" tIns="27432" bIns="27432">
             <a:spAutoFit/>
           </a:bodyPr>
           <a:lstStyle/>
@@ -5958,7 +5958,7 @@
                       </a:r>
                     </a:p>
                   </a:txBody>
-                  <a:tcPr>
+                  <a:tcPr marL="45720" marR="45720" marT="18288" marB="18288">
                     <a:solidFill>
                       <a:srgbClr val="0D2B3E"/>
                     </a:solidFill>
@@ -5982,7 +5982,7 @@
                       </a:r>
                     </a:p>
                   </a:txBody>
-                  <a:tcPr>
+                  <a:tcPr marL="45720" marR="45720" marT="18288" marB="18288">
                     <a:solidFill>
                       <a:srgbClr val="0D2B3E"/>
                     </a:solidFill>
@@ -6008,7 +6008,7 @@
                       </a:r>
                     </a:p>
                   </a:txBody>
-                  <a:tcPr>
+                  <a:tcPr marL="45720" marR="45720" marT="18288" marB="18288">
                     <a:solidFill>
                       <a:srgbClr val="E8F0F0"/>
                     </a:solidFill>
@@ -6032,7 +6032,7 @@
                       </a:r>
                     </a:p>
                   </a:txBody>
-                  <a:tcPr>
+                  <a:tcPr marL="45720" marR="45720" marT="18288" marB="18288">
                     <a:solidFill>
                       <a:srgbClr val="E8F0F0"/>
                     </a:solidFill>
@@ -6058,7 +6058,7 @@
                       </a:r>
                     </a:p>
                   </a:txBody>
-                  <a:tcPr>
+                  <a:tcPr marL="45720" marR="45720" marT="18288" marB="18288">
                     <a:solidFill>
                       <a:srgbClr val="F5F0E8"/>
                     </a:solidFill>
@@ -6082,7 +6082,7 @@
                       </a:r>
                     </a:p>
                   </a:txBody>
-                  <a:tcPr>
+                  <a:tcPr marL="45720" marR="45720" marT="18288" marB="18288">
                     <a:solidFill>
                       <a:srgbClr val="F5F0E8"/>
                     </a:solidFill>
@@ -6108,7 +6108,7 @@
                       </a:r>
                     </a:p>
                   </a:txBody>
-                  <a:tcPr>
+                  <a:tcPr marL="45720" marR="45720" marT="18288" marB="18288">
                     <a:solidFill>
                       <a:srgbClr val="E8F0F0"/>
                     </a:solidFill>
@@ -6132,7 +6132,7 @@
                       </a:r>
                     </a:p>
                   </a:txBody>
-                  <a:tcPr>
+                  <a:tcPr marL="45720" marR="45720" marT="18288" marB="18288">
                     <a:solidFill>
                       <a:srgbClr val="E8F0F0"/>
                     </a:solidFill>
@@ -6158,7 +6158,7 @@
                       </a:r>
                     </a:p>
                   </a:txBody>
-                  <a:tcPr>
+                  <a:tcPr marL="45720" marR="45720" marT="18288" marB="18288">
                     <a:solidFill>
                       <a:srgbClr val="F5F0E8"/>
                     </a:solidFill>
@@ -6182,7 +6182,7 @@
                       </a:r>
                     </a:p>
                   </a:txBody>
-                  <a:tcPr>
+                  <a:tcPr marL="45720" marR="45720" marT="18288" marB="18288">
                     <a:solidFill>
                       <a:srgbClr val="F5F0E8"/>
                     </a:solidFill>
@@ -6208,7 +6208,7 @@
                       </a:r>
                     </a:p>
                   </a:txBody>
-                  <a:tcPr>
+                  <a:tcPr marL="45720" marR="45720" marT="18288" marB="18288">
                     <a:solidFill>
                       <a:srgbClr val="E8F0F0"/>
                     </a:solidFill>
@@ -6232,7 +6232,7 @@
                       </a:r>
                     </a:p>
                   </a:txBody>
-                  <a:tcPr>
+                  <a:tcPr marL="45720" marR="45720" marT="18288" marB="18288">
                     <a:solidFill>
                       <a:srgbClr val="E8F0F0"/>
                     </a:solidFill>
@@ -6348,7 +6348,7 @@
           <a:noFill/>
         </p:spPr>
         <p:txBody>
-          <a:bodyPr wrap="square">
+          <a:bodyPr wrap="square" lIns="45720" rIns="45720" tIns="27432" bIns="27432">
             <a:spAutoFit/>
           </a:bodyPr>
           <a:lstStyle/>
@@ -6388,7 +6388,7 @@
           <a:noFill/>
         </p:spPr>
         <p:txBody>
-          <a:bodyPr wrap="square">
+          <a:bodyPr wrap="square" lIns="45720" rIns="45720" tIns="27432" bIns="27432">
             <a:spAutoFit/>
           </a:bodyPr>
           <a:lstStyle/>
@@ -6522,7 +6522,7 @@
           <a:noFill/>
         </p:spPr>
         <p:txBody>
-          <a:bodyPr wrap="square">
+          <a:bodyPr wrap="square" lIns="45720" rIns="45720" tIns="27432" bIns="27432">
             <a:spAutoFit/>
           </a:bodyPr>
           <a:lstStyle/>
@@ -6558,7 +6558,7 @@
           <a:noFill/>
         </p:spPr>
         <p:txBody>
-          <a:bodyPr wrap="square">
+          <a:bodyPr wrap="square" lIns="45720" rIns="45720" tIns="27432" bIns="27432">
             <a:spAutoFit/>
           </a:bodyPr>
           <a:lstStyle/>
@@ -6639,7 +6639,7 @@
           <a:noFill/>
         </p:spPr>
         <p:txBody>
-          <a:bodyPr wrap="square">
+          <a:bodyPr wrap="square" lIns="45720" rIns="45720" tIns="27432" bIns="27432">
             <a:spAutoFit/>
           </a:bodyPr>
           <a:lstStyle/>
@@ -6675,7 +6675,7 @@
           <a:noFill/>
         </p:spPr>
         <p:txBody>
-          <a:bodyPr wrap="square">
+          <a:bodyPr wrap="square" lIns="45720" rIns="45720" tIns="27432" bIns="27432">
             <a:spAutoFit/>
           </a:bodyPr>
           <a:lstStyle/>
@@ -6756,7 +6756,7 @@
           <a:noFill/>
         </p:spPr>
         <p:txBody>
-          <a:bodyPr wrap="square">
+          <a:bodyPr wrap="square" lIns="45720" rIns="45720" tIns="27432" bIns="27432">
             <a:spAutoFit/>
           </a:bodyPr>
           <a:lstStyle/>
@@ -6792,7 +6792,7 @@
           <a:noFill/>
         </p:spPr>
         <p:txBody>
-          <a:bodyPr wrap="square">
+          <a:bodyPr wrap="square" lIns="45720" rIns="45720" tIns="27432" bIns="27432">
             <a:spAutoFit/>
           </a:bodyPr>
           <a:lstStyle/>
@@ -6873,7 +6873,7 @@
           <a:noFill/>
         </p:spPr>
         <p:txBody>
-          <a:bodyPr wrap="square">
+          <a:bodyPr wrap="square" lIns="45720" rIns="45720" tIns="27432" bIns="27432">
             <a:spAutoFit/>
           </a:bodyPr>
           <a:lstStyle/>
@@ -6909,7 +6909,7 @@
           <a:noFill/>
         </p:spPr>
         <p:txBody>
-          <a:bodyPr wrap="square">
+          <a:bodyPr wrap="square" lIns="45720" rIns="45720" tIns="27432" bIns="27432">
             <a:spAutoFit/>
           </a:bodyPr>
           <a:lstStyle/>
@@ -6945,7 +6945,7 @@
           <a:noFill/>
         </p:spPr>
         <p:txBody>
-          <a:bodyPr wrap="square">
+          <a:bodyPr wrap="square" lIns="45720" rIns="45720" tIns="27432" bIns="27432">
             <a:spAutoFit/>
           </a:bodyPr>
           <a:lstStyle/>
@@ -7050,7 +7050,7 @@
           <a:noFill/>
         </p:spPr>
         <p:txBody>
-          <a:bodyPr wrap="square">
+          <a:bodyPr wrap="square" lIns="45720" rIns="45720" tIns="27432" bIns="27432">
             <a:spAutoFit/>
           </a:bodyPr>
           <a:lstStyle/>
@@ -7086,7 +7086,7 @@
           <a:noFill/>
         </p:spPr>
         <p:txBody>
-          <a:bodyPr wrap="square">
+          <a:bodyPr wrap="square" lIns="45720" rIns="45720" tIns="27432" bIns="27432">
             <a:spAutoFit/>
           </a:bodyPr>
           <a:lstStyle/>
@@ -7165,7 +7165,7 @@
           <a:noFill/>
         </p:spPr>
         <p:txBody>
-          <a:bodyPr wrap="square">
+          <a:bodyPr wrap="square" lIns="45720" rIns="45720" tIns="27432" bIns="27432">
             <a:spAutoFit/>
           </a:bodyPr>
           <a:lstStyle/>
@@ -7201,7 +7201,7 @@
           <a:noFill/>
         </p:spPr>
         <p:txBody>
-          <a:bodyPr wrap="square">
+          <a:bodyPr wrap="square" lIns="45720" rIns="45720" tIns="27432" bIns="27432">
             <a:spAutoFit/>
           </a:bodyPr>
           <a:lstStyle/>
@@ -7280,7 +7280,7 @@
           <a:noFill/>
         </p:spPr>
         <p:txBody>
-          <a:bodyPr wrap="square">
+          <a:bodyPr wrap="square" lIns="45720" rIns="45720" tIns="27432" bIns="27432">
             <a:spAutoFit/>
           </a:bodyPr>
           <a:lstStyle/>
@@ -7316,7 +7316,7 @@
           <a:noFill/>
         </p:spPr>
         <p:txBody>
-          <a:bodyPr wrap="square">
+          <a:bodyPr wrap="square" lIns="45720" rIns="45720" tIns="27432" bIns="27432">
             <a:spAutoFit/>
           </a:bodyPr>
           <a:lstStyle/>
@@ -7395,7 +7395,7 @@
           <a:noFill/>
         </p:spPr>
         <p:txBody>
-          <a:bodyPr wrap="square">
+          <a:bodyPr wrap="square" lIns="45720" rIns="45720" tIns="27432" bIns="27432">
             <a:spAutoFit/>
           </a:bodyPr>
           <a:lstStyle/>
@@ -7431,7 +7431,7 @@
           <a:noFill/>
         </p:spPr>
         <p:txBody>
-          <a:bodyPr wrap="square">
+          <a:bodyPr wrap="square" lIns="45720" rIns="45720" tIns="27432" bIns="27432">
             <a:spAutoFit/>
           </a:bodyPr>
           <a:lstStyle/>
@@ -7467,7 +7467,7 @@
           <a:noFill/>
         </p:spPr>
         <p:txBody>
-          <a:bodyPr wrap="square">
+          <a:bodyPr wrap="square" lIns="45720" rIns="45720" tIns="27432" bIns="27432">
             <a:spAutoFit/>
           </a:bodyPr>
           <a:lstStyle/>
@@ -7591,7 +7591,7 @@
           <a:noFill/>
         </p:spPr>
         <p:txBody>
-          <a:bodyPr wrap="square">
+          <a:bodyPr wrap="square" lIns="45720" rIns="45720" tIns="27432" bIns="27432">
             <a:spAutoFit/>
           </a:bodyPr>
           <a:lstStyle/>
@@ -7631,7 +7631,7 @@
           <a:noFill/>
         </p:spPr>
         <p:txBody>
-          <a:bodyPr wrap="square">
+          <a:bodyPr wrap="square" lIns="45720" rIns="45720" tIns="27432" bIns="27432">
             <a:spAutoFit/>
           </a:bodyPr>
           <a:lstStyle/>
@@ -7667,7 +7667,7 @@
           <a:noFill/>
         </p:spPr>
         <p:txBody>
-          <a:bodyPr wrap="square">
+          <a:bodyPr wrap="square" lIns="45720" rIns="45720" tIns="27432" bIns="27432">
             <a:spAutoFit/>
           </a:bodyPr>
           <a:lstStyle/>
@@ -7732,7 +7732,7 @@
           <a:noFill/>
         </p:spPr>
         <p:txBody>
-          <a:bodyPr wrap="square">
+          <a:bodyPr wrap="square" lIns="45720" rIns="45720" tIns="27432" bIns="27432">
             <a:spAutoFit/>
           </a:bodyPr>
           <a:lstStyle/>

--- a/output/education/2026-03-27_family-medicine-board-revision/family-medicine-board-revision_slides_residents.pptx
+++ b/output/education/2026-03-27_family-medicine-board-revision/family-medicine-board-revision_slides_residents.pptx
@@ -3203,7 +3203,7 @@
           <a:lstStyle/>
           <a:p>
             <a:pPr algn="l">
-              <a:defRPr sz="1400" b="0">
+              <a:defRPr sz="1300" b="0">
                 <a:solidFill>
                   <a:srgbClr val="7A8A9A"/>
                 </a:solidFill>
@@ -3224,8 +3224,8 @@
         </p:nvSpPr>
         <p:spPr>
           <a:xfrm>
-            <a:off x="5303520" y="365760"/>
-            <a:ext cx="3474720" cy="1554480"/>
+            <a:off x="5029200" y="1371600"/>
+            <a:ext cx="3657600" cy="1828800"/>
           </a:xfrm>
           <a:prstGeom prst="rect">
             <a:avLst/>
@@ -3267,8 +3267,8 @@
         </p:nvSpPr>
         <p:spPr>
           <a:xfrm>
-            <a:off x="5303520" y="411480"/>
-            <a:ext cx="3474720" cy="914400"/>
+            <a:off x="5029200" y="1463040"/>
+            <a:ext cx="3657600" cy="914400"/>
           </a:xfrm>
           <a:prstGeom prst="rect">
             <a:avLst/>
@@ -3282,7 +3282,7 @@
           <a:lstStyle/>
           <a:p>
             <a:pPr algn="ctr">
-              <a:defRPr sz="4400" b="1">
+              <a:defRPr sz="4800" b="1">
                 <a:solidFill>
                   <a:srgbClr val="0D2B3E"/>
                 </a:solidFill>
@@ -3303,8 +3303,8 @@
         </p:nvSpPr>
         <p:spPr>
           <a:xfrm>
-            <a:off x="5303520" y="1234440"/>
-            <a:ext cx="3474720" cy="320040"/>
+            <a:off x="5029200" y="2377440"/>
+            <a:ext cx="3657600" cy="274320"/>
           </a:xfrm>
           <a:prstGeom prst="rect">
             <a:avLst/>
@@ -3318,7 +3318,7 @@
           <a:lstStyle/>
           <a:p>
             <a:pPr algn="ctr">
-              <a:defRPr sz="1300" b="0">
+              <a:defRPr sz="1200" b="0">
                 <a:solidFill>
                   <a:srgbClr val="0D2B3E"/>
                 </a:solidFill>
@@ -3326,7 +3326,7 @@
               </a:defRPr>
             </a:pPr>
             <a:r>
-              <a:t>ポートフォリオ領域 2割削減</a:t>
+              <a:t>ポートフォリオ領域</a:t>
             </a:r>
           </a:p>
         </p:txBody>
@@ -3339,8 +3339,8 @@
         </p:nvSpPr>
         <p:spPr>
           <a:xfrm>
-            <a:off x="5303520" y="1554480"/>
-            <a:ext cx="3474720" cy="274320"/>
+            <a:off x="5029200" y="2651760"/>
+            <a:ext cx="3657600" cy="274320"/>
           </a:xfrm>
           <a:prstGeom prst="rect">
             <a:avLst/>
@@ -3354,7 +3354,7 @@
           <a:lstStyle/>
           <a:p>
             <a:pPr algn="ctr">
-              <a:defRPr sz="1200" b="0">
+              <a:defRPr sz="1400" b="1">
                 <a:solidFill>
                   <a:srgbClr val="0D2B3E"/>
                 </a:solidFill>
@@ -3362,7 +3362,7 @@
               </a:defRPr>
             </a:pPr>
             <a:r>
-              <a:t>学会発表 3件→2件</a:t>
+              <a:t>2割削減</a:t>
             </a:r>
           </a:p>
         </p:txBody>
@@ -3375,8 +3375,8 @@
         </p:nvSpPr>
         <p:spPr>
           <a:xfrm>
-            <a:off x="640080" y="1554480"/>
-            <a:ext cx="54864" cy="548640"/>
+            <a:off x="640080" y="1645920"/>
+            <a:ext cx="54864" cy="731520"/>
           </a:xfrm>
           <a:prstGeom prst="rect">
             <a:avLst/>
@@ -3418,8 +3418,8 @@
         </p:nvSpPr>
         <p:spPr>
           <a:xfrm>
-            <a:off x="749808" y="1554480"/>
-            <a:ext cx="4279392" cy="548640"/>
+            <a:off x="749808" y="1645920"/>
+            <a:ext cx="4005072" cy="731520"/>
           </a:xfrm>
           <a:prstGeom prst="rect">
             <a:avLst/>
@@ -3463,8 +3463,8 @@
         </p:nvSpPr>
         <p:spPr>
           <a:xfrm>
-            <a:off x="868680" y="1627632"/>
-            <a:ext cx="4023359" cy="402335"/>
+            <a:off x="868680" y="1719072"/>
+            <a:ext cx="3749039" cy="585216"/>
           </a:xfrm>
           <a:prstGeom prst="rect">
             <a:avLst/>
@@ -3478,7 +3478,7 @@
           <a:lstStyle/>
           <a:p>
             <a:pPr algn="l">
-              <a:defRPr sz="1200" b="0">
+              <a:defRPr sz="1300" b="0">
                 <a:solidFill>
                   <a:srgbClr val="1A1A2E"/>
                 </a:solidFill>
@@ -3486,7 +3486,11 @@
               </a:defRPr>
             </a:pPr>
             <a:r>
-              <a:t>これは「楽になった」のか？ それとも「質がもっと問われる」のか？</a:t>
+              <a:t>これは「楽になった」のか？</a:t>
+            </a:r>
+            <a:br/>
+            <a:r>
+              <a:t>それとも「質がもっと問われる」のか？</a:t>
             </a:r>
           </a:p>
         </p:txBody>
@@ -3499,8 +3503,8 @@
         </p:nvSpPr>
         <p:spPr>
           <a:xfrm>
-            <a:off x="640080" y="2377440"/>
-            <a:ext cx="4572000" cy="320040"/>
+            <a:off x="640080" y="2743200"/>
+            <a:ext cx="4572000" cy="274320"/>
           </a:xfrm>
           <a:prstGeom prst="rect">
             <a:avLst/>
@@ -3514,7 +3518,7 @@
           <a:lstStyle/>
           <a:p>
             <a:pPr algn="l">
-              <a:defRPr sz="1400" b="1">
+              <a:defRPr sz="1300" b="1">
                 <a:solidFill>
                   <a:srgbClr val="E89B3B"/>
                 </a:solidFill>
@@ -3535,7 +3539,7 @@
         </p:nvSpPr>
         <p:spPr>
           <a:xfrm>
-            <a:off x="640080" y="2743200"/>
+            <a:off x="640080" y="3108960"/>
             <a:ext cx="5029200" cy="1371600"/>
           </a:xfrm>
           <a:prstGeom prst="rect">
@@ -3550,7 +3554,7 @@
           <a:lstStyle/>
           <a:p>
             <a:pPr>
-              <a:defRPr sz="1200">
+              <a:defRPr sz="1100">
                 <a:solidFill>
                   <a:srgbClr val="F5F0E8"/>
                 </a:solidFill>
@@ -3559,12 +3563,12 @@
               <a:buChar char="●"/>
             </a:pPr>
             <a:r>
-              <a:t>説明できる — 制度変更の具体的内容と背景（理解）</a:t>
+              <a:t>説明できる — 制度変更の具体的内容と背景</a:t>
             </a:r>
           </a:p>
           <a:p>
             <a:pPr>
-              <a:defRPr sz="1200">
+              <a:defRPr sz="1100">
                 <a:solidFill>
                   <a:srgbClr val="F5F0E8"/>
                 </a:solidFill>
@@ -3573,12 +3577,12 @@
               <a:buChar char="●"/>
             </a:pPr>
             <a:r>
-              <a:t>比較できる — 旧制度と新制度の差分を分析（分析）</a:t>
+              <a:t>比較できる — 旧制度と新制度の差分を分析</a:t>
             </a:r>
           </a:p>
           <a:p>
             <a:pPr>
-              <a:defRPr sz="1200">
+              <a:defRPr sz="1100">
                 <a:solidFill>
                   <a:srgbClr val="F5F0E8"/>
                 </a:solidFill>
@@ -3587,7 +3591,7 @@
               <a:buChar char="●"/>
             </a:pPr>
             <a:r>
-              <a:t>立案できる — ポートフォリオ戦略を描ける（創造）</a:t>
+              <a:t>立案できる — ポートフォリオ戦略を描ける</a:t>
             </a:r>
           </a:p>
         </p:txBody>
@@ -3728,57 +3732,21 @@
               </a:defRPr>
             </a:pPr>
             <a:r>
-              <a:t>Quick Poll — 今の知識を確認しよう</a:t>
-            </a:r>
-          </a:p>
-        </p:txBody>
-      </p:sp>
-      <p:sp>
-        <p:nvSpPr>
-          <p:cNvPr id="4" name="TextBox 3"/>
-          <p:cNvSpPr txBox="1"/>
-          <p:nvPr/>
-        </p:nvSpPr>
-        <p:spPr>
-          <a:xfrm>
-            <a:off x="640080" y="822960"/>
-            <a:ext cx="4572000" cy="274320"/>
-          </a:xfrm>
-          <a:prstGeom prst="rect">
-            <a:avLst/>
-          </a:prstGeom>
-          <a:noFill/>
-        </p:spPr>
-        <p:txBody>
-          <a:bodyPr wrap="square" lIns="45720" rIns="45720" tIns="27432" bIns="27432">
-            <a:spAutoFit/>
-          </a:bodyPr>
-          <a:lstStyle/>
-          <a:p>
-            <a:pPr algn="l">
-              <a:defRPr sz="1000" b="0">
-                <a:solidFill>
-                  <a:srgbClr val="7A8A9A"/>
-                </a:solidFill>
-                <a:latin typeface="Calibri"/>
-              </a:defRPr>
-            </a:pPr>
-            <a:r>
-              <a:t>事象3: 前提条件の想起 | 2-4分</a:t>
-            </a:r>
-          </a:p>
-        </p:txBody>
-      </p:sp>
-      <p:sp>
-        <p:nvSpPr>
-          <p:cNvPr id="5" name="Rectangle 4"/>
+              <a:t>Quick Poll</a:t>
+            </a:r>
+          </a:p>
+        </p:txBody>
+      </p:sp>
+      <p:sp>
+        <p:nvSpPr>
+          <p:cNvPr id="4" name="Rectangle 3"/>
           <p:cNvSpPr/>
           <p:nvPr/>
         </p:nvSpPr>
         <p:spPr>
           <a:xfrm>
-            <a:off x="731520" y="1371600"/>
-            <a:ext cx="7680960" cy="777240"/>
+            <a:off x="731520" y="1097280"/>
+            <a:ext cx="7680960" cy="822960"/>
           </a:xfrm>
           <a:prstGeom prst="rect">
             <a:avLst/>
@@ -3816,14 +3784,14 @@
       </p:sp>
       <p:sp>
         <p:nvSpPr>
-          <p:cNvPr id="6" name="TextBox 5"/>
+          <p:cNvPr id="5" name="TextBox 4"/>
           <p:cNvSpPr txBox="1"/>
           <p:nvPr/>
         </p:nvSpPr>
         <p:spPr>
           <a:xfrm>
-            <a:off x="914400" y="1508760"/>
-            <a:ext cx="7315200" cy="502920"/>
+            <a:off x="914400" y="1234439"/>
+            <a:ext cx="7315200" cy="548640"/>
           </a:xfrm>
           <a:prstGeom prst="rect">
             <a:avLst/>
@@ -3852,14 +3820,14 @@
       </p:sp>
       <p:sp>
         <p:nvSpPr>
-          <p:cNvPr id="7" name="Rectangle 6"/>
+          <p:cNvPr id="6" name="Rectangle 5"/>
           <p:cNvSpPr/>
           <p:nvPr/>
         </p:nvSpPr>
         <p:spPr>
           <a:xfrm>
-            <a:off x="731520" y="2377440"/>
-            <a:ext cx="7680960" cy="777240"/>
+            <a:off x="731520" y="2194560"/>
+            <a:ext cx="7680960" cy="822960"/>
           </a:xfrm>
           <a:prstGeom prst="rect">
             <a:avLst/>
@@ -3897,14 +3865,14 @@
       </p:sp>
       <p:sp>
         <p:nvSpPr>
-          <p:cNvPr id="8" name="TextBox 7"/>
+          <p:cNvPr id="7" name="TextBox 6"/>
           <p:cNvSpPr txBox="1"/>
           <p:nvPr/>
         </p:nvSpPr>
         <p:spPr>
           <a:xfrm>
-            <a:off x="914400" y="2514600"/>
-            <a:ext cx="7315200" cy="502920"/>
+            <a:off x="914400" y="2331720"/>
+            <a:ext cx="7315200" cy="548640"/>
           </a:xfrm>
           <a:prstGeom prst="rect">
             <a:avLst/>
@@ -3933,14 +3901,14 @@
       </p:sp>
       <p:sp>
         <p:nvSpPr>
-          <p:cNvPr id="9" name="Rectangle 8"/>
+          <p:cNvPr id="8" name="Rectangle 7"/>
           <p:cNvSpPr/>
           <p:nvPr/>
         </p:nvSpPr>
         <p:spPr>
           <a:xfrm>
-            <a:off x="731520" y="3383280"/>
-            <a:ext cx="7680960" cy="777240"/>
+            <a:off x="731520" y="3291839"/>
+            <a:ext cx="7680960" cy="822960"/>
           </a:xfrm>
           <a:prstGeom prst="rect">
             <a:avLst/>
@@ -3978,14 +3946,14 @@
       </p:sp>
       <p:sp>
         <p:nvSpPr>
-          <p:cNvPr id="10" name="TextBox 9"/>
+          <p:cNvPr id="9" name="TextBox 8"/>
           <p:cNvSpPr txBox="1"/>
           <p:nvPr/>
         </p:nvSpPr>
         <p:spPr>
           <a:xfrm>
-            <a:off x="914400" y="3520440"/>
-            <a:ext cx="7315200" cy="502920"/>
+            <a:off x="914400" y="3428999"/>
+            <a:ext cx="7315200" cy="548640"/>
           </a:xfrm>
           <a:prstGeom prst="rect">
             <a:avLst/>
@@ -4014,14 +3982,14 @@
       </p:sp>
       <p:sp>
         <p:nvSpPr>
-          <p:cNvPr id="11" name="Rectangle 10"/>
+          <p:cNvPr id="10" name="Rectangle 9"/>
           <p:cNvSpPr/>
           <p:nvPr/>
         </p:nvSpPr>
         <p:spPr>
           <a:xfrm>
-            <a:off x="731520" y="4434840"/>
-            <a:ext cx="54864" cy="502920"/>
+            <a:off x="731520" y="4389120"/>
+            <a:ext cx="54864" cy="548640"/>
           </a:xfrm>
           <a:prstGeom prst="rect">
             <a:avLst/>
@@ -4057,14 +4025,14 @@
       </p:sp>
       <p:sp>
         <p:nvSpPr>
-          <p:cNvPr id="12" name="Rectangle 11"/>
+          <p:cNvPr id="11" name="Rectangle 10"/>
           <p:cNvSpPr/>
           <p:nvPr/>
         </p:nvSpPr>
         <p:spPr>
           <a:xfrm>
-            <a:off x="841248" y="4434840"/>
-            <a:ext cx="7571232" cy="502920"/>
+            <a:off x="841248" y="4389120"/>
+            <a:ext cx="7571232" cy="548640"/>
           </a:xfrm>
           <a:prstGeom prst="rect">
             <a:avLst/>
@@ -4102,14 +4070,14 @@
       </p:sp>
       <p:sp>
         <p:nvSpPr>
-          <p:cNvPr id="13" name="TextBox 12"/>
+          <p:cNvPr id="12" name="TextBox 11"/>
           <p:cNvSpPr txBox="1"/>
           <p:nvPr/>
         </p:nvSpPr>
         <p:spPr>
           <a:xfrm>
-            <a:off x="960120" y="4507992"/>
-            <a:ext cx="7315200" cy="356616"/>
+            <a:off x="960120" y="4462272"/>
+            <a:ext cx="7315200" cy="402335"/>
           </a:xfrm>
           <a:prstGeom prst="rect">
             <a:avLst/>
@@ -4131,7 +4099,11 @@
               </a:defRPr>
             </a:pPr>
             <a:r>
-              <a:t>今、専門医制度と医療政策が同時に大きく動いています。研修医・専攻医にとって「制度を知る」ことは、キャリア戦略そのものです。</a:t>
+              <a:t>専門医制度と医療政策が同時に動いています。</a:t>
+            </a:r>
+            <a:br/>
+            <a:r>
+              <a:t>「制度を知る」ことは、キャリア戦略そのものです。</a:t>
             </a:r>
           </a:p>
         </p:txBody>
@@ -4145,6 +4117,835 @@
 </file>
 
 <file path=ppt/slides/slide3.xml><?xml version="1.0" encoding="utf-8"?>
+<p:sld xmlns:a="http://schemas.openxmlformats.org/drawingml/2006/main" xmlns:p="http://schemas.openxmlformats.org/presentationml/2006/main" xmlns:r="http://schemas.openxmlformats.org/officeDocument/2006/relationships">
+  <p:cSld>
+    <p:bg>
+      <p:bgPr>
+        <a:solidFill>
+          <a:srgbClr val="0D2B3E"/>
+        </a:solidFill>
+        <a:effectLst/>
+      </p:bgPr>
+    </p:bg>
+    <p:spTree>
+      <p:nvGrpSpPr>
+        <p:cNvPr id="1" name=""/>
+        <p:cNvGrpSpPr/>
+        <p:nvPr/>
+      </p:nvGrpSpPr>
+      <p:grpSpPr/>
+      <p:sp>
+        <p:nvSpPr>
+          <p:cNvPr id="2" name="Rectangle 1"/>
+          <p:cNvSpPr/>
+          <p:nvPr/>
+        </p:nvSpPr>
+        <p:spPr>
+          <a:xfrm>
+            <a:off x="365760" y="274320"/>
+            <a:ext cx="73152" cy="4480560"/>
+          </a:xfrm>
+          <a:prstGeom prst="rect">
+            <a:avLst/>
+          </a:prstGeom>
+          <a:solidFill>
+            <a:srgbClr val="E89B3B"/>
+          </a:solidFill>
+          <a:ln>
+            <a:noFill/>
+          </a:ln>
+        </p:spPr>
+        <p:style>
+          <a:lnRef idx="1">
+            <a:schemeClr val="accent1"/>
+          </a:lnRef>
+          <a:fillRef idx="3">
+            <a:schemeClr val="accent1"/>
+          </a:fillRef>
+          <a:effectRef idx="2">
+            <a:schemeClr val="accent1"/>
+          </a:effectRef>
+          <a:fontRef idx="minor">
+            <a:schemeClr val="lt1"/>
+          </a:fontRef>
+        </p:style>
+        <p:txBody>
+          <a:bodyPr rtlCol="0" anchor="ctr"/>
+          <a:lstStyle/>
+          <a:p>
+            <a:pPr algn="ctr"/>
+          </a:p>
+        </p:txBody>
+      </p:sp>
+      <p:sp>
+        <p:nvSpPr>
+          <p:cNvPr id="3" name="TextBox 2"/>
+          <p:cNvSpPr txBox="1"/>
+          <p:nvPr/>
+        </p:nvSpPr>
+        <p:spPr>
+          <a:xfrm>
+            <a:off x="640080" y="274320"/>
+            <a:ext cx="5486400" cy="457200"/>
+          </a:xfrm>
+          <a:prstGeom prst="rect">
+            <a:avLst/>
+          </a:prstGeom>
+          <a:noFill/>
+        </p:spPr>
+        <p:txBody>
+          <a:bodyPr wrap="square" lIns="45720" rIns="45720" tIns="27432" bIns="27432">
+            <a:spAutoFit/>
+          </a:bodyPr>
+          <a:lstStyle/>
+          <a:p>
+            <a:pPr algn="l">
+              <a:defRPr sz="2200" b="1">
+                <a:solidFill>
+                  <a:srgbClr val="F5F0E8"/>
+                </a:solidFill>
+                <a:latin typeface="Calibri"/>
+              </a:defRPr>
+            </a:pPr>
+            <a:r>
+              <a:t>何が変わった？</a:t>
+            </a:r>
+          </a:p>
+        </p:txBody>
+      </p:sp>
+      <p:sp>
+        <p:nvSpPr>
+          <p:cNvPr id="4" name="Rectangle 3"/>
+          <p:cNvSpPr/>
+          <p:nvPr/>
+        </p:nvSpPr>
+        <p:spPr>
+          <a:xfrm>
+            <a:off x="457200" y="914400"/>
+            <a:ext cx="3840480" cy="1828800"/>
+          </a:xfrm>
+          <a:prstGeom prst="rect">
+            <a:avLst/>
+          </a:prstGeom>
+          <a:solidFill>
+            <a:srgbClr val="0D2B3E"/>
+          </a:solidFill>
+          <a:ln>
+            <a:noFill/>
+          </a:ln>
+        </p:spPr>
+        <p:style>
+          <a:lnRef idx="1">
+            <a:schemeClr val="accent1"/>
+          </a:lnRef>
+          <a:fillRef idx="3">
+            <a:schemeClr val="accent1"/>
+          </a:fillRef>
+          <a:effectRef idx="2">
+            <a:schemeClr val="accent1"/>
+          </a:effectRef>
+          <a:fontRef idx="minor">
+            <a:schemeClr val="lt1"/>
+          </a:fontRef>
+        </p:style>
+        <p:txBody>
+          <a:bodyPr rtlCol="0" anchor="ctr"/>
+          <a:lstStyle/>
+          <a:p>
+            <a:pPr algn="ctr"/>
+          </a:p>
+        </p:txBody>
+      </p:sp>
+      <p:sp>
+        <p:nvSpPr>
+          <p:cNvPr id="5" name="TextBox 4"/>
+          <p:cNvSpPr txBox="1"/>
+          <p:nvPr/>
+        </p:nvSpPr>
+        <p:spPr>
+          <a:xfrm>
+            <a:off x="457200" y="960120"/>
+            <a:ext cx="3840480" cy="274320"/>
+          </a:xfrm>
+          <a:prstGeom prst="rect">
+            <a:avLst/>
+          </a:prstGeom>
+          <a:noFill/>
+        </p:spPr>
+        <p:txBody>
+          <a:bodyPr wrap="square" lIns="45720" rIns="45720" tIns="27432" bIns="27432">
+            <a:spAutoFit/>
+          </a:bodyPr>
+          <a:lstStyle/>
+          <a:p>
+            <a:pPr algn="ctr">
+              <a:defRPr sz="1200" b="0">
+                <a:solidFill>
+                  <a:srgbClr val="7A8A9A"/>
+                </a:solidFill>
+                <a:latin typeface="Calibri"/>
+              </a:defRPr>
+            </a:pPr>
+            <a:r>
+              <a:t>旧制度</a:t>
+            </a:r>
+          </a:p>
+        </p:txBody>
+      </p:sp>
+      <p:sp>
+        <p:nvSpPr>
+          <p:cNvPr id="6" name="TextBox 5"/>
+          <p:cNvSpPr txBox="1"/>
+          <p:nvPr/>
+        </p:nvSpPr>
+        <p:spPr>
+          <a:xfrm>
+            <a:off x="457200" y="1280160"/>
+            <a:ext cx="3840480" cy="731520"/>
+          </a:xfrm>
+          <a:prstGeom prst="rect">
+            <a:avLst/>
+          </a:prstGeom>
+          <a:noFill/>
+        </p:spPr>
+        <p:txBody>
+          <a:bodyPr wrap="square" lIns="45720" rIns="45720" tIns="27432" bIns="27432">
+            <a:spAutoFit/>
+          </a:bodyPr>
+          <a:lstStyle/>
+          <a:p>
+            <a:pPr algn="ctr">
+              <a:defRPr sz="4000" b="1">
+                <a:solidFill>
+                  <a:srgbClr val="7A8A9A"/>
+                </a:solidFill>
+                <a:latin typeface="Calibri"/>
+              </a:defRPr>
+            </a:pPr>
+            <a:r>
+              <a:t>20領域</a:t>
+            </a:r>
+          </a:p>
+        </p:txBody>
+      </p:sp>
+      <p:sp>
+        <p:nvSpPr>
+          <p:cNvPr id="7" name="TextBox 6"/>
+          <p:cNvSpPr txBox="1"/>
+          <p:nvPr/>
+        </p:nvSpPr>
+        <p:spPr>
+          <a:xfrm>
+            <a:off x="457200" y="2011680"/>
+            <a:ext cx="3840480" cy="365760"/>
+          </a:xfrm>
+          <a:prstGeom prst="rect">
+            <a:avLst/>
+          </a:prstGeom>
+          <a:noFill/>
+        </p:spPr>
+        <p:txBody>
+          <a:bodyPr wrap="square" lIns="45720" rIns="45720" tIns="27432" bIns="27432">
+            <a:spAutoFit/>
+          </a:bodyPr>
+          <a:lstStyle/>
+          <a:p>
+            <a:pPr algn="ctr">
+              <a:defRPr sz="1400" b="0">
+                <a:solidFill>
+                  <a:srgbClr val="7A8A9A"/>
+                </a:solidFill>
+                <a:latin typeface="Calibri"/>
+              </a:defRPr>
+            </a:pPr>
+            <a:r>
+              <a:t>学会発表 3件以上</a:t>
+            </a:r>
+          </a:p>
+        </p:txBody>
+      </p:sp>
+      <p:sp>
+        <p:nvSpPr>
+          <p:cNvPr id="8" name="TextBox 7"/>
+          <p:cNvSpPr txBox="1"/>
+          <p:nvPr/>
+        </p:nvSpPr>
+        <p:spPr>
+          <a:xfrm>
+            <a:off x="4389120" y="1463040"/>
+            <a:ext cx="457200" cy="731520"/>
+          </a:xfrm>
+          <a:prstGeom prst="rect">
+            <a:avLst/>
+          </a:prstGeom>
+          <a:noFill/>
+        </p:spPr>
+        <p:txBody>
+          <a:bodyPr wrap="square" lIns="45720" rIns="45720" tIns="27432" bIns="27432">
+            <a:spAutoFit/>
+          </a:bodyPr>
+          <a:lstStyle/>
+          <a:p>
+            <a:pPr algn="ctr">
+              <a:defRPr sz="3600" b="1">
+                <a:solidFill>
+                  <a:srgbClr val="E89B3B"/>
+                </a:solidFill>
+                <a:latin typeface="Calibri"/>
+              </a:defRPr>
+            </a:pPr>
+            <a:r>
+              <a:t>→</a:t>
+            </a:r>
+          </a:p>
+        </p:txBody>
+      </p:sp>
+      <p:sp>
+        <p:nvSpPr>
+          <p:cNvPr id="9" name="Rectangle 8"/>
+          <p:cNvSpPr/>
+          <p:nvPr/>
+        </p:nvSpPr>
+        <p:spPr>
+          <a:xfrm>
+            <a:off x="5029200" y="914400"/>
+            <a:ext cx="3840480" cy="1828800"/>
+          </a:xfrm>
+          <a:prstGeom prst="rect">
+            <a:avLst/>
+          </a:prstGeom>
+          <a:solidFill>
+            <a:srgbClr val="E89B3B"/>
+          </a:solidFill>
+          <a:ln>
+            <a:noFill/>
+          </a:ln>
+        </p:spPr>
+        <p:style>
+          <a:lnRef idx="1">
+            <a:schemeClr val="accent1"/>
+          </a:lnRef>
+          <a:fillRef idx="3">
+            <a:schemeClr val="accent1"/>
+          </a:fillRef>
+          <a:effectRef idx="2">
+            <a:schemeClr val="accent1"/>
+          </a:effectRef>
+          <a:fontRef idx="minor">
+            <a:schemeClr val="lt1"/>
+          </a:fontRef>
+        </p:style>
+        <p:txBody>
+          <a:bodyPr rtlCol="0" anchor="ctr"/>
+          <a:lstStyle/>
+          <a:p>
+            <a:pPr algn="ctr"/>
+          </a:p>
+        </p:txBody>
+      </p:sp>
+      <p:sp>
+        <p:nvSpPr>
+          <p:cNvPr id="10" name="TextBox 9"/>
+          <p:cNvSpPr txBox="1"/>
+          <p:nvPr/>
+        </p:nvSpPr>
+        <p:spPr>
+          <a:xfrm>
+            <a:off x="5029200" y="960120"/>
+            <a:ext cx="3840480" cy="274320"/>
+          </a:xfrm>
+          <a:prstGeom prst="rect">
+            <a:avLst/>
+          </a:prstGeom>
+          <a:noFill/>
+        </p:spPr>
+        <p:txBody>
+          <a:bodyPr wrap="square" lIns="45720" rIns="45720" tIns="27432" bIns="27432">
+            <a:spAutoFit/>
+          </a:bodyPr>
+          <a:lstStyle/>
+          <a:p>
+            <a:pPr algn="ctr">
+              <a:defRPr sz="1200" b="0">
+                <a:solidFill>
+                  <a:srgbClr val="0D2B3E"/>
+                </a:solidFill>
+                <a:latin typeface="Calibri"/>
+              </a:defRPr>
+            </a:pPr>
+            <a:r>
+              <a:t>新制度</a:t>
+            </a:r>
+          </a:p>
+        </p:txBody>
+      </p:sp>
+      <p:sp>
+        <p:nvSpPr>
+          <p:cNvPr id="11" name="TextBox 10"/>
+          <p:cNvSpPr txBox="1"/>
+          <p:nvPr/>
+        </p:nvSpPr>
+        <p:spPr>
+          <a:xfrm>
+            <a:off x="5029200" y="1280160"/>
+            <a:ext cx="3840480" cy="731520"/>
+          </a:xfrm>
+          <a:prstGeom prst="rect">
+            <a:avLst/>
+          </a:prstGeom>
+          <a:noFill/>
+        </p:spPr>
+        <p:txBody>
+          <a:bodyPr wrap="square" lIns="45720" rIns="45720" tIns="27432" bIns="27432">
+            <a:spAutoFit/>
+          </a:bodyPr>
+          <a:lstStyle/>
+          <a:p>
+            <a:pPr algn="ctr">
+              <a:defRPr sz="4000" b="1">
+                <a:solidFill>
+                  <a:srgbClr val="0D2B3E"/>
+                </a:solidFill>
+                <a:latin typeface="Calibri"/>
+              </a:defRPr>
+            </a:pPr>
+            <a:r>
+              <a:t>16領域</a:t>
+            </a:r>
+          </a:p>
+        </p:txBody>
+      </p:sp>
+      <p:sp>
+        <p:nvSpPr>
+          <p:cNvPr id="12" name="TextBox 11"/>
+          <p:cNvSpPr txBox="1"/>
+          <p:nvPr/>
+        </p:nvSpPr>
+        <p:spPr>
+          <a:xfrm>
+            <a:off x="5029200" y="2011680"/>
+            <a:ext cx="3840480" cy="365760"/>
+          </a:xfrm>
+          <a:prstGeom prst="rect">
+            <a:avLst/>
+          </a:prstGeom>
+          <a:noFill/>
+        </p:spPr>
+        <p:txBody>
+          <a:bodyPr wrap="square" lIns="45720" rIns="45720" tIns="27432" bIns="27432">
+            <a:spAutoFit/>
+          </a:bodyPr>
+          <a:lstStyle/>
+          <a:p>
+            <a:pPr algn="ctr">
+              <a:defRPr sz="1400" b="0">
+                <a:solidFill>
+                  <a:srgbClr val="0D2B3E"/>
+                </a:solidFill>
+                <a:latin typeface="Calibri"/>
+              </a:defRPr>
+            </a:pPr>
+            <a:r>
+              <a:t>学会発表 2件以上</a:t>
+            </a:r>
+          </a:p>
+        </p:txBody>
+      </p:sp>
+      <p:sp>
+        <p:nvSpPr>
+          <p:cNvPr id="13" name="Rectangle 12"/>
+          <p:cNvSpPr/>
+          <p:nvPr/>
+        </p:nvSpPr>
+        <p:spPr>
+          <a:xfrm>
+            <a:off x="457200" y="3017520"/>
+            <a:ext cx="54864" cy="731520"/>
+          </a:xfrm>
+          <a:prstGeom prst="rect">
+            <a:avLst/>
+          </a:prstGeom>
+          <a:solidFill>
+            <a:srgbClr val="E89B3B"/>
+          </a:solidFill>
+          <a:ln>
+            <a:noFill/>
+          </a:ln>
+        </p:spPr>
+        <p:style>
+          <a:lnRef idx="1">
+            <a:schemeClr val="accent1"/>
+          </a:lnRef>
+          <a:fillRef idx="3">
+            <a:schemeClr val="accent1"/>
+          </a:fillRef>
+          <a:effectRef idx="2">
+            <a:schemeClr val="accent1"/>
+          </a:effectRef>
+          <a:fontRef idx="minor">
+            <a:schemeClr val="lt1"/>
+          </a:fontRef>
+        </p:style>
+        <p:txBody>
+          <a:bodyPr rtlCol="0" anchor="ctr"/>
+          <a:lstStyle/>
+          <a:p>
+            <a:pPr algn="ctr"/>
+          </a:p>
+        </p:txBody>
+      </p:sp>
+      <p:sp>
+        <p:nvSpPr>
+          <p:cNvPr id="14" name="Rectangle 13"/>
+          <p:cNvSpPr/>
+          <p:nvPr/>
+        </p:nvSpPr>
+        <p:spPr>
+          <a:xfrm>
+            <a:off x="566928" y="3017520"/>
+            <a:ext cx="8119872" cy="731520"/>
+          </a:xfrm>
+          <a:prstGeom prst="rect">
+            <a:avLst/>
+          </a:prstGeom>
+          <a:solidFill>
+            <a:srgbClr val="FFFFFF"/>
+          </a:solidFill>
+          <a:ln w="12700">
+            <a:solidFill>
+              <a:srgbClr val="4EB8A9"/>
+            </a:solidFill>
+          </a:ln>
+        </p:spPr>
+        <p:style>
+          <a:lnRef idx="1">
+            <a:schemeClr val="accent1"/>
+          </a:lnRef>
+          <a:fillRef idx="3">
+            <a:schemeClr val="accent1"/>
+          </a:fillRef>
+          <a:effectRef idx="2">
+            <a:schemeClr val="accent1"/>
+          </a:effectRef>
+          <a:fontRef idx="minor">
+            <a:schemeClr val="lt1"/>
+          </a:fontRef>
+        </p:style>
+        <p:txBody>
+          <a:bodyPr rtlCol="0" anchor="ctr"/>
+          <a:lstStyle/>
+          <a:p>
+            <a:pPr algn="ctr"/>
+          </a:p>
+        </p:txBody>
+      </p:sp>
+      <p:sp>
+        <p:nvSpPr>
+          <p:cNvPr id="15" name="TextBox 14"/>
+          <p:cNvSpPr txBox="1"/>
+          <p:nvPr/>
+        </p:nvSpPr>
+        <p:spPr>
+          <a:xfrm>
+            <a:off x="685800" y="3090672"/>
+            <a:ext cx="7863840" cy="585216"/>
+          </a:xfrm>
+          <a:prstGeom prst="rect">
+            <a:avLst/>
+          </a:prstGeom>
+          <a:noFill/>
+        </p:spPr>
+        <p:txBody>
+          <a:bodyPr wrap="square" lIns="45720" rIns="45720" tIns="27432" bIns="27432">
+            <a:spAutoFit/>
+          </a:bodyPr>
+          <a:lstStyle/>
+          <a:p>
+            <a:pPr algn="l">
+              <a:defRPr sz="1200" b="0">
+                <a:solidFill>
+                  <a:srgbClr val="1A1A2E"/>
+                </a:solidFill>
+                <a:latin typeface="Georgia"/>
+              </a:defRPr>
+            </a:pPr>
+            <a:r>
+              <a:t>領域が「消えた」のではなく、既存領域に統合された。</a:t>
+            </a:r>
+            <a:br/>
+            <a:r>
+              <a:t>→ 1つのポートフォリオに求められる多面性と深さがむしろ増している。</a:t>
+            </a:r>
+          </a:p>
+        </p:txBody>
+      </p:sp>
+      <p:sp>
+        <p:nvSpPr>
+          <p:cNvPr id="16" name="TextBox 15"/>
+          <p:cNvSpPr txBox="1"/>
+          <p:nvPr/>
+        </p:nvSpPr>
+        <p:spPr>
+          <a:xfrm>
+            <a:off x="640080" y="3931920"/>
+            <a:ext cx="2743200" cy="274320"/>
+          </a:xfrm>
+          <a:prstGeom prst="rect">
+            <a:avLst/>
+          </a:prstGeom>
+          <a:noFill/>
+        </p:spPr>
+        <p:txBody>
+          <a:bodyPr wrap="square" lIns="45720" rIns="45720" tIns="27432" bIns="27432">
+            <a:spAutoFit/>
+          </a:bodyPr>
+          <a:lstStyle/>
+          <a:p>
+            <a:pPr algn="l">
+              <a:defRPr sz="1200" b="1">
+                <a:solidFill>
+                  <a:srgbClr val="E89B3B"/>
+                </a:solidFill>
+                <a:latin typeface="Calibri"/>
+              </a:defRPr>
+            </a:pPr>
+            <a:r>
+              <a:t>統合された旧領域:</a:t>
+            </a:r>
+          </a:p>
+        </p:txBody>
+      </p:sp>
+      <p:sp>
+        <p:nvSpPr>
+          <p:cNvPr id="17" name="TextBox 16"/>
+          <p:cNvSpPr txBox="1"/>
+          <p:nvPr/>
+        </p:nvSpPr>
+        <p:spPr>
+          <a:xfrm>
+            <a:off x="640080" y="4206240"/>
+            <a:ext cx="4114800" cy="914400"/>
+          </a:xfrm>
+          <a:prstGeom prst="rect">
+            <a:avLst/>
+          </a:prstGeom>
+          <a:noFill/>
+        </p:spPr>
+        <p:txBody>
+          <a:bodyPr wrap="square" lIns="45720" rIns="45720" tIns="27432" bIns="27432">
+            <a:spAutoFit/>
+          </a:bodyPr>
+          <a:lstStyle/>
+          <a:p>
+            <a:pPr>
+              <a:defRPr sz="1000">
+                <a:solidFill>
+                  <a:srgbClr val="F5F0E8"/>
+                </a:solidFill>
+                <a:latin typeface="Calibri"/>
+              </a:defRPr>
+              <a:buChar char="●"/>
+            </a:pPr>
+            <a:r>
+              <a:t>複雑困難事例 → 多疾患併存(4)等</a:t>
+            </a:r>
+          </a:p>
+          <a:p>
+            <a:pPr>
+              <a:defRPr sz="1000">
+                <a:solidFill>
+                  <a:srgbClr val="F5F0E8"/>
+                </a:solidFill>
+                <a:latin typeface="Calibri"/>
+              </a:defRPr>
+              <a:buChar char="●"/>
+            </a:pPr>
+            <a:r>
+              <a:t>プロフェッショナリズム → 医療者自身のケア(16)</a:t>
+            </a:r>
+          </a:p>
+          <a:p>
+            <a:pPr>
+              <a:defRPr sz="1000">
+                <a:solidFill>
+                  <a:srgbClr val="F5F0E8"/>
+                </a:solidFill>
+                <a:latin typeface="Calibri"/>
+              </a:defRPr>
+              <a:buChar char="●"/>
+            </a:pPr>
+            <a:r>
+              <a:t>セクシャルヘルス・思春期 → 各関連領域</a:t>
+            </a:r>
+          </a:p>
+          <a:p>
+            <a:pPr>
+              <a:defRPr sz="1000">
+                <a:solidFill>
+                  <a:srgbClr val="F5F0E8"/>
+                </a:solidFill>
+                <a:latin typeface="Calibri"/>
+              </a:defRPr>
+              <a:buChar char="●"/>
+            </a:pPr>
+            <a:r>
+              <a:t>緩和ケア・最終段階 → 長期的関係(5)</a:t>
+            </a:r>
+          </a:p>
+        </p:txBody>
+      </p:sp>
+      <p:sp>
+        <p:nvSpPr>
+          <p:cNvPr id="18" name="TextBox 17"/>
+          <p:cNvSpPr txBox="1"/>
+          <p:nvPr/>
+        </p:nvSpPr>
+        <p:spPr>
+          <a:xfrm>
+            <a:off x="5029200" y="3931920"/>
+            <a:ext cx="3840480" cy="274320"/>
+          </a:xfrm>
+          <a:prstGeom prst="rect">
+            <a:avLst/>
+          </a:prstGeom>
+          <a:noFill/>
+        </p:spPr>
+        <p:txBody>
+          <a:bodyPr wrap="square" lIns="45720" rIns="45720" tIns="27432" bIns="27432">
+            <a:spAutoFit/>
+          </a:bodyPr>
+          <a:lstStyle/>
+          <a:p>
+            <a:pPr algn="l">
+              <a:defRPr sz="1200" b="1">
+                <a:solidFill>
+                  <a:srgbClr val="E89B3B"/>
+                </a:solidFill>
+                <a:latin typeface="Calibri"/>
+              </a:defRPr>
+            </a:pPr>
+            <a:r>
+              <a:t>コア16領域は変更なし</a:t>
+            </a:r>
+          </a:p>
+        </p:txBody>
+      </p:sp>
+      <p:sp>
+        <p:nvSpPr>
+          <p:cNvPr id="19" name="TextBox 18"/>
+          <p:cNvSpPr txBox="1"/>
+          <p:nvPr/>
+        </p:nvSpPr>
+        <p:spPr>
+          <a:xfrm>
+            <a:off x="5029200" y="4206240"/>
+            <a:ext cx="3840480" cy="914400"/>
+          </a:xfrm>
+          <a:prstGeom prst="rect">
+            <a:avLst/>
+          </a:prstGeom>
+          <a:noFill/>
+        </p:spPr>
+        <p:txBody>
+          <a:bodyPr wrap="square" lIns="45720" rIns="45720" tIns="27432" bIns="27432">
+            <a:spAutoFit/>
+          </a:bodyPr>
+          <a:lstStyle/>
+          <a:p>
+            <a:pPr>
+              <a:defRPr sz="900">
+                <a:solidFill>
+                  <a:srgbClr val="F5F0E8"/>
+                </a:solidFill>
+                <a:latin typeface="Calibri"/>
+              </a:defRPr>
+              <a:buChar char="●"/>
+            </a:pPr>
+            <a:r>
+              <a:t>1. 未分化な健康問題</a:t>
+            </a:r>
+          </a:p>
+          <a:p>
+            <a:pPr>
+              <a:defRPr sz="900">
+                <a:solidFill>
+                  <a:srgbClr val="F5F0E8"/>
+                </a:solidFill>
+                <a:latin typeface="Calibri"/>
+              </a:defRPr>
+              <a:buChar char="●"/>
+            </a:pPr>
+            <a:r>
+              <a:t>2. 予防医学・健康増進</a:t>
+            </a:r>
+          </a:p>
+          <a:p>
+            <a:pPr>
+              <a:defRPr sz="900">
+                <a:solidFill>
+                  <a:srgbClr val="F5F0E8"/>
+                </a:solidFill>
+                <a:latin typeface="Calibri"/>
+              </a:defRPr>
+              <a:buChar char="●"/>
+            </a:pPr>
+            <a:r>
+              <a:t>3. 慢性疾患  4. 多疾患併存</a:t>
+            </a:r>
+          </a:p>
+          <a:p>
+            <a:pPr>
+              <a:defRPr sz="900">
+                <a:solidFill>
+                  <a:srgbClr val="F5F0E8"/>
+                </a:solidFill>
+                <a:latin typeface="Calibri"/>
+              </a:defRPr>
+              <a:buChar char="●"/>
+            </a:pPr>
+            <a:r>
+              <a:t>5. 長期的全人的関係  6. 患者中心</a:t>
+            </a:r>
+          </a:p>
+          <a:p>
+            <a:pPr>
+              <a:defRPr sz="900">
+                <a:solidFill>
+                  <a:srgbClr val="F5F0E8"/>
+                </a:solidFill>
+                <a:latin typeface="Calibri"/>
+              </a:defRPr>
+              <a:buChar char="●"/>
+            </a:pPr>
+            <a:r>
+              <a:t>7. 家族志向  8. 地域志向PC</a:t>
+            </a:r>
+          </a:p>
+          <a:p>
+            <a:pPr>
+              <a:defRPr sz="900">
+                <a:solidFill>
+                  <a:srgbClr val="F5F0E8"/>
+                </a:solidFill>
+                <a:latin typeface="Calibri"/>
+              </a:defRPr>
+              <a:buChar char="●"/>
+            </a:pPr>
+            <a:r>
+              <a:t>…16. 医療者自身のケア</a:t>
+            </a:r>
+          </a:p>
+        </p:txBody>
+      </p:sp>
+    </p:spTree>
+  </p:cSld>
+  <p:clrMapOvr>
+    <a:masterClrMapping/>
+  </p:clrMapOvr>
+</p:sld>
+</file>
+
+<file path=ppt/slides/slide4.xml><?xml version="1.0" encoding="utf-8"?>
 <p:sld xmlns:a="http://schemas.openxmlformats.org/drawingml/2006/main" xmlns:p="http://schemas.openxmlformats.org/presentationml/2006/main" xmlns:r="http://schemas.openxmlformats.org/officeDocument/2006/relationships">
   <p:cSld>
     <p:bg>
@@ -4214,7 +5015,7 @@
         <p:spPr>
           <a:xfrm>
             <a:off x="640080" y="274320"/>
-            <a:ext cx="5486400" cy="457200"/>
+            <a:ext cx="7315200" cy="457200"/>
           </a:xfrm>
           <a:prstGeom prst="rect">
             <a:avLst/>
@@ -4228,7 +5029,7 @@
           <a:lstStyle/>
           <a:p>
             <a:pPr algn="l">
-              <a:defRPr sz="2000" b="1">
+              <a:defRPr sz="2200" b="1">
                 <a:solidFill>
                   <a:srgbClr val="1A1A2E"/>
                 </a:solidFill>
@@ -4236,7 +5037,7 @@
               </a:defRPr>
             </a:pPr>
             <a:r>
-              <a:t>ポートフォリオ領域の前後比較</a:t>
+              <a:t>かかりつけ医機能報告制度</a:t>
             </a:r>
           </a:p>
         </p:txBody>
@@ -4249,8 +5050,8 @@
         </p:nvSpPr>
         <p:spPr>
           <a:xfrm>
-            <a:off x="640080" y="685800"/>
-            <a:ext cx="4572000" cy="274320"/>
+            <a:off x="640080" y="731520"/>
+            <a:ext cx="7315200" cy="274320"/>
           </a:xfrm>
           <a:prstGeom prst="rect">
             <a:avLst/>
@@ -4264,7 +5065,7 @@
           <a:lstStyle/>
           <a:p>
             <a:pPr algn="l">
-              <a:defRPr sz="1000" b="0">
+              <a:defRPr sz="1100" b="0">
                 <a:solidFill>
                   <a:srgbClr val="7A8A9A"/>
                 </a:solidFill>
@@ -4272,21 +5073,66 @@
               </a:defRPr>
             </a:pPr>
             <a:r>
-              <a:t>事象4: 新しい内容の提示 | 4-7分</a:t>
-            </a:r>
-          </a:p>
-        </p:txBody>
-      </p:sp>
-      <p:sp>
-        <p:nvSpPr>
-          <p:cNvPr id="5" name="TextBox 4"/>
+              <a:t>2025年4月施行 | 初回報告: 2026年1-3月（G-MIS）</a:t>
+            </a:r>
+          </a:p>
+        </p:txBody>
+      </p:sp>
+      <p:sp>
+        <p:nvSpPr>
+          <p:cNvPr id="5" name="Rectangle 4"/>
+          <p:cNvSpPr/>
+          <p:nvPr/>
+        </p:nvSpPr>
+        <p:spPr>
+          <a:xfrm>
+            <a:off x="457200" y="1188720"/>
+            <a:ext cx="3931920" cy="1371600"/>
+          </a:xfrm>
+          <a:prstGeom prst="rect">
+            <a:avLst/>
+          </a:prstGeom>
+          <a:solidFill>
+            <a:srgbClr val="E8F0F0"/>
+          </a:solidFill>
+          <a:ln w="12700">
+            <a:solidFill>
+              <a:srgbClr val="4EB8A9"/>
+            </a:solidFill>
+          </a:ln>
+        </p:spPr>
+        <p:style>
+          <a:lnRef idx="1">
+            <a:schemeClr val="accent1"/>
+          </a:lnRef>
+          <a:fillRef idx="3">
+            <a:schemeClr val="accent1"/>
+          </a:fillRef>
+          <a:effectRef idx="2">
+            <a:schemeClr val="accent1"/>
+          </a:effectRef>
+          <a:fontRef idx="minor">
+            <a:schemeClr val="lt1"/>
+          </a:fontRef>
+        </p:style>
+        <p:txBody>
+          <a:bodyPr rtlCol="0" anchor="ctr"/>
+          <a:lstStyle/>
+          <a:p>
+            <a:pPr algn="ctr"/>
+          </a:p>
+        </p:txBody>
+      </p:sp>
+      <p:sp>
+        <p:nvSpPr>
+          <p:cNvPr id="6" name="TextBox 5"/>
           <p:cNvSpPr txBox="1"/>
           <p:nvPr/>
         </p:nvSpPr>
         <p:spPr>
           <a:xfrm>
-            <a:off x="640080" y="1005840"/>
-            <a:ext cx="4572000" cy="274320"/>
+            <a:off x="640080" y="1234440"/>
+            <a:ext cx="3657600" cy="274320"/>
           </a:xfrm>
           <a:prstGeom prst="rect">
             <a:avLst/>
@@ -4308,704 +5154,11 @@
               </a:defRPr>
             </a:pPr>
             <a:r>
-              <a:t>削減された4領域（旧17-20）→ 統合先</a:t>
-            </a:r>
-          </a:p>
-        </p:txBody>
-      </p:sp>
-      <p:graphicFrame>
-        <p:nvGraphicFramePr>
-          <p:cNvPr id="6" name="Table 5"/>
-          <p:cNvGraphicFramePr>
-            <a:graphicFrameLocks noGrp="1"/>
-          </p:cNvGraphicFramePr>
-          <p:nvPr/>
-        </p:nvGraphicFramePr>
-        <p:xfrm>
-          <a:off x="457200" y="1280160"/>
-          <a:ext cx="5029200" cy="2798064"/>
-        </p:xfrm>
-        <a:graphic>
-          <a:graphicData uri="http://schemas.openxmlformats.org/drawingml/2006/table">
-            <a:tbl>
-              <a:tblPr firstRow="1" bandRow="1">
-                <a:tableStyleId>{5C22544A-7EE6-4342-B048-85BDC9FD1C3A}</a:tableStyleId>
-              </a:tblPr>
-              <a:tblGrid>
-                <a:gridCol w="457200"/>
-                <a:gridCol w="2286000"/>
-                <a:gridCol w="2286000"/>
-              </a:tblGrid>
-              <a:tr h="310896">
-                <a:tc>
-                  <a:txBody>
-                    <a:bodyPr/>
-                    <a:lstStyle/>
-                    <a:p>
-                      <a:pPr>
-                        <a:defRPr sz="900" b="1">
-                          <a:solidFill>
-                            <a:srgbClr val="F5F0E8"/>
-                          </a:solidFill>
-                          <a:latin typeface="Calibri"/>
-                        </a:defRPr>
-                      </a:pPr>
-                      <a:r>
-                        <a:t>旧#</a:t>
-                      </a:r>
-                    </a:p>
-                  </a:txBody>
-                  <a:tcPr marL="45720" marR="45720" marT="18288" marB="18288">
-                    <a:solidFill>
-                      <a:srgbClr val="0D2B3E"/>
-                    </a:solidFill>
-                  </a:tcPr>
-                </a:tc>
-                <a:tc>
-                  <a:txBody>
-                    <a:bodyPr/>
-                    <a:lstStyle/>
-                    <a:p>
-                      <a:pPr>
-                        <a:defRPr sz="900" b="1">
-                          <a:solidFill>
-                            <a:srgbClr val="F5F0E8"/>
-                          </a:solidFill>
-                          <a:latin typeface="Calibri"/>
-                        </a:defRPr>
-                      </a:pPr>
-                      <a:r>
-                        <a:t>削減された領域</a:t>
-                      </a:r>
-                    </a:p>
-                  </a:txBody>
-                  <a:tcPr marL="45720" marR="45720" marT="18288" marB="18288">
-                    <a:solidFill>
-                      <a:srgbClr val="0D2B3E"/>
-                    </a:solidFill>
-                  </a:tcPr>
-                </a:tc>
-                <a:tc>
-                  <a:txBody>
-                    <a:bodyPr/>
-                    <a:lstStyle/>
-                    <a:p>
-                      <a:pPr>
-                        <a:defRPr sz="900" b="1">
-                          <a:solidFill>
-                            <a:srgbClr val="F5F0E8"/>
-                          </a:solidFill>
-                          <a:latin typeface="Calibri"/>
-                        </a:defRPr>
-                      </a:pPr>
-                      <a:r>
-                        <a:t>統合先</a:t>
-                      </a:r>
-                    </a:p>
-                  </a:txBody>
-                  <a:tcPr marL="45720" marR="45720" marT="18288" marB="18288">
-                    <a:solidFill>
-                      <a:srgbClr val="0D2B3E"/>
-                    </a:solidFill>
-                  </a:tcPr>
-                </a:tc>
-              </a:tr>
-              <a:tr h="310896">
-                <a:tc>
-                  <a:txBody>
-                    <a:bodyPr/>
-                    <a:lstStyle/>
-                    <a:p>
-                      <a:pPr>
-                        <a:defRPr sz="900">
-                          <a:solidFill>
-                            <a:srgbClr val="1A1A2E"/>
-                          </a:solidFill>
-                          <a:latin typeface="Calibri"/>
-                        </a:defRPr>
-                      </a:pPr>
-                      <a:r>
-                        <a:t>17a</a:t>
-                      </a:r>
-                    </a:p>
-                  </a:txBody>
-                  <a:tcPr marL="45720" marR="45720" marT="18288" marB="18288">
-                    <a:solidFill>
-                      <a:srgbClr val="E8F0F0"/>
-                    </a:solidFill>
-                  </a:tcPr>
-                </a:tc>
-                <a:tc>
-                  <a:txBody>
-                    <a:bodyPr/>
-                    <a:lstStyle/>
-                    <a:p>
-                      <a:pPr>
-                        <a:defRPr sz="900">
-                          <a:solidFill>
-                            <a:srgbClr val="1A1A2E"/>
-                          </a:solidFill>
-                          <a:latin typeface="Calibri"/>
-                        </a:defRPr>
-                      </a:pPr>
-                      <a:r>
-                        <a:t>複雑困難事例のケア</a:t>
-                      </a:r>
-                    </a:p>
-                  </a:txBody>
-                  <a:tcPr marL="45720" marR="45720" marT="18288" marB="18288">
-                    <a:solidFill>
-                      <a:srgbClr val="E8F0F0"/>
-                    </a:solidFill>
-                  </a:tcPr>
-                </a:tc>
-                <a:tc>
-                  <a:txBody>
-                    <a:bodyPr/>
-                    <a:lstStyle/>
-                    <a:p>
-                      <a:pPr>
-                        <a:defRPr sz="900">
-                          <a:solidFill>
-                            <a:srgbClr val="1A1A2E"/>
-                          </a:solidFill>
-                          <a:latin typeface="Calibri"/>
-                        </a:defRPr>
-                      </a:pPr>
-                      <a:r>
-                        <a:t>→ 多疾患併存(4)・慢性疾患(3)</a:t>
-                      </a:r>
-                    </a:p>
-                  </a:txBody>
-                  <a:tcPr marL="45720" marR="45720" marT="18288" marB="18288">
-                    <a:solidFill>
-                      <a:srgbClr val="E8F0F0"/>
-                    </a:solidFill>
-                  </a:tcPr>
-                </a:tc>
-              </a:tr>
-              <a:tr h="310896">
-                <a:tc>
-                  <a:txBody>
-                    <a:bodyPr/>
-                    <a:lstStyle/>
-                    <a:p>
-                      <a:pPr>
-                        <a:defRPr sz="900">
-                          <a:solidFill>
-                            <a:srgbClr val="1A1A2E"/>
-                          </a:solidFill>
-                          <a:latin typeface="Calibri"/>
-                        </a:defRPr>
-                      </a:pPr>
-                      <a:r>
-                        <a:t>17b</a:t>
-                      </a:r>
-                    </a:p>
-                  </a:txBody>
-                  <a:tcPr marL="45720" marR="45720" marT="18288" marB="18288">
-                    <a:solidFill>
-                      <a:srgbClr val="F5F0E8"/>
-                    </a:solidFill>
-                  </a:tcPr>
-                </a:tc>
-                <a:tc>
-                  <a:txBody>
-                    <a:bodyPr/>
-                    <a:lstStyle/>
-                    <a:p>
-                      <a:pPr>
-                        <a:defRPr sz="900">
-                          <a:solidFill>
-                            <a:srgbClr val="1A1A2E"/>
-                          </a:solidFill>
-                          <a:latin typeface="Calibri"/>
-                        </a:defRPr>
-                      </a:pPr>
-                      <a:r>
-                        <a:t>統合されたケア</a:t>
-                      </a:r>
-                    </a:p>
-                  </a:txBody>
-                  <a:tcPr marL="45720" marR="45720" marT="18288" marB="18288">
-                    <a:solidFill>
-                      <a:srgbClr val="F5F0E8"/>
-                    </a:solidFill>
-                  </a:tcPr>
-                </a:tc>
-                <a:tc>
-                  <a:txBody>
-                    <a:bodyPr/>
-                    <a:lstStyle/>
-                    <a:p>
-                      <a:pPr>
-                        <a:defRPr sz="900">
-                          <a:solidFill>
-                            <a:srgbClr val="1A1A2E"/>
-                          </a:solidFill>
-                          <a:latin typeface="Calibri"/>
-                        </a:defRPr>
-                      </a:pPr>
-                      <a:r>
-                        <a:t>→ チーム医療(12)・地域志向(8)</a:t>
-                      </a:r>
-                    </a:p>
-                  </a:txBody>
-                  <a:tcPr marL="45720" marR="45720" marT="18288" marB="18288">
-                    <a:solidFill>
-                      <a:srgbClr val="F5F0E8"/>
-                    </a:solidFill>
-                  </a:tcPr>
-                </a:tc>
-              </a:tr>
-              <a:tr h="310896">
-                <a:tc>
-                  <a:txBody>
-                    <a:bodyPr/>
-                    <a:lstStyle/>
-                    <a:p>
-                      <a:pPr>
-                        <a:defRPr sz="900">
-                          <a:solidFill>
-                            <a:srgbClr val="1A1A2E"/>
-                          </a:solidFill>
-                          <a:latin typeface="Calibri"/>
-                        </a:defRPr>
-                      </a:pPr>
-                      <a:r>
-                        <a:t>18a</a:t>
-                      </a:r>
-                    </a:p>
-                  </a:txBody>
-                  <a:tcPr marL="45720" marR="45720" marT="18288" marB="18288">
-                    <a:solidFill>
-                      <a:srgbClr val="E8F0F0"/>
-                    </a:solidFill>
-                  </a:tcPr>
-                </a:tc>
-                <a:tc>
-                  <a:txBody>
-                    <a:bodyPr/>
-                    <a:lstStyle/>
-                    <a:p>
-                      <a:pPr>
-                        <a:defRPr sz="900">
-                          <a:solidFill>
-                            <a:srgbClr val="1A1A2E"/>
-                          </a:solidFill>
-                          <a:latin typeface="Calibri"/>
-                        </a:defRPr>
-                      </a:pPr>
-                      <a:r>
-                        <a:t>プロフェッショナリズム</a:t>
-                      </a:r>
-                    </a:p>
-                  </a:txBody>
-                  <a:tcPr marL="45720" marR="45720" marT="18288" marB="18288">
-                    <a:solidFill>
-                      <a:srgbClr val="E8F0F0"/>
-                    </a:solidFill>
-                  </a:tcPr>
-                </a:tc>
-                <a:tc>
-                  <a:txBody>
-                    <a:bodyPr/>
-                    <a:lstStyle/>
-                    <a:p>
-                      <a:pPr>
-                        <a:defRPr sz="900">
-                          <a:solidFill>
-                            <a:srgbClr val="1A1A2E"/>
-                          </a:solidFill>
-                          <a:latin typeface="Calibri"/>
-                        </a:defRPr>
-                      </a:pPr>
-                      <a:r>
-                        <a:t>→ 医療者自身のケア(16)</a:t>
-                      </a:r>
-                    </a:p>
-                  </a:txBody>
-                  <a:tcPr marL="45720" marR="45720" marT="18288" marB="18288">
-                    <a:solidFill>
-                      <a:srgbClr val="E8F0F0"/>
-                    </a:solidFill>
-                  </a:tcPr>
-                </a:tc>
-              </a:tr>
-              <a:tr h="310896">
-                <a:tc>
-                  <a:txBody>
-                    <a:bodyPr/>
-                    <a:lstStyle/>
-                    <a:p>
-                      <a:pPr>
-                        <a:defRPr sz="900">
-                          <a:solidFill>
-                            <a:srgbClr val="1A1A2E"/>
-                          </a:solidFill>
-                          <a:latin typeface="Calibri"/>
-                        </a:defRPr>
-                      </a:pPr>
-                      <a:r>
-                        <a:t>18b</a:t>
-                      </a:r>
-                    </a:p>
-                  </a:txBody>
-                  <a:tcPr marL="45720" marR="45720" marT="18288" marB="18288">
-                    <a:solidFill>
-                      <a:srgbClr val="F5F0E8"/>
-                    </a:solidFill>
-                  </a:tcPr>
-                </a:tc>
-                <a:tc>
-                  <a:txBody>
-                    <a:bodyPr/>
-                    <a:lstStyle/>
-                    <a:p>
-                      <a:pPr>
-                        <a:defRPr sz="900">
-                          <a:solidFill>
-                            <a:srgbClr val="1A1A2E"/>
-                          </a:solidFill>
-                          <a:latin typeface="Calibri"/>
-                        </a:defRPr>
-                      </a:pPr>
-                      <a:r>
-                        <a:t>倫理的困難な意思決定</a:t>
-                      </a:r>
-                    </a:p>
-                  </a:txBody>
-                  <a:tcPr marL="45720" marR="45720" marT="18288" marB="18288">
-                    <a:solidFill>
-                      <a:srgbClr val="F5F0E8"/>
-                    </a:solidFill>
-                  </a:tcPr>
-                </a:tc>
-                <a:tc>
-                  <a:txBody>
-                    <a:bodyPr/>
-                    <a:lstStyle/>
-                    <a:p>
-                      <a:pPr>
-                        <a:defRPr sz="900">
-                          <a:solidFill>
-                            <a:srgbClr val="1A1A2E"/>
-                          </a:solidFill>
-                          <a:latin typeface="Calibri"/>
-                        </a:defRPr>
-                      </a:pPr>
-                      <a:r>
-                        <a:t>→ 患者中心の医療(6)</a:t>
-                      </a:r>
-                    </a:p>
-                  </a:txBody>
-                  <a:tcPr marL="45720" marR="45720" marT="18288" marB="18288">
-                    <a:solidFill>
-                      <a:srgbClr val="F5F0E8"/>
-                    </a:solidFill>
-                  </a:tcPr>
-                </a:tc>
-              </a:tr>
-              <a:tr h="310896">
-                <a:tc>
-                  <a:txBody>
-                    <a:bodyPr/>
-                    <a:lstStyle/>
-                    <a:p>
-                      <a:pPr>
-                        <a:defRPr sz="900">
-                          <a:solidFill>
-                            <a:srgbClr val="1A1A2E"/>
-                          </a:solidFill>
-                          <a:latin typeface="Calibri"/>
-                        </a:defRPr>
-                      </a:pPr>
-                      <a:r>
-                        <a:t>19a</a:t>
-                      </a:r>
-                    </a:p>
-                  </a:txBody>
-                  <a:tcPr marL="45720" marR="45720" marT="18288" marB="18288">
-                    <a:solidFill>
-                      <a:srgbClr val="E8F0F0"/>
-                    </a:solidFill>
-                  </a:tcPr>
-                </a:tc>
-                <a:tc>
-                  <a:txBody>
-                    <a:bodyPr/>
-                    <a:lstStyle/>
-                    <a:p>
-                      <a:pPr>
-                        <a:defRPr sz="900">
-                          <a:solidFill>
-                            <a:srgbClr val="1A1A2E"/>
-                          </a:solidFill>
-                          <a:latin typeface="Calibri"/>
-                        </a:defRPr>
-                      </a:pPr>
-                      <a:r>
-                        <a:t>セクシャルヘルス</a:t>
-                      </a:r>
-                    </a:p>
-                  </a:txBody>
-                  <a:tcPr marL="45720" marR="45720" marT="18288" marB="18288">
-                    <a:solidFill>
-                      <a:srgbClr val="E8F0F0"/>
-                    </a:solidFill>
-                  </a:tcPr>
-                </a:tc>
-                <a:tc>
-                  <a:txBody>
-                    <a:bodyPr/>
-                    <a:lstStyle/>
-                    <a:p>
-                      <a:pPr>
-                        <a:defRPr sz="900">
-                          <a:solidFill>
-                            <a:srgbClr val="1A1A2E"/>
-                          </a:solidFill>
-                          <a:latin typeface="Calibri"/>
-                        </a:defRPr>
-                      </a:pPr>
-                      <a:r>
-                        <a:t>→ 各関連領域</a:t>
-                      </a:r>
-                    </a:p>
-                  </a:txBody>
-                  <a:tcPr marL="45720" marR="45720" marT="18288" marB="18288">
-                    <a:solidFill>
-                      <a:srgbClr val="E8F0F0"/>
-                    </a:solidFill>
-                  </a:tcPr>
-                </a:tc>
-              </a:tr>
-              <a:tr h="310896">
-                <a:tc>
-                  <a:txBody>
-                    <a:bodyPr/>
-                    <a:lstStyle/>
-                    <a:p>
-                      <a:pPr>
-                        <a:defRPr sz="900">
-                          <a:solidFill>
-                            <a:srgbClr val="1A1A2E"/>
-                          </a:solidFill>
-                          <a:latin typeface="Calibri"/>
-                        </a:defRPr>
-                      </a:pPr>
-                      <a:r>
-                        <a:t>19b</a:t>
-                      </a:r>
-                    </a:p>
-                  </a:txBody>
-                  <a:tcPr marL="45720" marR="45720" marT="18288" marB="18288">
-                    <a:solidFill>
-                      <a:srgbClr val="F5F0E8"/>
-                    </a:solidFill>
-                  </a:tcPr>
-                </a:tc>
-                <a:tc>
-                  <a:txBody>
-                    <a:bodyPr/>
-                    <a:lstStyle/>
-                    <a:p>
-                      <a:pPr>
-                        <a:defRPr sz="900">
-                          <a:solidFill>
-                            <a:srgbClr val="1A1A2E"/>
-                          </a:solidFill>
-                          <a:latin typeface="Calibri"/>
-                        </a:defRPr>
-                      </a:pPr>
-                      <a:r>
-                        <a:t>思春期のケア</a:t>
-                      </a:r>
-                    </a:p>
-                  </a:txBody>
-                  <a:tcPr marL="45720" marR="45720" marT="18288" marB="18288">
-                    <a:solidFill>
-                      <a:srgbClr val="F5F0E8"/>
-                    </a:solidFill>
-                  </a:tcPr>
-                </a:tc>
-                <a:tc>
-                  <a:txBody>
-                    <a:bodyPr/>
-                    <a:lstStyle/>
-                    <a:p>
-                      <a:pPr>
-                        <a:defRPr sz="900">
-                          <a:solidFill>
-                            <a:srgbClr val="1A1A2E"/>
-                          </a:solidFill>
-                          <a:latin typeface="Calibri"/>
-                        </a:defRPr>
-                      </a:pPr>
-                      <a:r>
-                        <a:t>→ 各関連領域</a:t>
-                      </a:r>
-                    </a:p>
-                  </a:txBody>
-                  <a:tcPr marL="45720" marR="45720" marT="18288" marB="18288">
-                    <a:solidFill>
-                      <a:srgbClr val="F5F0E8"/>
-                    </a:solidFill>
-                  </a:tcPr>
-                </a:tc>
-              </a:tr>
-              <a:tr h="310896">
-                <a:tc>
-                  <a:txBody>
-                    <a:bodyPr/>
-                    <a:lstStyle/>
-                    <a:p>
-                      <a:pPr>
-                        <a:defRPr sz="900">
-                          <a:solidFill>
-                            <a:srgbClr val="1A1A2E"/>
-                          </a:solidFill>
-                          <a:latin typeface="Calibri"/>
-                        </a:defRPr>
-                      </a:pPr>
-                      <a:r>
-                        <a:t>20a</a:t>
-                      </a:r>
-                    </a:p>
-                  </a:txBody>
-                  <a:tcPr marL="45720" marR="45720" marT="18288" marB="18288">
-                    <a:solidFill>
-                      <a:srgbClr val="E8F0F0"/>
-                    </a:solidFill>
-                  </a:tcPr>
-                </a:tc>
-                <a:tc>
-                  <a:txBody>
-                    <a:bodyPr/>
-                    <a:lstStyle/>
-                    <a:p>
-                      <a:pPr>
-                        <a:defRPr sz="900">
-                          <a:solidFill>
-                            <a:srgbClr val="1A1A2E"/>
-                          </a:solidFill>
-                          <a:latin typeface="Calibri"/>
-                        </a:defRPr>
-                      </a:pPr>
-                      <a:r>
-                        <a:t>緩和ケア</a:t>
-                      </a:r>
-                    </a:p>
-                  </a:txBody>
-                  <a:tcPr marL="45720" marR="45720" marT="18288" marB="18288">
-                    <a:solidFill>
-                      <a:srgbClr val="E8F0F0"/>
-                    </a:solidFill>
-                  </a:tcPr>
-                </a:tc>
-                <a:tc>
-                  <a:txBody>
-                    <a:bodyPr/>
-                    <a:lstStyle/>
-                    <a:p>
-                      <a:pPr>
-                        <a:defRPr sz="900">
-                          <a:solidFill>
-                            <a:srgbClr val="1A1A2E"/>
-                          </a:solidFill>
-                          <a:latin typeface="Calibri"/>
-                        </a:defRPr>
-                      </a:pPr>
-                      <a:r>
-                        <a:t>→ 長期的な全人的関係(5)</a:t>
-                      </a:r>
-                    </a:p>
-                  </a:txBody>
-                  <a:tcPr marL="45720" marR="45720" marT="18288" marB="18288">
-                    <a:solidFill>
-                      <a:srgbClr val="E8F0F0"/>
-                    </a:solidFill>
-                  </a:tcPr>
-                </a:tc>
-              </a:tr>
-              <a:tr h="310896">
-                <a:tc>
-                  <a:txBody>
-                    <a:bodyPr/>
-                    <a:lstStyle/>
-                    <a:p>
-                      <a:pPr>
-                        <a:defRPr sz="900">
-                          <a:solidFill>
-                            <a:srgbClr val="1A1A2E"/>
-                          </a:solidFill>
-                          <a:latin typeface="Calibri"/>
-                        </a:defRPr>
-                      </a:pPr>
-                      <a:r>
-                        <a:t>20b</a:t>
-                      </a:r>
-                    </a:p>
-                  </a:txBody>
-                  <a:tcPr marL="45720" marR="45720" marT="18288" marB="18288">
-                    <a:solidFill>
-                      <a:srgbClr val="F5F0E8"/>
-                    </a:solidFill>
-                  </a:tcPr>
-                </a:tc>
-                <a:tc>
-                  <a:txBody>
-                    <a:bodyPr/>
-                    <a:lstStyle/>
-                    <a:p>
-                      <a:pPr>
-                        <a:defRPr sz="900">
-                          <a:solidFill>
-                            <a:srgbClr val="1A1A2E"/>
-                          </a:solidFill>
-                          <a:latin typeface="Calibri"/>
-                        </a:defRPr>
-                      </a:pPr>
-                      <a:r>
-                        <a:t>人生の最終段階のケア</a:t>
-                      </a:r>
-                    </a:p>
-                  </a:txBody>
-                  <a:tcPr marL="45720" marR="45720" marT="18288" marB="18288">
-                    <a:solidFill>
-                      <a:srgbClr val="F5F0E8"/>
-                    </a:solidFill>
-                  </a:tcPr>
-                </a:tc>
-                <a:tc>
-                  <a:txBody>
-                    <a:bodyPr/>
-                    <a:lstStyle/>
-                    <a:p>
-                      <a:pPr>
-                        <a:defRPr sz="900">
-                          <a:solidFill>
-                            <a:srgbClr val="1A1A2E"/>
-                          </a:solidFill>
-                          <a:latin typeface="Calibri"/>
-                        </a:defRPr>
-                      </a:pPr>
-                      <a:r>
-                        <a:t>→ 長期的な全人的関係(5)</a:t>
-                      </a:r>
-                    </a:p>
-                  </a:txBody>
-                  <a:tcPr marL="45720" marR="45720" marT="18288" marB="18288">
-                    <a:solidFill>
-                      <a:srgbClr val="F5F0E8"/>
-                    </a:solidFill>
-                  </a:tcPr>
-                </a:tc>
-              </a:tr>
-            </a:tbl>
-          </a:graphicData>
-        </a:graphic>
-      </p:graphicFrame>
+              <a:t>報告制度で求められる能力</a:t>
+            </a:r>
+          </a:p>
+        </p:txBody>
+      </p:sp>
       <p:sp>
         <p:nvSpPr>
           <p:cNvPr id="7" name="TextBox 6"/>
@@ -5014,8 +5167,8 @@
         </p:nvSpPr>
         <p:spPr>
           <a:xfrm>
-            <a:off x="5760720" y="1005840"/>
-            <a:ext cx="3108960" cy="274320"/>
+            <a:off x="640080" y="1554480"/>
+            <a:ext cx="3474720" cy="822960"/>
           </a:xfrm>
           <a:prstGeom prst="rect">
             <a:avLst/>
@@ -5028,16 +5181,45 @@
           </a:bodyPr>
           <a:lstStyle/>
           <a:p>
-            <a:pPr algn="l">
-              <a:defRPr sz="1300" b="1">
-                <a:solidFill>
-                  <a:srgbClr val="E89B3B"/>
+            <a:pPr>
+              <a:defRPr sz="1100">
+                <a:solidFill>
+                  <a:srgbClr val="1A1A2E"/>
                 </a:solidFill>
                 <a:latin typeface="Calibri"/>
               </a:defRPr>
+              <a:buChar char="●"/>
             </a:pPr>
             <a:r>
-              <a:t>コア16領域は変更なし</a:t>
+              <a:t>17診療領域・40疾患対応力</a:t>
+            </a:r>
+          </a:p>
+          <a:p>
+            <a:pPr>
+              <a:defRPr sz="1100">
+                <a:solidFill>
+                  <a:srgbClr val="1A1A2E"/>
+                </a:solidFill>
+                <a:latin typeface="Calibri"/>
+              </a:defRPr>
+              <a:buChar char="●"/>
+            </a:pPr>
+            <a:r>
+              <a:t>在宅医療・訪問診療の提供体制</a:t>
+            </a:r>
+          </a:p>
+          <a:p>
+            <a:pPr>
+              <a:defRPr sz="1100">
+                <a:solidFill>
+                  <a:srgbClr val="1A1A2E"/>
+                </a:solidFill>
+                <a:latin typeface="Calibri"/>
+              </a:defRPr>
+              <a:buChar char="●"/>
+            </a:pPr>
+            <a:r>
+              <a:t>総合診療専門医の配置（報告項目）</a:t>
             </a:r>
           </a:p>
         </p:txBody>
@@ -5050,8 +5232,8 @@
         </p:nvSpPr>
         <p:spPr>
           <a:xfrm>
-            <a:off x="5760720" y="1280160"/>
-            <a:ext cx="3017520" cy="2926080"/>
+            <a:off x="4389120" y="1554480"/>
+            <a:ext cx="457200" cy="548640"/>
           </a:xfrm>
           <a:prstGeom prst="rect">
             <a:avLst/>
@@ -5064,227 +5246,16 @@
           </a:bodyPr>
           <a:lstStyle/>
           <a:p>
-            <a:pPr>
-              <a:defRPr sz="800">
-                <a:solidFill>
-                  <a:srgbClr val="1A1A2E"/>
+            <a:pPr algn="ctr">
+              <a:defRPr sz="3200" b="1">
+                <a:solidFill>
+                  <a:srgbClr val="E89B3B"/>
                 </a:solidFill>
                 <a:latin typeface="Calibri"/>
               </a:defRPr>
-              <a:buChar char="•"/>
             </a:pPr>
             <a:r>
-              <a:t>1. 未分化な健康問題</a:t>
-            </a:r>
-          </a:p>
-          <a:p>
-            <a:pPr>
-              <a:defRPr sz="800">
-                <a:solidFill>
-                  <a:srgbClr val="1A1A2E"/>
-                </a:solidFill>
-                <a:latin typeface="Calibri"/>
-              </a:defRPr>
-              <a:buChar char="•"/>
-            </a:pPr>
-            <a:r>
-              <a:t>2. 予防医学と健康増進</a:t>
-            </a:r>
-          </a:p>
-          <a:p>
-            <a:pPr>
-              <a:defRPr sz="800">
-                <a:solidFill>
-                  <a:srgbClr val="1A1A2E"/>
-                </a:solidFill>
-                <a:latin typeface="Calibri"/>
-              </a:defRPr>
-              <a:buChar char="•"/>
-            </a:pPr>
-            <a:r>
-              <a:t>3. 慢性疾患のケア</a:t>
-            </a:r>
-          </a:p>
-          <a:p>
-            <a:pPr>
-              <a:defRPr sz="800">
-                <a:solidFill>
-                  <a:srgbClr val="1A1A2E"/>
-                </a:solidFill>
-                <a:latin typeface="Calibri"/>
-              </a:defRPr>
-              <a:buChar char="•"/>
-            </a:pPr>
-            <a:r>
-              <a:t>4. 多疾患併存</a:t>
-            </a:r>
-          </a:p>
-          <a:p>
-            <a:pPr>
-              <a:defRPr sz="800">
-                <a:solidFill>
-                  <a:srgbClr val="1A1A2E"/>
-                </a:solidFill>
-                <a:latin typeface="Calibri"/>
-              </a:defRPr>
-              <a:buChar char="•"/>
-            </a:pPr>
-            <a:r>
-              <a:t>5. 長期的な全人的関係</a:t>
-            </a:r>
-          </a:p>
-          <a:p>
-            <a:pPr>
-              <a:defRPr sz="800">
-                <a:solidFill>
-                  <a:srgbClr val="1A1A2E"/>
-                </a:solidFill>
-                <a:latin typeface="Calibri"/>
-              </a:defRPr>
-              <a:buChar char="•"/>
-            </a:pPr>
-            <a:r>
-              <a:t>6. 患者中心の医療</a:t>
-            </a:r>
-          </a:p>
-          <a:p>
-            <a:pPr>
-              <a:defRPr sz="800">
-                <a:solidFill>
-                  <a:srgbClr val="1A1A2E"/>
-                </a:solidFill>
-                <a:latin typeface="Calibri"/>
-              </a:defRPr>
-              <a:buChar char="•"/>
-            </a:pPr>
-            <a:r>
-              <a:t>7. 家族志向のケア</a:t>
-            </a:r>
-          </a:p>
-          <a:p>
-            <a:pPr>
-              <a:defRPr sz="800">
-                <a:solidFill>
-                  <a:srgbClr val="1A1A2E"/>
-                </a:solidFill>
-                <a:latin typeface="Calibri"/>
-              </a:defRPr>
-              <a:buChar char="•"/>
-            </a:pPr>
-            <a:r>
-              <a:t>8. 地域志向のPC</a:t>
-            </a:r>
-          </a:p>
-          <a:p>
-            <a:pPr>
-              <a:defRPr sz="800">
-                <a:solidFill>
-                  <a:srgbClr val="1A1A2E"/>
-                </a:solidFill>
-                <a:latin typeface="Calibri"/>
-              </a:defRPr>
-              <a:buChar char="•"/>
-            </a:pPr>
-            <a:r>
-              <a:t>9. 障害とリハビリ</a:t>
-            </a:r>
-          </a:p>
-          <a:p>
-            <a:pPr>
-              <a:defRPr sz="800">
-                <a:solidFill>
-                  <a:srgbClr val="1A1A2E"/>
-                </a:solidFill>
-                <a:latin typeface="Calibri"/>
-              </a:defRPr>
-              <a:buChar char="•"/>
-            </a:pPr>
-            <a:r>
-              <a:t>10. 臨床における教育</a:t>
-            </a:r>
-          </a:p>
-          <a:p>
-            <a:pPr>
-              <a:defRPr sz="800">
-                <a:solidFill>
-                  <a:srgbClr val="1A1A2E"/>
-                </a:solidFill>
-                <a:latin typeface="Calibri"/>
-              </a:defRPr>
-              <a:buChar char="•"/>
-            </a:pPr>
-            <a:r>
-              <a:t>11. EBMの実践</a:t>
-            </a:r>
-          </a:p>
-          <a:p>
-            <a:pPr>
-              <a:defRPr sz="800">
-                <a:solidFill>
-                  <a:srgbClr val="1A1A2E"/>
-                </a:solidFill>
-                <a:latin typeface="Calibri"/>
-              </a:defRPr>
-              <a:buChar char="•"/>
-            </a:pPr>
-            <a:r>
-              <a:t>12. チーム医療</a:t>
-            </a:r>
-          </a:p>
-          <a:p>
-            <a:pPr>
-              <a:defRPr sz="800">
-                <a:solidFill>
-                  <a:srgbClr val="1A1A2E"/>
-                </a:solidFill>
-                <a:latin typeface="Calibri"/>
-              </a:defRPr>
-              <a:buChar char="•"/>
-            </a:pPr>
-            <a:r>
-              <a:t>13. システム思考</a:t>
-            </a:r>
-          </a:p>
-          <a:p>
-            <a:pPr>
-              <a:defRPr sz="800">
-                <a:solidFill>
-                  <a:srgbClr val="1A1A2E"/>
-                </a:solidFill>
-                <a:latin typeface="Calibri"/>
-              </a:defRPr>
-              <a:buChar char="•"/>
-            </a:pPr>
-            <a:r>
-              <a:t>14. メンタルヘルス</a:t>
-            </a:r>
-          </a:p>
-          <a:p>
-            <a:pPr>
-              <a:defRPr sz="800">
-                <a:solidFill>
-                  <a:srgbClr val="1A1A2E"/>
-                </a:solidFill>
-                <a:latin typeface="Calibri"/>
-              </a:defRPr>
-              <a:buChar char="•"/>
-            </a:pPr>
-            <a:r>
-              <a:t>15. 社会的決定要因</a:t>
-            </a:r>
-          </a:p>
-          <a:p>
-            <a:pPr>
-              <a:defRPr sz="800">
-                <a:solidFill>
-                  <a:srgbClr val="1A1A2E"/>
-                </a:solidFill>
-                <a:latin typeface="Calibri"/>
-              </a:defRPr>
-              <a:buChar char="•"/>
-            </a:pPr>
-            <a:r>
-              <a:t>16. 医療者自身のケア</a:t>
+              <a:t>≒</a:t>
             </a:r>
           </a:p>
         </p:txBody>
@@ -5297,8 +5268,154 @@
         </p:nvSpPr>
         <p:spPr>
           <a:xfrm>
-            <a:off x="457200" y="4297680"/>
-            <a:ext cx="54864" cy="640080"/>
+            <a:off x="5029200" y="1188720"/>
+            <a:ext cx="3840480" cy="1371600"/>
+          </a:xfrm>
+          <a:prstGeom prst="rect">
+            <a:avLst/>
+          </a:prstGeom>
+          <a:solidFill>
+            <a:srgbClr val="E8F0F0"/>
+          </a:solidFill>
+          <a:ln w="12700">
+            <a:solidFill>
+              <a:srgbClr val="4EB8A9"/>
+            </a:solidFill>
+          </a:ln>
+        </p:spPr>
+        <p:style>
+          <a:lnRef idx="1">
+            <a:schemeClr val="accent1"/>
+          </a:lnRef>
+          <a:fillRef idx="3">
+            <a:schemeClr val="accent1"/>
+          </a:fillRef>
+          <a:effectRef idx="2">
+            <a:schemeClr val="accent1"/>
+          </a:effectRef>
+          <a:fontRef idx="minor">
+            <a:schemeClr val="lt1"/>
+          </a:fontRef>
+        </p:style>
+        <p:txBody>
+          <a:bodyPr rtlCol="0" anchor="ctr"/>
+          <a:lstStyle/>
+          <a:p>
+            <a:pPr algn="ctr"/>
+          </a:p>
+        </p:txBody>
+      </p:sp>
+      <p:sp>
+        <p:nvSpPr>
+          <p:cNvPr id="10" name="TextBox 9"/>
+          <p:cNvSpPr txBox="1"/>
+          <p:nvPr/>
+        </p:nvSpPr>
+        <p:spPr>
+          <a:xfrm>
+            <a:off x="5212080" y="1234440"/>
+            <a:ext cx="3657600" cy="274320"/>
+          </a:xfrm>
+          <a:prstGeom prst="rect">
+            <a:avLst/>
+          </a:prstGeom>
+          <a:noFill/>
+        </p:spPr>
+        <p:txBody>
+          <a:bodyPr wrap="square" lIns="45720" rIns="45720" tIns="27432" bIns="27432">
+            <a:spAutoFit/>
+          </a:bodyPr>
+          <a:lstStyle/>
+          <a:p>
+            <a:pPr algn="l">
+              <a:defRPr sz="1300" b="1">
+                <a:solidFill>
+                  <a:srgbClr val="E89B3B"/>
+                </a:solidFill>
+                <a:latin typeface="Calibri"/>
+              </a:defRPr>
+            </a:pPr>
+            <a:r>
+              <a:t>家庭医療専門医の研修</a:t>
+            </a:r>
+          </a:p>
+        </p:txBody>
+      </p:sp>
+      <p:sp>
+        <p:nvSpPr>
+          <p:cNvPr id="11" name="TextBox 10"/>
+          <p:cNvSpPr txBox="1"/>
+          <p:nvPr/>
+        </p:nvSpPr>
+        <p:spPr>
+          <a:xfrm>
+            <a:off x="5212080" y="1554480"/>
+            <a:ext cx="3474720" cy="822960"/>
+          </a:xfrm>
+          <a:prstGeom prst="rect">
+            <a:avLst/>
+          </a:prstGeom>
+          <a:noFill/>
+        </p:spPr>
+        <p:txBody>
+          <a:bodyPr wrap="square" lIns="45720" rIns="45720" tIns="27432" bIns="27432">
+            <a:spAutoFit/>
+          </a:bodyPr>
+          <a:lstStyle/>
+          <a:p>
+            <a:pPr>
+              <a:defRPr sz="1100">
+                <a:solidFill>
+                  <a:srgbClr val="1A1A2E"/>
+                </a:solidFill>
+                <a:latin typeface="Calibri"/>
+              </a:defRPr>
+              <a:buChar char="●"/>
+            </a:pPr>
+            <a:r>
+              <a:t>16ポートフォリオ領域</a:t>
+            </a:r>
+          </a:p>
+          <a:p>
+            <a:pPr>
+              <a:defRPr sz="1100">
+                <a:solidFill>
+                  <a:srgbClr val="1A1A2E"/>
+                </a:solidFill>
+                <a:latin typeface="Calibri"/>
+              </a:defRPr>
+              <a:buChar char="●"/>
+            </a:pPr>
+            <a:r>
+              <a:t>包括的なプライマリ・ケア能力</a:t>
+            </a:r>
+          </a:p>
+          <a:p>
+            <a:pPr>
+              <a:defRPr sz="1100">
+                <a:solidFill>
+                  <a:srgbClr val="1A1A2E"/>
+                </a:solidFill>
+                <a:latin typeface="Calibri"/>
+              </a:defRPr>
+              <a:buChar char="●"/>
+            </a:pPr>
+            <a:r>
+              <a:t>地域志向のアプローチ</a:t>
+            </a:r>
+          </a:p>
+        </p:txBody>
+      </p:sp>
+      <p:sp>
+        <p:nvSpPr>
+          <p:cNvPr id="12" name="Rectangle 11"/>
+          <p:cNvSpPr/>
+          <p:nvPr/>
+        </p:nvSpPr>
+        <p:spPr>
+          <a:xfrm>
+            <a:off x="457200" y="2926080"/>
+            <a:ext cx="54864" cy="731520"/>
           </a:xfrm>
           <a:prstGeom prst="rect">
             <a:avLst/>
@@ -5334,14 +5451,14 @@
       </p:sp>
       <p:sp>
         <p:nvSpPr>
-          <p:cNvPr id="10" name="Rectangle 9"/>
+          <p:cNvPr id="13" name="Rectangle 12"/>
           <p:cNvSpPr/>
           <p:nvPr/>
         </p:nvSpPr>
         <p:spPr>
           <a:xfrm>
-            <a:off x="566928" y="4297680"/>
-            <a:ext cx="8119872" cy="640080"/>
+            <a:off x="566928" y="2926080"/>
+            <a:ext cx="8119872" cy="731520"/>
           </a:xfrm>
           <a:prstGeom prst="rect">
             <a:avLst/>
@@ -5379,14 +5496,14 @@
       </p:sp>
       <p:sp>
         <p:nvSpPr>
-          <p:cNvPr id="11" name="TextBox 10"/>
+          <p:cNvPr id="14" name="TextBox 13"/>
           <p:cNvSpPr txBox="1"/>
           <p:nvPr/>
         </p:nvSpPr>
         <p:spPr>
           <a:xfrm>
-            <a:off x="685800" y="4370832"/>
-            <a:ext cx="7863840" cy="493775"/>
+            <a:off x="685800" y="2999232"/>
+            <a:ext cx="7863840" cy="585216"/>
           </a:xfrm>
           <a:prstGeom prst="rect">
             <a:avLst/>
@@ -5400,7 +5517,7 @@
           <a:lstStyle/>
           <a:p>
             <a:pPr algn="l">
-              <a:defRPr sz="1100" b="0">
+              <a:defRPr sz="1300" b="0">
                 <a:solidFill>
                   <a:srgbClr val="1A1A2E"/>
                 </a:solidFill>
@@ -5408,11 +5525,11 @@
               </a:defRPr>
             </a:pPr>
             <a:r>
-              <a:t>領域が「消えた」のではなく、既存領域に統合された。</a:t>
+              <a:t>あなたの存在が、医療機関の「かかりつけ医機能」を高める。</a:t>
             </a:r>
             <a:br/>
             <a:r>
-              <a:t>1つのポートフォリオに求められる多面性と深さがむしろ増している。</a:t>
+              <a:t>家庭医療専門医の研修で培う能力 ≒ 報告制度で求められる能力。</a:t>
             </a:r>
           </a:p>
         </p:txBody>
@@ -5425,7 +5542,7 @@
 </p:sld>
 </file>
 
-<file path=ppt/slides/slide4.xml><?xml version="1.0" encoding="utf-8"?>
+<file path=ppt/slides/slide5.xml><?xml version="1.0" encoding="utf-8"?>
 <p:sld xmlns:a="http://schemas.openxmlformats.org/drawingml/2006/main" xmlns:p="http://schemas.openxmlformats.org/presentationml/2006/main" xmlns:r="http://schemas.openxmlformats.org/officeDocument/2006/relationships">
   <p:cSld>
     <p:bg>
@@ -5509,7 +5626,7 @@
           <a:lstStyle/>
           <a:p>
             <a:pPr algn="l">
-              <a:defRPr sz="2000" b="1">
+              <a:defRPr sz="2200" b="1">
                 <a:solidFill>
                   <a:srgbClr val="F5F0E8"/>
                 </a:solidFill>
@@ -5517,7 +5634,7 @@
               </a:defRPr>
             </a:pPr>
             <a:r>
-              <a:t>その他の変更 + かかりつけ医機能報告制度</a:t>
+              <a:t>ペアディスカッション</a:t>
             </a:r>
           </a:p>
         </p:txBody>
@@ -5530,8 +5647,8 @@
         </p:nvSpPr>
         <p:spPr>
           <a:xfrm>
-            <a:off x="640080" y="685800"/>
-            <a:ext cx="4572000" cy="274320"/>
+            <a:off x="640080" y="731520"/>
+            <a:ext cx="7315200" cy="274320"/>
           </a:xfrm>
           <a:prstGeom prst="rect">
             <a:avLst/>
@@ -5545,7 +5662,7 @@
           <a:lstStyle/>
           <a:p>
             <a:pPr algn="l">
-              <a:defRPr sz="1000" b="0">
+              <a:defRPr sz="1100" b="0">
                 <a:solidFill>
                   <a:srgbClr val="7A8A9A"/>
                 </a:solidFill>
@@ -5553,715 +5670,32 @@
               </a:defRPr>
             </a:pPr>
             <a:r>
-              <a:t>事象4+5 | 7-9分</a:t>
-            </a:r>
-          </a:p>
-        </p:txBody>
-      </p:sp>
-      <p:graphicFrame>
-        <p:nvGraphicFramePr>
-          <p:cNvPr id="5" name="Table 4"/>
-          <p:cNvGraphicFramePr>
-            <a:graphicFrameLocks noGrp="1"/>
-          </p:cNvGraphicFramePr>
-          <p:nvPr/>
-        </p:nvGraphicFramePr>
-        <p:xfrm>
-          <a:off x="457200" y="1005840"/>
-          <a:ext cx="3840480" cy="1280160"/>
-        </p:xfrm>
-        <a:graphic>
-          <a:graphicData uri="http://schemas.openxmlformats.org/drawingml/2006/table">
-            <a:tbl>
-              <a:tblPr firstRow="1" bandRow="1">
-                <a:tableStyleId>{5C22544A-7EE6-4342-B048-85BDC9FD1C3A}</a:tableStyleId>
-              </a:tblPr>
-              <a:tblGrid>
-                <a:gridCol w="1645920"/>
-                <a:gridCol w="1097280"/>
-                <a:gridCol w="1097280"/>
-              </a:tblGrid>
-              <a:tr h="320040">
-                <a:tc>
-                  <a:txBody>
-                    <a:bodyPr/>
-                    <a:lstStyle/>
-                    <a:p>
-                      <a:pPr>
-                        <a:defRPr sz="1000" b="1">
-                          <a:solidFill>
-                            <a:srgbClr val="F5F0E8"/>
-                          </a:solidFill>
-                          <a:latin typeface="Calibri"/>
-                        </a:defRPr>
-                      </a:pPr>
-                      <a:r>
-                        <a:t>項目</a:t>
-                      </a:r>
-                    </a:p>
-                  </a:txBody>
-                  <a:tcPr marL="45720" marR="45720" marT="18288" marB="18288">
-                    <a:solidFill>
-                      <a:srgbClr val="0D2B3E"/>
-                    </a:solidFill>
-                  </a:tcPr>
-                </a:tc>
-                <a:tc>
-                  <a:txBody>
-                    <a:bodyPr/>
-                    <a:lstStyle/>
-                    <a:p>
-                      <a:pPr>
-                        <a:defRPr sz="1000" b="1">
-                          <a:solidFill>
-                            <a:srgbClr val="F5F0E8"/>
-                          </a:solidFill>
-                          <a:latin typeface="Calibri"/>
-                        </a:defRPr>
-                      </a:pPr>
-                      <a:r>
-                        <a:t>旧制度</a:t>
-                      </a:r>
-                    </a:p>
-                  </a:txBody>
-                  <a:tcPr marL="45720" marR="45720" marT="18288" marB="18288">
-                    <a:solidFill>
-                      <a:srgbClr val="0D2B3E"/>
-                    </a:solidFill>
-                  </a:tcPr>
-                </a:tc>
-                <a:tc>
-                  <a:txBody>
-                    <a:bodyPr/>
-                    <a:lstStyle/>
-                    <a:p>
-                      <a:pPr>
-                        <a:defRPr sz="1000" b="1">
-                          <a:solidFill>
-                            <a:srgbClr val="F5F0E8"/>
-                          </a:solidFill>
-                          <a:latin typeface="Calibri"/>
-                        </a:defRPr>
-                      </a:pPr>
-                      <a:r>
-                        <a:t>新制度</a:t>
-                      </a:r>
-                    </a:p>
-                  </a:txBody>
-                  <a:tcPr marL="45720" marR="45720" marT="18288" marB="18288">
-                    <a:solidFill>
-                      <a:srgbClr val="0D2B3E"/>
-                    </a:solidFill>
-                  </a:tcPr>
-                </a:tc>
-              </a:tr>
-              <a:tr h="320040">
-                <a:tc>
-                  <a:txBody>
-                    <a:bodyPr/>
-                    <a:lstStyle/>
-                    <a:p>
-                      <a:pPr>
-                        <a:defRPr sz="1000">
-                          <a:solidFill>
-                            <a:srgbClr val="1A1A2E"/>
-                          </a:solidFill>
-                          <a:latin typeface="Calibri"/>
-                        </a:defRPr>
-                      </a:pPr>
-                      <a:r>
-                        <a:t>ポートフォリオ領域数</a:t>
-                      </a:r>
-                    </a:p>
-                  </a:txBody>
-                  <a:tcPr marL="45720" marR="45720" marT="18288" marB="18288">
-                    <a:solidFill>
-                      <a:srgbClr val="E8F0F0"/>
-                    </a:solidFill>
-                  </a:tcPr>
-                </a:tc>
-                <a:tc>
-                  <a:txBody>
-                    <a:bodyPr/>
-                    <a:lstStyle/>
-                    <a:p>
-                      <a:pPr>
-                        <a:defRPr sz="1000">
-                          <a:solidFill>
-                            <a:srgbClr val="1A1A2E"/>
-                          </a:solidFill>
-                          <a:latin typeface="Calibri"/>
-                        </a:defRPr>
-                      </a:pPr>
-                      <a:r>
-                        <a:t>20領域</a:t>
-                      </a:r>
-                    </a:p>
-                  </a:txBody>
-                  <a:tcPr marL="45720" marR="45720" marT="18288" marB="18288">
-                    <a:solidFill>
-                      <a:srgbClr val="E8F0F0"/>
-                    </a:solidFill>
-                  </a:tcPr>
-                </a:tc>
-                <a:tc>
-                  <a:txBody>
-                    <a:bodyPr/>
-                    <a:lstStyle/>
-                    <a:p>
-                      <a:pPr>
-                        <a:defRPr sz="1000">
-                          <a:solidFill>
-                            <a:srgbClr val="1A1A2E"/>
-                          </a:solidFill>
-                          <a:latin typeface="Calibri"/>
-                        </a:defRPr>
-                      </a:pPr>
-                      <a:r>
-                        <a:t>16領域</a:t>
-                      </a:r>
-                    </a:p>
-                  </a:txBody>
-                  <a:tcPr marL="45720" marR="45720" marT="18288" marB="18288">
-                    <a:solidFill>
-                      <a:srgbClr val="E8F0F0"/>
-                    </a:solidFill>
-                  </a:tcPr>
-                </a:tc>
-              </a:tr>
-              <a:tr h="320040">
-                <a:tc>
-                  <a:txBody>
-                    <a:bodyPr/>
-                    <a:lstStyle/>
-                    <a:p>
-                      <a:pPr>
-                        <a:defRPr sz="1000">
-                          <a:solidFill>
-                            <a:srgbClr val="1A1A2E"/>
-                          </a:solidFill>
-                          <a:latin typeface="Calibri"/>
-                        </a:defRPr>
-                      </a:pPr>
-                      <a:r>
-                        <a:t>学会発表必要件数</a:t>
-                      </a:r>
-                    </a:p>
-                  </a:txBody>
-                  <a:tcPr marL="45720" marR="45720" marT="18288" marB="18288">
-                    <a:solidFill>
-                      <a:srgbClr val="F5F0E8"/>
-                    </a:solidFill>
-                  </a:tcPr>
-                </a:tc>
-                <a:tc>
-                  <a:txBody>
-                    <a:bodyPr/>
-                    <a:lstStyle/>
-                    <a:p>
-                      <a:pPr>
-                        <a:defRPr sz="1000">
-                          <a:solidFill>
-                            <a:srgbClr val="1A1A2E"/>
-                          </a:solidFill>
-                          <a:latin typeface="Calibri"/>
-                        </a:defRPr>
-                      </a:pPr>
-                      <a:r>
-                        <a:t>3件以上</a:t>
-                      </a:r>
-                    </a:p>
-                  </a:txBody>
-                  <a:tcPr marL="45720" marR="45720" marT="18288" marB="18288">
-                    <a:solidFill>
-                      <a:srgbClr val="F5F0E8"/>
-                    </a:solidFill>
-                  </a:tcPr>
-                </a:tc>
-                <a:tc>
-                  <a:txBody>
-                    <a:bodyPr/>
-                    <a:lstStyle/>
-                    <a:p>
-                      <a:pPr>
-                        <a:defRPr sz="1000">
-                          <a:solidFill>
-                            <a:srgbClr val="1A1A2E"/>
-                          </a:solidFill>
-                          <a:latin typeface="Calibri"/>
-                        </a:defRPr>
-                      </a:pPr>
-                      <a:r>
-                        <a:t>2件以上</a:t>
-                      </a:r>
-                    </a:p>
-                  </a:txBody>
-                  <a:tcPr marL="45720" marR="45720" marT="18288" marB="18288">
-                    <a:solidFill>
-                      <a:srgbClr val="F5F0E8"/>
-                    </a:solidFill>
-                  </a:tcPr>
-                </a:tc>
-              </a:tr>
-              <a:tr h="320040">
-                <a:tc>
-                  <a:txBody>
-                    <a:bodyPr/>
-                    <a:lstStyle/>
-                    <a:p>
-                      <a:pPr>
-                        <a:defRPr sz="1000">
-                          <a:solidFill>
-                            <a:srgbClr val="1A1A2E"/>
-                          </a:solidFill>
-                          <a:latin typeface="Calibri"/>
-                        </a:defRPr>
-                      </a:pPr>
-                      <a:r>
-                        <a:t>適用開始</a:t>
-                      </a:r>
-                    </a:p>
-                  </a:txBody>
-                  <a:tcPr marL="45720" marR="45720" marT="18288" marB="18288">
-                    <a:solidFill>
-                      <a:srgbClr val="E8F0F0"/>
-                    </a:solidFill>
-                  </a:tcPr>
-                </a:tc>
-                <a:tc>
-                  <a:txBody>
-                    <a:bodyPr/>
-                    <a:lstStyle/>
-                    <a:p>
-                      <a:pPr>
-                        <a:defRPr sz="1000">
-                          <a:solidFill>
-                            <a:srgbClr val="1A1A2E"/>
-                          </a:solidFill>
-                          <a:latin typeface="Calibri"/>
-                        </a:defRPr>
-                      </a:pPr>
-                      <a:r>
-                        <a:t>—</a:t>
-                      </a:r>
-                    </a:p>
-                  </a:txBody>
-                  <a:tcPr marL="45720" marR="45720" marT="18288" marB="18288">
-                    <a:solidFill>
-                      <a:srgbClr val="E8F0F0"/>
-                    </a:solidFill>
-                  </a:tcPr>
-                </a:tc>
-                <a:tc>
-                  <a:txBody>
-                    <a:bodyPr/>
-                    <a:lstStyle/>
-                    <a:p>
-                      <a:pPr>
-                        <a:defRPr sz="1000">
-                          <a:solidFill>
-                            <a:srgbClr val="1A1A2E"/>
-                          </a:solidFill>
-                          <a:latin typeface="Calibri"/>
-                        </a:defRPr>
-                      </a:pPr>
-                      <a:r>
-                        <a:t>2025年3月修了者〜</a:t>
-                      </a:r>
-                    </a:p>
-                  </a:txBody>
-                  <a:tcPr marL="45720" marR="45720" marT="18288" marB="18288">
-                    <a:solidFill>
-                      <a:srgbClr val="E8F0F0"/>
-                    </a:solidFill>
-                  </a:tcPr>
-                </a:tc>
-              </a:tr>
-            </a:tbl>
-          </a:graphicData>
-        </a:graphic>
-      </p:graphicFrame>
-      <p:sp>
-        <p:nvSpPr>
-          <p:cNvPr id="6" name="TextBox 5"/>
-          <p:cNvSpPr txBox="1"/>
-          <p:nvPr/>
-        </p:nvSpPr>
-        <p:spPr>
-          <a:xfrm>
-            <a:off x="4754880" y="1005840"/>
-            <a:ext cx="4114800" cy="320040"/>
-          </a:xfrm>
-          <a:prstGeom prst="rect">
-            <a:avLst/>
-          </a:prstGeom>
-          <a:noFill/>
-        </p:spPr>
-        <p:txBody>
-          <a:bodyPr wrap="square" lIns="45720" rIns="45720" tIns="27432" bIns="27432">
-            <a:spAutoFit/>
-          </a:bodyPr>
-          <a:lstStyle/>
-          <a:p>
-            <a:pPr algn="l">
-              <a:defRPr sz="1600" b="1">
-                <a:solidFill>
-                  <a:srgbClr val="E89B3B"/>
-                </a:solidFill>
-                <a:latin typeface="Calibri"/>
-              </a:defRPr>
-            </a:pPr>
-            <a:r>
-              <a:t>かかりつけ医機能報告制度</a:t>
-            </a:r>
-          </a:p>
-        </p:txBody>
-      </p:sp>
-      <p:graphicFrame>
-        <p:nvGraphicFramePr>
-          <p:cNvPr id="7" name="Table 6"/>
-          <p:cNvGraphicFramePr>
-            <a:graphicFrameLocks noGrp="1"/>
-          </p:cNvGraphicFramePr>
-          <p:nvPr/>
-        </p:nvGraphicFramePr>
-        <p:xfrm>
-          <a:off x="4754880" y="1371600"/>
-          <a:ext cx="3931920" cy="1920239"/>
-        </p:xfrm>
-        <a:graphic>
-          <a:graphicData uri="http://schemas.openxmlformats.org/drawingml/2006/table">
-            <a:tbl>
-              <a:tblPr firstRow="1" bandRow="1">
-                <a:tableStyleId>{5C22544A-7EE6-4342-B048-85BDC9FD1C3A}</a:tableStyleId>
-              </a:tblPr>
-              <a:tblGrid>
-                <a:gridCol w="1188720"/>
-                <a:gridCol w="2743200"/>
-              </a:tblGrid>
-              <a:tr h="320039">
-                <a:tc>
-                  <a:txBody>
-                    <a:bodyPr/>
-                    <a:lstStyle/>
-                    <a:p>
-                      <a:pPr>
-                        <a:defRPr sz="900" b="1">
-                          <a:solidFill>
-                            <a:srgbClr val="F5F0E8"/>
-                          </a:solidFill>
-                          <a:latin typeface="Calibri"/>
-                        </a:defRPr>
-                      </a:pPr>
-                      <a:r>
-                        <a:t>項目</a:t>
-                      </a:r>
-                    </a:p>
-                  </a:txBody>
-                  <a:tcPr marL="45720" marR="45720" marT="18288" marB="18288">
-                    <a:solidFill>
-                      <a:srgbClr val="0D2B3E"/>
-                    </a:solidFill>
-                  </a:tcPr>
-                </a:tc>
-                <a:tc>
-                  <a:txBody>
-                    <a:bodyPr/>
-                    <a:lstStyle/>
-                    <a:p>
-                      <a:pPr>
-                        <a:defRPr sz="900" b="1">
-                          <a:solidFill>
-                            <a:srgbClr val="F5F0E8"/>
-                          </a:solidFill>
-                          <a:latin typeface="Calibri"/>
-                        </a:defRPr>
-                      </a:pPr>
-                      <a:r>
-                        <a:t>内容</a:t>
-                      </a:r>
-                    </a:p>
-                  </a:txBody>
-                  <a:tcPr marL="45720" marR="45720" marT="18288" marB="18288">
-                    <a:solidFill>
-                      <a:srgbClr val="0D2B3E"/>
-                    </a:solidFill>
-                  </a:tcPr>
-                </a:tc>
-              </a:tr>
-              <a:tr h="320039">
-                <a:tc>
-                  <a:txBody>
-                    <a:bodyPr/>
-                    <a:lstStyle/>
-                    <a:p>
-                      <a:pPr>
-                        <a:defRPr sz="900">
-                          <a:solidFill>
-                            <a:srgbClr val="1A1A2E"/>
-                          </a:solidFill>
-                          <a:latin typeface="Calibri"/>
-                        </a:defRPr>
-                      </a:pPr>
-                      <a:r>
-                        <a:t>根拠法</a:t>
-                      </a:r>
-                    </a:p>
-                  </a:txBody>
-                  <a:tcPr marL="45720" marR="45720" marT="18288" marB="18288">
-                    <a:solidFill>
-                      <a:srgbClr val="E8F0F0"/>
-                    </a:solidFill>
-                  </a:tcPr>
-                </a:tc>
-                <a:tc>
-                  <a:txBody>
-                    <a:bodyPr/>
-                    <a:lstStyle/>
-                    <a:p>
-                      <a:pPr>
-                        <a:defRPr sz="900">
-                          <a:solidFill>
-                            <a:srgbClr val="1A1A2E"/>
-                          </a:solidFill>
-                          <a:latin typeface="Calibri"/>
-                        </a:defRPr>
-                      </a:pPr>
-                      <a:r>
-                        <a:t>2023年医療法改正</a:t>
-                      </a:r>
-                    </a:p>
-                  </a:txBody>
-                  <a:tcPr marL="45720" marR="45720" marT="18288" marB="18288">
-                    <a:solidFill>
-                      <a:srgbClr val="E8F0F0"/>
-                    </a:solidFill>
-                  </a:tcPr>
-                </a:tc>
-              </a:tr>
-              <a:tr h="320039">
-                <a:tc>
-                  <a:txBody>
-                    <a:bodyPr/>
-                    <a:lstStyle/>
-                    <a:p>
-                      <a:pPr>
-                        <a:defRPr sz="900">
-                          <a:solidFill>
-                            <a:srgbClr val="1A1A2E"/>
-                          </a:solidFill>
-                          <a:latin typeface="Calibri"/>
-                        </a:defRPr>
-                      </a:pPr>
-                      <a:r>
-                        <a:t>施行</a:t>
-                      </a:r>
-                    </a:p>
-                  </a:txBody>
-                  <a:tcPr marL="45720" marR="45720" marT="18288" marB="18288">
-                    <a:solidFill>
-                      <a:srgbClr val="F5F0E8"/>
-                    </a:solidFill>
-                  </a:tcPr>
-                </a:tc>
-                <a:tc>
-                  <a:txBody>
-                    <a:bodyPr/>
-                    <a:lstStyle/>
-                    <a:p>
-                      <a:pPr>
-                        <a:defRPr sz="900">
-                          <a:solidFill>
-                            <a:srgbClr val="1A1A2E"/>
-                          </a:solidFill>
-                          <a:latin typeface="Calibri"/>
-                        </a:defRPr>
-                      </a:pPr>
-                      <a:r>
-                        <a:t>2025年4月</a:t>
-                      </a:r>
-                    </a:p>
-                  </a:txBody>
-                  <a:tcPr marL="45720" marR="45720" marT="18288" marB="18288">
-                    <a:solidFill>
-                      <a:srgbClr val="F5F0E8"/>
-                    </a:solidFill>
-                  </a:tcPr>
-                </a:tc>
-              </a:tr>
-              <a:tr h="320039">
-                <a:tc>
-                  <a:txBody>
-                    <a:bodyPr/>
-                    <a:lstStyle/>
-                    <a:p>
-                      <a:pPr>
-                        <a:defRPr sz="900">
-                          <a:solidFill>
-                            <a:srgbClr val="1A1A2E"/>
-                          </a:solidFill>
-                          <a:latin typeface="Calibri"/>
-                        </a:defRPr>
-                      </a:pPr>
-                      <a:r>
-                        <a:t>初回報告</a:t>
-                      </a:r>
-                    </a:p>
-                  </a:txBody>
-                  <a:tcPr marL="45720" marR="45720" marT="18288" marB="18288">
-                    <a:solidFill>
-                      <a:srgbClr val="E8F0F0"/>
-                    </a:solidFill>
-                  </a:tcPr>
-                </a:tc>
-                <a:tc>
-                  <a:txBody>
-                    <a:bodyPr/>
-                    <a:lstStyle/>
-                    <a:p>
-                      <a:pPr>
-                        <a:defRPr sz="900">
-                          <a:solidFill>
-                            <a:srgbClr val="1A1A2E"/>
-                          </a:solidFill>
-                          <a:latin typeface="Calibri"/>
-                        </a:defRPr>
-                      </a:pPr>
-                      <a:r>
-                        <a:t>2026年1月〜3月（G-MIS）</a:t>
-                      </a:r>
-                    </a:p>
-                  </a:txBody>
-                  <a:tcPr marL="45720" marR="45720" marT="18288" marB="18288">
-                    <a:solidFill>
-                      <a:srgbClr val="E8F0F0"/>
-                    </a:solidFill>
-                  </a:tcPr>
-                </a:tc>
-              </a:tr>
-              <a:tr h="320039">
-                <a:tc>
-                  <a:txBody>
-                    <a:bodyPr/>
-                    <a:lstStyle/>
-                    <a:p>
-                      <a:pPr>
-                        <a:defRPr sz="900">
-                          <a:solidFill>
-                            <a:srgbClr val="1A1A2E"/>
-                          </a:solidFill>
-                          <a:latin typeface="Calibri"/>
-                        </a:defRPr>
-                      </a:pPr>
-                      <a:r>
-                        <a:t>報告内容</a:t>
-                      </a:r>
-                    </a:p>
-                  </a:txBody>
-                  <a:tcPr marL="45720" marR="45720" marT="18288" marB="18288">
-                    <a:solidFill>
-                      <a:srgbClr val="F5F0E8"/>
-                    </a:solidFill>
-                  </a:tcPr>
-                </a:tc>
-                <a:tc>
-                  <a:txBody>
-                    <a:bodyPr/>
-                    <a:lstStyle/>
-                    <a:p>
-                      <a:pPr>
-                        <a:defRPr sz="900">
-                          <a:solidFill>
-                            <a:srgbClr val="1A1A2E"/>
-                          </a:solidFill>
-                          <a:latin typeface="Calibri"/>
-                        </a:defRPr>
-                      </a:pPr>
-                      <a:r>
-                        <a:t>17診療領域・40疾患対応力 等</a:t>
-                      </a:r>
-                    </a:p>
-                  </a:txBody>
-                  <a:tcPr marL="45720" marR="45720" marT="18288" marB="18288">
-                    <a:solidFill>
-                      <a:srgbClr val="F5F0E8"/>
-                    </a:solidFill>
-                  </a:tcPr>
-                </a:tc>
-              </a:tr>
-              <a:tr h="320044">
-                <a:tc>
-                  <a:txBody>
-                    <a:bodyPr/>
-                    <a:lstStyle/>
-                    <a:p>
-                      <a:pPr>
-                        <a:defRPr sz="900">
-                          <a:solidFill>
-                            <a:srgbClr val="1A1A2E"/>
-                          </a:solidFill>
-                          <a:latin typeface="Calibri"/>
-                        </a:defRPr>
-                      </a:pPr>
-                      <a:r>
-                        <a:t>目的</a:t>
-                      </a:r>
-                    </a:p>
-                  </a:txBody>
-                  <a:tcPr marL="45720" marR="45720" marT="18288" marB="18288">
-                    <a:solidFill>
-                      <a:srgbClr val="E8F0F0"/>
-                    </a:solidFill>
-                  </a:tcPr>
-                </a:tc>
-                <a:tc>
-                  <a:txBody>
-                    <a:bodyPr/>
-                    <a:lstStyle/>
-                    <a:p>
-                      <a:pPr>
-                        <a:defRPr sz="900">
-                          <a:solidFill>
-                            <a:srgbClr val="1A1A2E"/>
-                          </a:solidFill>
-                          <a:latin typeface="Calibri"/>
-                        </a:defRPr>
-                      </a:pPr>
-                      <a:r>
-                        <a:t>患者が医療機関を選べるように</a:t>
-                      </a:r>
-                    </a:p>
-                  </a:txBody>
-                  <a:tcPr marL="45720" marR="45720" marT="18288" marB="18288">
-                    <a:solidFill>
-                      <a:srgbClr val="E8F0F0"/>
-                    </a:solidFill>
-                  </a:tcPr>
-                </a:tc>
-              </a:tr>
-            </a:tbl>
-          </a:graphicData>
-        </a:graphic>
-      </p:graphicFrame>
-      <p:sp>
-        <p:nvSpPr>
-          <p:cNvPr id="8" name="Rectangle 7"/>
+              <a:t>3分ペアワーク + 1分シェア | 問いを1つ選んでください</a:t>
+            </a:r>
+          </a:p>
+        </p:txBody>
+      </p:sp>
+      <p:sp>
+        <p:nvSpPr>
+          <p:cNvPr id="5" name="Rectangle 4"/>
           <p:cNvSpPr/>
           <p:nvPr/>
         </p:nvSpPr>
         <p:spPr>
           <a:xfrm>
-            <a:off x="457200" y="3566160"/>
-            <a:ext cx="54864" cy="685800"/>
+            <a:off x="731520" y="1188720"/>
+            <a:ext cx="7680960" cy="1005840"/>
           </a:xfrm>
           <a:prstGeom prst="rect">
             <a:avLst/>
           </a:prstGeom>
           <a:solidFill>
-            <a:srgbClr val="E89B3B"/>
+            <a:srgbClr val="0D2B3E"/>
           </a:solidFill>
-          <a:ln>
-            <a:noFill/>
+          <a:ln w="12700">
+            <a:solidFill>
+              <a:srgbClr val="E89B3B"/>
+            </a:solidFill>
           </a:ln>
         </p:spPr>
         <p:style>
@@ -6288,24 +5722,104 @@
       </p:sp>
       <p:sp>
         <p:nvSpPr>
-          <p:cNvPr id="9" name="Rectangle 8"/>
+          <p:cNvPr id="6" name="TextBox 5"/>
+          <p:cNvSpPr txBox="1"/>
+          <p:nvPr/>
+        </p:nvSpPr>
+        <p:spPr>
+          <a:xfrm>
+            <a:off x="914400" y="1234440"/>
+            <a:ext cx="2011680" cy="822960"/>
+          </a:xfrm>
+          <a:prstGeom prst="rect">
+            <a:avLst/>
+          </a:prstGeom>
+          <a:noFill/>
+        </p:spPr>
+        <p:txBody>
+          <a:bodyPr wrap="square" lIns="45720" rIns="45720" tIns="27432" bIns="27432">
+            <a:spAutoFit/>
+          </a:bodyPr>
+          <a:lstStyle/>
+          <a:p>
+            <a:pPr algn="l">
+              <a:defRPr sz="1300" b="1">
+                <a:solidFill>
+                  <a:srgbClr val="E89B3B"/>
+                </a:solidFill>
+                <a:latin typeface="Calibri"/>
+              </a:defRPr>
+            </a:pPr>
+            <a:r>
+              <a:t>問い A</a:t>
+            </a:r>
+            <a:br/>
+            <a:r>
+              <a:t>専攻医向け</a:t>
+            </a:r>
+          </a:p>
+        </p:txBody>
+      </p:sp>
+      <p:sp>
+        <p:nvSpPr>
+          <p:cNvPr id="7" name="TextBox 6"/>
+          <p:cNvSpPr txBox="1"/>
+          <p:nvPr/>
+        </p:nvSpPr>
+        <p:spPr>
+          <a:xfrm>
+            <a:off x="3017520" y="1280160"/>
+            <a:ext cx="5212080" cy="731520"/>
+          </a:xfrm>
+          <a:prstGeom prst="rect">
+            <a:avLst/>
+          </a:prstGeom>
+          <a:noFill/>
+        </p:spPr>
+        <p:txBody>
+          <a:bodyPr wrap="square" lIns="45720" rIns="45720" tIns="27432" bIns="27432">
+            <a:spAutoFit/>
+          </a:bodyPr>
+          <a:lstStyle/>
+          <a:p>
+            <a:pPr algn="l">
+              <a:defRPr sz="1300" b="0">
+                <a:solidFill>
+                  <a:srgbClr val="F5F0E8"/>
+                </a:solidFill>
+                <a:latin typeface="Calibri"/>
+              </a:defRPr>
+            </a:pPr>
+            <a:r>
+              <a:t>16領域になった今、残りの研修期間で</a:t>
+            </a:r>
+            <a:br/>
+            <a:r>
+              <a:t>どの領域を「質の高い事例」として書きたいか？</a:t>
+            </a:r>
+          </a:p>
+        </p:txBody>
+      </p:sp>
+      <p:sp>
+        <p:nvSpPr>
+          <p:cNvPr id="8" name="Rectangle 7"/>
           <p:cNvSpPr/>
           <p:nvPr/>
         </p:nvSpPr>
         <p:spPr>
           <a:xfrm>
-            <a:off x="566928" y="3566160"/>
-            <a:ext cx="8119872" cy="685800"/>
+            <a:off x="731520" y="2377440"/>
+            <a:ext cx="7680960" cy="1005840"/>
           </a:xfrm>
           <a:prstGeom prst="rect">
             <a:avLst/>
           </a:prstGeom>
           <a:solidFill>
-            <a:srgbClr val="FFFFFF"/>
+            <a:srgbClr val="0D2B3E"/>
           </a:solidFill>
           <a:ln w="12700">
             <a:solidFill>
-              <a:srgbClr val="4EB8A9"/>
+              <a:srgbClr val="E89B3B"/>
             </a:solidFill>
           </a:ln>
         </p:spPr>
@@ -6333,14 +5847,14 @@
       </p:sp>
       <p:sp>
         <p:nvSpPr>
-          <p:cNvPr id="10" name="TextBox 9"/>
+          <p:cNvPr id="9" name="TextBox 8"/>
           <p:cNvSpPr txBox="1"/>
           <p:nvPr/>
         </p:nvSpPr>
         <p:spPr>
           <a:xfrm>
-            <a:off x="685800" y="3639312"/>
-            <a:ext cx="7863840" cy="539496"/>
+            <a:off x="914400" y="2423160"/>
+            <a:ext cx="2011680" cy="822960"/>
           </a:xfrm>
           <a:prstGeom prst="rect">
             <a:avLst/>
@@ -6354,33 +5868,33 @@
           <a:lstStyle/>
           <a:p>
             <a:pPr algn="l">
-              <a:defRPr sz="1200" b="0">
-                <a:solidFill>
-                  <a:srgbClr val="1A1A2E"/>
-                </a:solidFill>
-                <a:latin typeface="Georgia"/>
+              <a:defRPr sz="1300" b="1">
+                <a:solidFill>
+                  <a:srgbClr val="E89B3B"/>
+                </a:solidFill>
+                <a:latin typeface="Calibri"/>
               </a:defRPr>
             </a:pPr>
             <a:r>
-              <a:t>家庭医療専門医の研修で培う能力 ≒ かかりつけ医機能報告で求められる能力</a:t>
+              <a:t>問い B</a:t>
             </a:r>
             <a:br/>
             <a:r>
-              <a:t>あなたの存在が、医療機関の「かかりつけ医機能」を高める</a:t>
-            </a:r>
-          </a:p>
-        </p:txBody>
-      </p:sp>
-      <p:sp>
-        <p:nvSpPr>
-          <p:cNvPr id="11" name="TextBox 10"/>
+              <a:t>研修医向け</a:t>
+            </a:r>
+          </a:p>
+        </p:txBody>
+      </p:sp>
+      <p:sp>
+        <p:nvSpPr>
+          <p:cNvPr id="10" name="TextBox 9"/>
           <p:cNvSpPr txBox="1"/>
           <p:nvPr/>
         </p:nvSpPr>
         <p:spPr>
           <a:xfrm>
-            <a:off x="640080" y="4297680"/>
-            <a:ext cx="7772400" cy="731520"/>
+            <a:off x="3017520" y="2468880"/>
+            <a:ext cx="5212080" cy="731520"/>
           </a:xfrm>
           <a:prstGeom prst="rect">
             <a:avLst/>
@@ -6393,45 +5907,145 @@
           </a:bodyPr>
           <a:lstStyle/>
           <a:p>
-            <a:pPr>
-              <a:defRPr sz="1100">
+            <a:pPr algn="l">
+              <a:defRPr sz="1300" b="0">
                 <a:solidFill>
                   <a:srgbClr val="F5F0E8"/>
                 </a:solidFill>
                 <a:latin typeface="Calibri"/>
               </a:defRPr>
-              <a:buChar char="●"/>
             </a:pPr>
             <a:r>
-              <a:t>報告制度の17診療領域 ≒ 家庭医が日常的に扱う領域</a:t>
-            </a:r>
-          </a:p>
-          <a:p>
-            <a:pPr>
-              <a:defRPr sz="1100">
+              <a:t>かかりつけ医機能報告制度で求められる能力のうち</a:t>
+            </a:r>
+            <a:br/>
+            <a:r>
+              <a:t>今の研修で意識的に伸ばせるものは何か？</a:t>
+            </a:r>
+          </a:p>
+        </p:txBody>
+      </p:sp>
+      <p:sp>
+        <p:nvSpPr>
+          <p:cNvPr id="11" name="Rectangle 10"/>
+          <p:cNvSpPr/>
+          <p:nvPr/>
+        </p:nvSpPr>
+        <p:spPr>
+          <a:xfrm>
+            <a:off x="731520" y="3566160"/>
+            <a:ext cx="7680960" cy="1005840"/>
+          </a:xfrm>
+          <a:prstGeom prst="rect">
+            <a:avLst/>
+          </a:prstGeom>
+          <a:solidFill>
+            <a:srgbClr val="0D2B3E"/>
+          </a:solidFill>
+          <a:ln w="12700">
+            <a:solidFill>
+              <a:srgbClr val="E89B3B"/>
+            </a:solidFill>
+          </a:ln>
+        </p:spPr>
+        <p:style>
+          <a:lnRef idx="1">
+            <a:schemeClr val="accent1"/>
+          </a:lnRef>
+          <a:fillRef idx="3">
+            <a:schemeClr val="accent1"/>
+          </a:fillRef>
+          <a:effectRef idx="2">
+            <a:schemeClr val="accent1"/>
+          </a:effectRef>
+          <a:fontRef idx="minor">
+            <a:schemeClr val="lt1"/>
+          </a:fontRef>
+        </p:style>
+        <p:txBody>
+          <a:bodyPr rtlCol="0" anchor="ctr"/>
+          <a:lstStyle/>
+          <a:p>
+            <a:pPr algn="ctr"/>
+          </a:p>
+        </p:txBody>
+      </p:sp>
+      <p:sp>
+        <p:nvSpPr>
+          <p:cNvPr id="12" name="TextBox 11"/>
+          <p:cNvSpPr txBox="1"/>
+          <p:nvPr/>
+        </p:nvSpPr>
+        <p:spPr>
+          <a:xfrm>
+            <a:off x="914400" y="3611880"/>
+            <a:ext cx="2011680" cy="822960"/>
+          </a:xfrm>
+          <a:prstGeom prst="rect">
+            <a:avLst/>
+          </a:prstGeom>
+          <a:noFill/>
+        </p:spPr>
+        <p:txBody>
+          <a:bodyPr wrap="square" lIns="45720" rIns="45720" tIns="27432" bIns="27432">
+            <a:spAutoFit/>
+          </a:bodyPr>
+          <a:lstStyle/>
+          <a:p>
+            <a:pPr algn="l">
+              <a:defRPr sz="1300" b="1">
+                <a:solidFill>
+                  <a:srgbClr val="E89B3B"/>
+                </a:solidFill>
+                <a:latin typeface="Calibri"/>
+              </a:defRPr>
+            </a:pPr>
+            <a:r>
+              <a:t>問い C</a:t>
+            </a:r>
+            <a:br/>
+            <a:r>
+              <a:t>指導医向け</a:t>
+            </a:r>
+          </a:p>
+        </p:txBody>
+      </p:sp>
+      <p:sp>
+        <p:nvSpPr>
+          <p:cNvPr id="13" name="TextBox 12"/>
+          <p:cNvSpPr txBox="1"/>
+          <p:nvPr/>
+        </p:nvSpPr>
+        <p:spPr>
+          <a:xfrm>
+            <a:off x="3017520" y="3657600"/>
+            <a:ext cx="5212080" cy="731520"/>
+          </a:xfrm>
+          <a:prstGeom prst="rect">
+            <a:avLst/>
+          </a:prstGeom>
+          <a:noFill/>
+        </p:spPr>
+        <p:txBody>
+          <a:bodyPr wrap="square" lIns="45720" rIns="45720" tIns="27432" bIns="27432">
+            <a:spAutoFit/>
+          </a:bodyPr>
+          <a:lstStyle/>
+          <a:p>
+            <a:pPr algn="l">
+              <a:defRPr sz="1300" b="0">
                 <a:solidFill>
                   <a:srgbClr val="F5F0E8"/>
                 </a:solidFill>
                 <a:latin typeface="Calibri"/>
               </a:defRPr>
-              <a:buChar char="●"/>
             </a:pPr>
             <a:r>
-              <a:t>「総合診療専門医を配置しているか」が報告項目に含まれる</a:t>
-            </a:r>
-          </a:p>
-          <a:p>
-            <a:pPr>
-              <a:defRPr sz="1100">
-                <a:solidFill>
-                  <a:srgbClr val="F5F0E8"/>
-                </a:solidFill>
-                <a:latin typeface="Calibri"/>
-              </a:defRPr>
-              <a:buChar char="●"/>
-            </a:pPr>
-            <a:r>
-              <a:t>あなたの存在が医療機関の「かかりつけ医機能」を高める</a:t>
+              <a:t>ポートフォリオ領域が統合された今、</a:t>
+            </a:r>
+            <a:br/>
+            <a:r>
+              <a:t>指導でどんな点を強調するか？</a:t>
             </a:r>
           </a:p>
         </p:txBody>
@@ -6444,7 +6058,7 @@
 </p:sld>
 </file>
 
-<file path=ppt/slides/slide5.xml><?xml version="1.0" encoding="utf-8"?>
+<file path=ppt/slides/slide6.xml><?xml version="1.0" encoding="utf-8"?>
 <p:sld xmlns:a="http://schemas.openxmlformats.org/drawingml/2006/main" xmlns:p="http://schemas.openxmlformats.org/presentationml/2006/main" xmlns:r="http://schemas.openxmlformats.org/officeDocument/2006/relationships">
   <p:cSld>
     <p:bg>
@@ -6513,8 +6127,8 @@
         </p:nvSpPr>
         <p:spPr>
           <a:xfrm>
-            <a:off x="640080" y="274320"/>
-            <a:ext cx="7315200" cy="457200"/>
+            <a:off x="640080" y="182880"/>
+            <a:ext cx="5486400" cy="457200"/>
           </a:xfrm>
           <a:prstGeom prst="rect">
             <a:avLst/>
@@ -6528,7 +6142,7 @@
           <a:lstStyle/>
           <a:p>
             <a:pPr algn="l">
-              <a:defRPr sz="2000" b="1">
+              <a:defRPr sz="2200" b="1">
                 <a:solidFill>
                   <a:srgbClr val="1A1A2E"/>
                 </a:solidFill>
@@ -6536,21 +6150,64 @@
               </a:defRPr>
             </a:pPr>
             <a:r>
-              <a:t>ペアディスカッション — 自分の戦略を考える</a:t>
-            </a:r>
-          </a:p>
-        </p:txBody>
-      </p:sp>
-      <p:sp>
-        <p:nvSpPr>
-          <p:cNvPr id="4" name="TextBox 3"/>
+              <a:t>振り返りと持ち帰り</a:t>
+            </a:r>
+          </a:p>
+        </p:txBody>
+      </p:sp>
+      <p:sp>
+        <p:nvSpPr>
+          <p:cNvPr id="4" name="Rectangle 3"/>
+          <p:cNvSpPr/>
+          <p:nvPr/>
+        </p:nvSpPr>
+        <p:spPr>
+          <a:xfrm>
+            <a:off x="640080" y="822960"/>
+            <a:ext cx="4572000" cy="640080"/>
+          </a:xfrm>
+          <a:prstGeom prst="rect">
+            <a:avLst/>
+          </a:prstGeom>
+          <a:solidFill>
+            <a:srgbClr val="E89B3B"/>
+          </a:solidFill>
+          <a:ln>
+            <a:noFill/>
+          </a:ln>
+        </p:spPr>
+        <p:style>
+          <a:lnRef idx="1">
+            <a:schemeClr val="accent1"/>
+          </a:lnRef>
+          <a:fillRef idx="3">
+            <a:schemeClr val="accent1"/>
+          </a:fillRef>
+          <a:effectRef idx="2">
+            <a:schemeClr val="accent1"/>
+          </a:effectRef>
+          <a:fontRef idx="minor">
+            <a:schemeClr val="lt1"/>
+          </a:fontRef>
+        </p:style>
+        <p:txBody>
+          <a:bodyPr rtlCol="0" anchor="ctr"/>
+          <a:lstStyle/>
+          <a:p>
+            <a:pPr algn="ctr"/>
+          </a:p>
+        </p:txBody>
+      </p:sp>
+      <p:sp>
+        <p:nvSpPr>
+          <p:cNvPr id="5" name="TextBox 4"/>
           <p:cNvSpPr txBox="1"/>
           <p:nvPr/>
         </p:nvSpPr>
         <p:spPr>
           <a:xfrm>
-            <a:off x="640080" y="685800"/>
-            <a:ext cx="7315200" cy="274320"/>
+            <a:off x="777240" y="841248"/>
+            <a:ext cx="4389120" cy="320040"/>
           </a:xfrm>
           <a:prstGeom prst="rect">
             <a:avLst/>
@@ -6564,29 +6221,331 @@
           <a:lstStyle/>
           <a:p>
             <a:pPr algn="l">
+              <a:defRPr sz="1400" b="1">
+                <a:solidFill>
+                  <a:srgbClr val="0D2B3E"/>
+                </a:solidFill>
+                <a:latin typeface="Calibri"/>
+              </a:defRPr>
+            </a:pPr>
+            <a:r>
+              <a:t>1. 量から質へ</a:t>
+            </a:r>
+          </a:p>
+        </p:txBody>
+      </p:sp>
+      <p:sp>
+        <p:nvSpPr>
+          <p:cNvPr id="6" name="TextBox 5"/>
+          <p:cNvSpPr txBox="1"/>
+          <p:nvPr/>
+        </p:nvSpPr>
+        <p:spPr>
+          <a:xfrm>
+            <a:off x="777240" y="1143000"/>
+            <a:ext cx="4389120" cy="274320"/>
+          </a:xfrm>
+          <a:prstGeom prst="rect">
+            <a:avLst/>
+          </a:prstGeom>
+          <a:noFill/>
+        </p:spPr>
+        <p:txBody>
+          <a:bodyPr wrap="square" lIns="45720" rIns="45720" tIns="27432" bIns="27432">
+            <a:spAutoFit/>
+          </a:bodyPr>
+          <a:lstStyle/>
+          <a:p>
+            <a:pPr algn="l">
               <a:defRPr sz="1000" b="0">
                 <a:solidFill>
-                  <a:srgbClr val="7A8A9A"/>
+                  <a:srgbClr val="0D2B3E"/>
                 </a:solidFill>
                 <a:latin typeface="Calibri"/>
               </a:defRPr>
             </a:pPr>
             <a:r>
-              <a:t>事象6+7: 練習 + フィードバック | 9-13分 | ペアワーク3分 + 共有1分</a:t>
-            </a:r>
-          </a:p>
-        </p:txBody>
-      </p:sp>
-      <p:sp>
-        <p:nvSpPr>
-          <p:cNvPr id="5" name="Rectangle 4"/>
+              <a:t>20→16領域の削減は、1事例あたりの深さ・多面性を重視する方向</a:t>
+            </a:r>
+          </a:p>
+        </p:txBody>
+      </p:sp>
+      <p:sp>
+        <p:nvSpPr>
+          <p:cNvPr id="7" name="Rectangle 6"/>
           <p:cNvSpPr/>
           <p:nvPr/>
         </p:nvSpPr>
         <p:spPr>
           <a:xfrm>
-            <a:off x="731520" y="1188720"/>
-            <a:ext cx="7680960" cy="1005840"/>
+            <a:off x="640080" y="1645920"/>
+            <a:ext cx="4572000" cy="640080"/>
+          </a:xfrm>
+          <a:prstGeom prst="rect">
+            <a:avLst/>
+          </a:prstGeom>
+          <a:solidFill>
+            <a:srgbClr val="E89B3B"/>
+          </a:solidFill>
+          <a:ln>
+            <a:noFill/>
+          </a:ln>
+        </p:spPr>
+        <p:style>
+          <a:lnRef idx="1">
+            <a:schemeClr val="accent1"/>
+          </a:lnRef>
+          <a:fillRef idx="3">
+            <a:schemeClr val="accent1"/>
+          </a:fillRef>
+          <a:effectRef idx="2">
+            <a:schemeClr val="accent1"/>
+          </a:effectRef>
+          <a:fontRef idx="minor">
+            <a:schemeClr val="lt1"/>
+          </a:fontRef>
+        </p:style>
+        <p:txBody>
+          <a:bodyPr rtlCol="0" anchor="ctr"/>
+          <a:lstStyle/>
+          <a:p>
+            <a:pPr algn="ctr"/>
+          </a:p>
+        </p:txBody>
+      </p:sp>
+      <p:sp>
+        <p:nvSpPr>
+          <p:cNvPr id="8" name="TextBox 7"/>
+          <p:cNvSpPr txBox="1"/>
+          <p:nvPr/>
+        </p:nvSpPr>
+        <p:spPr>
+          <a:xfrm>
+            <a:off x="777240" y="1664208"/>
+            <a:ext cx="4389120" cy="320040"/>
+          </a:xfrm>
+          <a:prstGeom prst="rect">
+            <a:avLst/>
+          </a:prstGeom>
+          <a:noFill/>
+        </p:spPr>
+        <p:txBody>
+          <a:bodyPr wrap="square" lIns="45720" rIns="45720" tIns="27432" bIns="27432">
+            <a:spAutoFit/>
+          </a:bodyPr>
+          <a:lstStyle/>
+          <a:p>
+            <a:pPr algn="l">
+              <a:defRPr sz="1400" b="1">
+                <a:solidFill>
+                  <a:srgbClr val="0D2B3E"/>
+                </a:solidFill>
+                <a:latin typeface="Calibri"/>
+              </a:defRPr>
+            </a:pPr>
+            <a:r>
+              <a:t>2. 制度と教育の融合</a:t>
+            </a:r>
+          </a:p>
+        </p:txBody>
+      </p:sp>
+      <p:sp>
+        <p:nvSpPr>
+          <p:cNvPr id="9" name="TextBox 8"/>
+          <p:cNvSpPr txBox="1"/>
+          <p:nvPr/>
+        </p:nvSpPr>
+        <p:spPr>
+          <a:xfrm>
+            <a:off x="777240" y="1965960"/>
+            <a:ext cx="4389120" cy="274320"/>
+          </a:xfrm>
+          <a:prstGeom prst="rect">
+            <a:avLst/>
+          </a:prstGeom>
+          <a:noFill/>
+        </p:spPr>
+        <p:txBody>
+          <a:bodyPr wrap="square" lIns="45720" rIns="45720" tIns="27432" bIns="27432">
+            <a:spAutoFit/>
+          </a:bodyPr>
+          <a:lstStyle/>
+          <a:p>
+            <a:pPr algn="l">
+              <a:defRPr sz="1000" b="0">
+                <a:solidFill>
+                  <a:srgbClr val="0D2B3E"/>
+                </a:solidFill>
+                <a:latin typeface="Calibri"/>
+              </a:defRPr>
+            </a:pPr>
+            <a:r>
+              <a:t>かかりつけ医機能報告制度と専門医研修は同じ方向を向いている</a:t>
+            </a:r>
+          </a:p>
+        </p:txBody>
+      </p:sp>
+      <p:sp>
+        <p:nvSpPr>
+          <p:cNvPr id="10" name="Rectangle 9"/>
+          <p:cNvSpPr/>
+          <p:nvPr/>
+        </p:nvSpPr>
+        <p:spPr>
+          <a:xfrm>
+            <a:off x="640080" y="2468880"/>
+            <a:ext cx="4572000" cy="640080"/>
+          </a:xfrm>
+          <a:prstGeom prst="rect">
+            <a:avLst/>
+          </a:prstGeom>
+          <a:solidFill>
+            <a:srgbClr val="E89B3B"/>
+          </a:solidFill>
+          <a:ln>
+            <a:noFill/>
+          </a:ln>
+        </p:spPr>
+        <p:style>
+          <a:lnRef idx="1">
+            <a:schemeClr val="accent1"/>
+          </a:lnRef>
+          <a:fillRef idx="3">
+            <a:schemeClr val="accent1"/>
+          </a:fillRef>
+          <a:effectRef idx="2">
+            <a:schemeClr val="accent1"/>
+          </a:effectRef>
+          <a:fontRef idx="minor">
+            <a:schemeClr val="lt1"/>
+          </a:fontRef>
+        </p:style>
+        <p:txBody>
+          <a:bodyPr rtlCol="0" anchor="ctr"/>
+          <a:lstStyle/>
+          <a:p>
+            <a:pPr algn="ctr"/>
+          </a:p>
+        </p:txBody>
+      </p:sp>
+      <p:sp>
+        <p:nvSpPr>
+          <p:cNvPr id="11" name="TextBox 10"/>
+          <p:cNvSpPr txBox="1"/>
+          <p:nvPr/>
+        </p:nvSpPr>
+        <p:spPr>
+          <a:xfrm>
+            <a:off x="777240" y="2487168"/>
+            <a:ext cx="4389120" cy="320040"/>
+          </a:xfrm>
+          <a:prstGeom prst="rect">
+            <a:avLst/>
+          </a:prstGeom>
+          <a:noFill/>
+        </p:spPr>
+        <p:txBody>
+          <a:bodyPr wrap="square" lIns="45720" rIns="45720" tIns="27432" bIns="27432">
+            <a:spAutoFit/>
+          </a:bodyPr>
+          <a:lstStyle/>
+          <a:p>
+            <a:pPr algn="l">
+              <a:defRPr sz="1400" b="1">
+                <a:solidFill>
+                  <a:srgbClr val="0D2B3E"/>
+                </a:solidFill>
+                <a:latin typeface="Calibri"/>
+              </a:defRPr>
+            </a:pPr>
+            <a:r>
+              <a:t>3. あなたの価値</a:t>
+            </a:r>
+          </a:p>
+        </p:txBody>
+      </p:sp>
+      <p:sp>
+        <p:nvSpPr>
+          <p:cNvPr id="12" name="TextBox 11"/>
+          <p:cNvSpPr txBox="1"/>
+          <p:nvPr/>
+        </p:nvSpPr>
+        <p:spPr>
+          <a:xfrm>
+            <a:off x="777240" y="2788920"/>
+            <a:ext cx="4389120" cy="274320"/>
+          </a:xfrm>
+          <a:prstGeom prst="rect">
+            <a:avLst/>
+          </a:prstGeom>
+          <a:noFill/>
+        </p:spPr>
+        <p:txBody>
+          <a:bodyPr wrap="square" lIns="45720" rIns="45720" tIns="27432" bIns="27432">
+            <a:spAutoFit/>
+          </a:bodyPr>
+          <a:lstStyle/>
+          <a:p>
+            <a:pPr algn="l">
+              <a:defRPr sz="1000" b="0">
+                <a:solidFill>
+                  <a:srgbClr val="0D2B3E"/>
+                </a:solidFill>
+                <a:latin typeface="Calibri"/>
+              </a:defRPr>
+            </a:pPr>
+            <a:r>
+              <a:t>総合診療/家庭医療専門医は、これからの医療制度で求められる存在</a:t>
+            </a:r>
+          </a:p>
+        </p:txBody>
+      </p:sp>
+      <p:sp>
+        <p:nvSpPr>
+          <p:cNvPr id="13" name="TextBox 12"/>
+          <p:cNvSpPr txBox="1"/>
+          <p:nvPr/>
+        </p:nvSpPr>
+        <p:spPr>
+          <a:xfrm>
+            <a:off x="5486400" y="822960"/>
+            <a:ext cx="3383280" cy="274320"/>
+          </a:xfrm>
+          <a:prstGeom prst="rect">
+            <a:avLst/>
+          </a:prstGeom>
+          <a:noFill/>
+        </p:spPr>
+        <p:txBody>
+          <a:bodyPr wrap="square" lIns="45720" rIns="45720" tIns="27432" bIns="27432">
+            <a:spAutoFit/>
+          </a:bodyPr>
+          <a:lstStyle/>
+          <a:p>
+            <a:pPr algn="l">
+              <a:defRPr sz="1400" b="1">
+                <a:solidFill>
+                  <a:srgbClr val="E89B3B"/>
+                </a:solidFill>
+                <a:latin typeface="Calibri"/>
+              </a:defRPr>
+            </a:pPr>
+            <a:r>
+              <a:t>次のアクション</a:t>
+            </a:r>
+          </a:p>
+        </p:txBody>
+      </p:sp>
+      <p:sp>
+        <p:nvSpPr>
+          <p:cNvPr id="14" name="Rectangle 13"/>
+          <p:cNvSpPr/>
+          <p:nvPr/>
+        </p:nvSpPr>
+        <p:spPr>
+          <a:xfrm>
+            <a:off x="5486400" y="1188720"/>
+            <a:ext cx="3383280" cy="594360"/>
           </a:xfrm>
           <a:prstGeom prst="rect">
             <a:avLst/>
@@ -6624,14 +6583,14 @@
       </p:sp>
       <p:sp>
         <p:nvSpPr>
-          <p:cNvPr id="6" name="TextBox 5"/>
+          <p:cNvPr id="15" name="TextBox 14"/>
           <p:cNvSpPr txBox="1"/>
           <p:nvPr/>
         </p:nvSpPr>
         <p:spPr>
           <a:xfrm>
-            <a:off x="914400" y="1234440"/>
-            <a:ext cx="2743200" cy="274320"/>
+            <a:off x="5623560" y="1207008"/>
+            <a:ext cx="914400" cy="274320"/>
           </a:xfrm>
           <a:prstGeom prst="rect">
             <a:avLst/>
@@ -6645,7 +6604,7 @@
           <a:lstStyle/>
           <a:p>
             <a:pPr algn="l">
-              <a:defRPr sz="1300" b="1">
+              <a:defRPr sz="1100" b="1">
                 <a:solidFill>
                   <a:srgbClr val="E89B3B"/>
                 </a:solidFill>
@@ -6653,21 +6612,21 @@
               </a:defRPr>
             </a:pPr>
             <a:r>
-              <a:t>問い A（専攻医向け）</a:t>
-            </a:r>
-          </a:p>
-        </p:txBody>
-      </p:sp>
-      <p:sp>
-        <p:nvSpPr>
-          <p:cNvPr id="7" name="TextBox 6"/>
+              <a:t>今週</a:t>
+            </a:r>
+          </a:p>
+        </p:txBody>
+      </p:sp>
+      <p:sp>
+        <p:nvSpPr>
+          <p:cNvPr id="16" name="TextBox 15"/>
           <p:cNvSpPr txBox="1"/>
           <p:nvPr/>
         </p:nvSpPr>
         <p:spPr>
           <a:xfrm>
-            <a:off x="914400" y="1508760"/>
-            <a:ext cx="7132320" cy="594360"/>
+            <a:off x="6583680" y="1207008"/>
+            <a:ext cx="2194560" cy="502920"/>
           </a:xfrm>
           <a:prstGeom prst="rect">
             <a:avLst/>
@@ -6681,7 +6640,7 @@
           <a:lstStyle/>
           <a:p>
             <a:pPr algn="l">
-              <a:defRPr sz="1200" b="0">
+              <a:defRPr sz="1000" b="0">
                 <a:solidFill>
                   <a:srgbClr val="1A1A2E"/>
                 </a:solidFill>
@@ -6689,21 +6648,21 @@
               </a:defRPr>
             </a:pPr>
             <a:r>
-              <a:t>ポートフォリオが16領域になった今、残りの研修期間でどの領域を「質の高い事例」として書きたいか？ その理由は？</a:t>
-            </a:r>
-          </a:p>
-        </p:txBody>
-      </p:sp>
-      <p:sp>
-        <p:nvSpPr>
-          <p:cNvPr id="8" name="Rectangle 7"/>
+              <a:t>JPCA公式サイトで新16領域の詳細を確認</a:t>
+            </a:r>
+          </a:p>
+        </p:txBody>
+      </p:sp>
+      <p:sp>
+        <p:nvSpPr>
+          <p:cNvPr id="17" name="Rectangle 16"/>
           <p:cNvSpPr/>
           <p:nvPr/>
         </p:nvSpPr>
         <p:spPr>
           <a:xfrm>
-            <a:off x="731520" y="2377440"/>
-            <a:ext cx="7680960" cy="1005840"/>
+            <a:off x="5486400" y="1920240"/>
+            <a:ext cx="3383280" cy="594360"/>
           </a:xfrm>
           <a:prstGeom prst="rect">
             <a:avLst/>
@@ -6741,14 +6700,14 @@
       </p:sp>
       <p:sp>
         <p:nvSpPr>
-          <p:cNvPr id="9" name="TextBox 8"/>
+          <p:cNvPr id="18" name="TextBox 17"/>
           <p:cNvSpPr txBox="1"/>
           <p:nvPr/>
         </p:nvSpPr>
         <p:spPr>
           <a:xfrm>
-            <a:off x="914400" y="2423160"/>
-            <a:ext cx="2743200" cy="274320"/>
+            <a:off x="5623560" y="1938528"/>
+            <a:ext cx="914400" cy="274320"/>
           </a:xfrm>
           <a:prstGeom prst="rect">
             <a:avLst/>
@@ -6762,7 +6721,7 @@
           <a:lstStyle/>
           <a:p>
             <a:pPr algn="l">
-              <a:defRPr sz="1300" b="1">
+              <a:defRPr sz="1100" b="1">
                 <a:solidFill>
                   <a:srgbClr val="E89B3B"/>
                 </a:solidFill>
@@ -6770,21 +6729,21 @@
               </a:defRPr>
             </a:pPr>
             <a:r>
-              <a:t>問い B（研修医向け）</a:t>
-            </a:r>
-          </a:p>
-        </p:txBody>
-      </p:sp>
-      <p:sp>
-        <p:nvSpPr>
-          <p:cNvPr id="10" name="TextBox 9"/>
+              <a:t>来月</a:t>
+            </a:r>
+          </a:p>
+        </p:txBody>
+      </p:sp>
+      <p:sp>
+        <p:nvSpPr>
+          <p:cNvPr id="19" name="TextBox 18"/>
           <p:cNvSpPr txBox="1"/>
           <p:nvPr/>
         </p:nvSpPr>
         <p:spPr>
           <a:xfrm>
-            <a:off x="914400" y="2697480"/>
-            <a:ext cx="7132320" cy="594360"/>
+            <a:off x="6583680" y="1938528"/>
+            <a:ext cx="2194560" cy="502920"/>
           </a:xfrm>
           <a:prstGeom prst="rect">
             <a:avLst/>
@@ -6798,7 +6757,7 @@
           <a:lstStyle/>
           <a:p>
             <a:pPr algn="l">
-              <a:defRPr sz="1200" b="0">
+              <a:defRPr sz="1000" b="0">
                 <a:solidFill>
                   <a:srgbClr val="1A1A2E"/>
                 </a:solidFill>
@@ -6806,21 +6765,21 @@
               </a:defRPr>
             </a:pPr>
             <a:r>
-              <a:t>かかりつけ医機能報告制度で求められる能力のうち、今の研修で意識的に伸ばせるものは何か？</a:t>
-            </a:r>
-          </a:p>
-        </p:txBody>
-      </p:sp>
-      <p:sp>
-        <p:nvSpPr>
-          <p:cNvPr id="11" name="Rectangle 10"/>
+              <a:t>第17回JPCA学術大会（5/29-31 京都）の演題募集チェック</a:t>
+            </a:r>
+          </a:p>
+        </p:txBody>
+      </p:sp>
+      <p:sp>
+        <p:nvSpPr>
+          <p:cNvPr id="20" name="Rectangle 19"/>
           <p:cNvSpPr/>
           <p:nvPr/>
         </p:nvSpPr>
         <p:spPr>
           <a:xfrm>
-            <a:off x="731520" y="3566160"/>
-            <a:ext cx="7680960" cy="1005840"/>
+            <a:off x="5486400" y="2651760"/>
+            <a:ext cx="3383280" cy="594360"/>
           </a:xfrm>
           <a:prstGeom prst="rect">
             <a:avLst/>
@@ -6858,14 +6817,14 @@
       </p:sp>
       <p:sp>
         <p:nvSpPr>
-          <p:cNvPr id="12" name="TextBox 11"/>
+          <p:cNvPr id="21" name="TextBox 20"/>
           <p:cNvSpPr txBox="1"/>
           <p:nvPr/>
         </p:nvSpPr>
         <p:spPr>
           <a:xfrm>
-            <a:off x="914400" y="3611880"/>
-            <a:ext cx="2743200" cy="274320"/>
+            <a:off x="5623560" y="2670048"/>
+            <a:ext cx="914400" cy="274320"/>
           </a:xfrm>
           <a:prstGeom prst="rect">
             <a:avLst/>
@@ -6879,7 +6838,7 @@
           <a:lstStyle/>
           <a:p>
             <a:pPr algn="l">
-              <a:defRPr sz="1300" b="1">
+              <a:defRPr sz="1100" b="1">
                 <a:solidFill>
                   <a:srgbClr val="E89B3B"/>
                 </a:solidFill>
@@ -6887,21 +6846,21 @@
               </a:defRPr>
             </a:pPr>
             <a:r>
-              <a:t>問い C（指導医向け）</a:t>
-            </a:r>
-          </a:p>
-        </p:txBody>
-      </p:sp>
-      <p:sp>
-        <p:nvSpPr>
-          <p:cNvPr id="13" name="TextBox 12"/>
+              <a:t>今月中</a:t>
+            </a:r>
+          </a:p>
+        </p:txBody>
+      </p:sp>
+      <p:sp>
+        <p:nvSpPr>
+          <p:cNvPr id="22" name="TextBox 21"/>
           <p:cNvSpPr txBox="1"/>
           <p:nvPr/>
         </p:nvSpPr>
         <p:spPr>
           <a:xfrm>
-            <a:off x="914400" y="3886200"/>
-            <a:ext cx="7132320" cy="594360"/>
+            <a:off x="6583680" y="2670048"/>
+            <a:ext cx="2194560" cy="502920"/>
           </a:xfrm>
           <a:prstGeom prst="rect">
             <a:avLst/>
@@ -6915,7 +6874,7 @@
           <a:lstStyle/>
           <a:p>
             <a:pPr algn="l">
-              <a:defRPr sz="1200" b="0">
+              <a:defRPr sz="1000" b="0">
                 <a:solidFill>
                   <a:srgbClr val="1A1A2E"/>
                 </a:solidFill>
@@ -6923,83 +6882,21 @@
               </a:defRPr>
             </a:pPr>
             <a:r>
-              <a:t>ポートフォリオの領域が統合された今、指導でどんな点を強調するか？</a:t>
-            </a:r>
-          </a:p>
-        </p:txBody>
-      </p:sp>
-      <p:sp>
-        <p:nvSpPr>
-          <p:cNvPr id="14" name="TextBox 13"/>
-          <p:cNvSpPr txBox="1"/>
-          <p:nvPr/>
-        </p:nvSpPr>
-        <p:spPr>
-          <a:xfrm>
-            <a:off x="731520" y="4663440"/>
-            <a:ext cx="7680960" cy="274320"/>
-          </a:xfrm>
-          <a:prstGeom prst="rect">
-            <a:avLst/>
-          </a:prstGeom>
-          <a:noFill/>
-        </p:spPr>
-        <p:txBody>
-          <a:bodyPr wrap="square" lIns="45720" rIns="45720" tIns="27432" bIns="27432">
-            <a:spAutoFit/>
-          </a:bodyPr>
-          <a:lstStyle/>
-          <a:p>
-            <a:pPr algn="l">
-              <a:defRPr sz="1100" b="0">
-                <a:solidFill>
-                  <a:srgbClr val="7A8A9A"/>
-                </a:solidFill>
-                <a:latin typeface="Calibri"/>
-              </a:defRPr>
-            </a:pPr>
-            <a:r>
-              <a:t>隣の人とペアを組み、3つの問いから1つ選んで話し合ってください</a:t>
-            </a:r>
-          </a:p>
-        </p:txBody>
-      </p:sp>
-    </p:spTree>
-  </p:cSld>
-  <p:clrMapOvr>
-    <a:masterClrMapping/>
-  </p:clrMapOvr>
-</p:sld>
-</file>
-
-<file path=ppt/slides/slide6.xml><?xml version="1.0" encoding="utf-8"?>
-<p:sld xmlns:a="http://schemas.openxmlformats.org/drawingml/2006/main" xmlns:p="http://schemas.openxmlformats.org/presentationml/2006/main" xmlns:r="http://schemas.openxmlformats.org/officeDocument/2006/relationships">
-  <p:cSld>
-    <p:bg>
-      <p:bgPr>
-        <a:solidFill>
-          <a:srgbClr val="0D2B3E"/>
-        </a:solidFill>
-        <a:effectLst/>
-      </p:bgPr>
-    </p:bg>
-    <p:spTree>
-      <p:nvGrpSpPr>
-        <p:cNvPr id="1" name=""/>
-        <p:cNvGrpSpPr/>
-        <p:nvPr/>
-      </p:nvGrpSpPr>
-      <p:grpSpPr/>
-      <p:sp>
-        <p:nvSpPr>
-          <p:cNvPr id="2" name="Rectangle 1"/>
+              <a:t>指導医とポートフォリオ進捗を振り返る</a:t>
+            </a:r>
+          </a:p>
+        </p:txBody>
+      </p:sp>
+      <p:sp>
+        <p:nvSpPr>
+          <p:cNvPr id="23" name="Rectangle 22"/>
           <p:cNvSpPr/>
           <p:nvPr/>
         </p:nvSpPr>
         <p:spPr>
           <a:xfrm>
-            <a:off x="365760" y="274320"/>
-            <a:ext cx="73152" cy="4480560"/>
+            <a:off x="457200" y="3474720"/>
+            <a:ext cx="54864" cy="731520"/>
           </a:xfrm>
           <a:prstGeom prst="rect">
             <a:avLst/>
@@ -7035,510 +6932,14 @@
       </p:sp>
       <p:sp>
         <p:nvSpPr>
-          <p:cNvPr id="3" name="TextBox 2"/>
-          <p:cNvSpPr txBox="1"/>
-          <p:nvPr/>
-        </p:nvSpPr>
-        <p:spPr>
-          <a:xfrm>
-            <a:off x="640080" y="274320"/>
-            <a:ext cx="5486400" cy="457200"/>
-          </a:xfrm>
-          <a:prstGeom prst="rect">
-            <a:avLst/>
-          </a:prstGeom>
-          <a:noFill/>
-        </p:spPr>
-        <p:txBody>
-          <a:bodyPr wrap="square" lIns="45720" rIns="45720" tIns="27432" bIns="27432">
-            <a:spAutoFit/>
-          </a:bodyPr>
-          <a:lstStyle/>
-          <a:p>
-            <a:pPr algn="l">
-              <a:defRPr sz="2200" b="1">
-                <a:solidFill>
-                  <a:srgbClr val="F5F0E8"/>
-                </a:solidFill>
-                <a:latin typeface="Calibri"/>
-              </a:defRPr>
-            </a:pPr>
-            <a:r>
-              <a:t>振り返りと持ち帰り</a:t>
-            </a:r>
-          </a:p>
-        </p:txBody>
-      </p:sp>
-      <p:sp>
-        <p:nvSpPr>
-          <p:cNvPr id="4" name="TextBox 3"/>
-          <p:cNvSpPr txBox="1"/>
-          <p:nvPr/>
-        </p:nvSpPr>
-        <p:spPr>
-          <a:xfrm>
-            <a:off x="640080" y="685800"/>
-            <a:ext cx="4572000" cy="274320"/>
-          </a:xfrm>
-          <a:prstGeom prst="rect">
-            <a:avLst/>
-          </a:prstGeom>
-          <a:noFill/>
-        </p:spPr>
-        <p:txBody>
-          <a:bodyPr wrap="square" lIns="45720" rIns="45720" tIns="27432" bIns="27432">
-            <a:spAutoFit/>
-          </a:bodyPr>
-          <a:lstStyle/>
-          <a:p>
-            <a:pPr algn="l">
-              <a:defRPr sz="1000" b="0">
-                <a:solidFill>
-                  <a:srgbClr val="7A8A9A"/>
-                </a:solidFill>
-                <a:latin typeface="Calibri"/>
-              </a:defRPr>
-            </a:pPr>
-            <a:r>
-              <a:t>事象8+9 | 13-15分</a:t>
-            </a:r>
-          </a:p>
-        </p:txBody>
-      </p:sp>
-      <p:sp>
-        <p:nvSpPr>
-          <p:cNvPr id="5" name="Rectangle 4"/>
+          <p:cNvPr id="24" name="Rectangle 23"/>
           <p:cNvSpPr/>
           <p:nvPr/>
         </p:nvSpPr>
         <p:spPr>
           <a:xfrm>
-            <a:off x="640080" y="1097280"/>
-            <a:ext cx="3931920" cy="548640"/>
-          </a:xfrm>
-          <a:prstGeom prst="rect">
-            <a:avLst/>
-          </a:prstGeom>
-          <a:solidFill>
-            <a:srgbClr val="E89B3B"/>
-          </a:solidFill>
-          <a:ln>
-            <a:noFill/>
-          </a:ln>
-        </p:spPr>
-        <p:style>
-          <a:lnRef idx="1">
-            <a:schemeClr val="accent1"/>
-          </a:lnRef>
-          <a:fillRef idx="3">
-            <a:schemeClr val="accent1"/>
-          </a:fillRef>
-          <a:effectRef idx="2">
-            <a:schemeClr val="accent1"/>
-          </a:effectRef>
-          <a:fontRef idx="minor">
-            <a:schemeClr val="lt1"/>
-          </a:fontRef>
-        </p:style>
-        <p:txBody>
-          <a:bodyPr rtlCol="0" anchor="ctr"/>
-          <a:lstStyle/>
-          <a:p>
-            <a:pPr algn="ctr"/>
-          </a:p>
-        </p:txBody>
-      </p:sp>
-      <p:sp>
-        <p:nvSpPr>
-          <p:cNvPr id="6" name="TextBox 5"/>
-          <p:cNvSpPr txBox="1"/>
-          <p:nvPr/>
-        </p:nvSpPr>
-        <p:spPr>
-          <a:xfrm>
-            <a:off x="777240" y="1115568"/>
-            <a:ext cx="3657600" cy="274320"/>
-          </a:xfrm>
-          <a:prstGeom prst="rect">
-            <a:avLst/>
-          </a:prstGeom>
-          <a:noFill/>
-        </p:spPr>
-        <p:txBody>
-          <a:bodyPr wrap="square" lIns="45720" rIns="45720" tIns="27432" bIns="27432">
-            <a:spAutoFit/>
-          </a:bodyPr>
-          <a:lstStyle/>
-          <a:p>
-            <a:pPr algn="l">
-              <a:defRPr sz="1300" b="1">
-                <a:solidFill>
-                  <a:srgbClr val="0D2B3E"/>
-                </a:solidFill>
-                <a:latin typeface="Calibri"/>
-              </a:defRPr>
-            </a:pPr>
-            <a:r>
-              <a:t>1. 量から質へ</a:t>
-            </a:r>
-          </a:p>
-        </p:txBody>
-      </p:sp>
-      <p:sp>
-        <p:nvSpPr>
-          <p:cNvPr id="7" name="TextBox 6"/>
-          <p:cNvSpPr txBox="1"/>
-          <p:nvPr/>
-        </p:nvSpPr>
-        <p:spPr>
-          <a:xfrm>
-            <a:off x="777240" y="1371600"/>
-            <a:ext cx="3657600" cy="256032"/>
-          </a:xfrm>
-          <a:prstGeom prst="rect">
-            <a:avLst/>
-          </a:prstGeom>
-          <a:noFill/>
-        </p:spPr>
-        <p:txBody>
-          <a:bodyPr wrap="square" lIns="45720" rIns="45720" tIns="27432" bIns="27432">
-            <a:spAutoFit/>
-          </a:bodyPr>
-          <a:lstStyle/>
-          <a:p>
-            <a:pPr algn="l">
-              <a:defRPr sz="1000" b="0">
-                <a:solidFill>
-                  <a:srgbClr val="0D2B3E"/>
-                </a:solidFill>
-                <a:latin typeface="Calibri"/>
-              </a:defRPr>
-            </a:pPr>
-            <a:r>
-              <a:t>20→16領域の削減は、1事例あたりの深さ・多面性を重視する方向</a:t>
-            </a:r>
-          </a:p>
-        </p:txBody>
-      </p:sp>
-      <p:sp>
-        <p:nvSpPr>
-          <p:cNvPr id="8" name="Rectangle 7"/>
-          <p:cNvSpPr/>
-          <p:nvPr/>
-        </p:nvSpPr>
-        <p:spPr>
-          <a:xfrm>
-            <a:off x="640080" y="1783080"/>
-            <a:ext cx="3931920" cy="548640"/>
-          </a:xfrm>
-          <a:prstGeom prst="rect">
-            <a:avLst/>
-          </a:prstGeom>
-          <a:solidFill>
-            <a:srgbClr val="E89B3B"/>
-          </a:solidFill>
-          <a:ln>
-            <a:noFill/>
-          </a:ln>
-        </p:spPr>
-        <p:style>
-          <a:lnRef idx="1">
-            <a:schemeClr val="accent1"/>
-          </a:lnRef>
-          <a:fillRef idx="3">
-            <a:schemeClr val="accent1"/>
-          </a:fillRef>
-          <a:effectRef idx="2">
-            <a:schemeClr val="accent1"/>
-          </a:effectRef>
-          <a:fontRef idx="minor">
-            <a:schemeClr val="lt1"/>
-          </a:fontRef>
-        </p:style>
-        <p:txBody>
-          <a:bodyPr rtlCol="0" anchor="ctr"/>
-          <a:lstStyle/>
-          <a:p>
-            <a:pPr algn="ctr"/>
-          </a:p>
-        </p:txBody>
-      </p:sp>
-      <p:sp>
-        <p:nvSpPr>
-          <p:cNvPr id="9" name="TextBox 8"/>
-          <p:cNvSpPr txBox="1"/>
-          <p:nvPr/>
-        </p:nvSpPr>
-        <p:spPr>
-          <a:xfrm>
-            <a:off x="777240" y="1801368"/>
-            <a:ext cx="3657600" cy="274320"/>
-          </a:xfrm>
-          <a:prstGeom prst="rect">
-            <a:avLst/>
-          </a:prstGeom>
-          <a:noFill/>
-        </p:spPr>
-        <p:txBody>
-          <a:bodyPr wrap="square" lIns="45720" rIns="45720" tIns="27432" bIns="27432">
-            <a:spAutoFit/>
-          </a:bodyPr>
-          <a:lstStyle/>
-          <a:p>
-            <a:pPr algn="l">
-              <a:defRPr sz="1300" b="1">
-                <a:solidFill>
-                  <a:srgbClr val="0D2B3E"/>
-                </a:solidFill>
-                <a:latin typeface="Calibri"/>
-              </a:defRPr>
-            </a:pPr>
-            <a:r>
-              <a:t>2. 制度と教育の融合</a:t>
-            </a:r>
-          </a:p>
-        </p:txBody>
-      </p:sp>
-      <p:sp>
-        <p:nvSpPr>
-          <p:cNvPr id="10" name="TextBox 9"/>
-          <p:cNvSpPr txBox="1"/>
-          <p:nvPr/>
-        </p:nvSpPr>
-        <p:spPr>
-          <a:xfrm>
-            <a:off x="777240" y="2057400"/>
-            <a:ext cx="3657600" cy="256032"/>
-          </a:xfrm>
-          <a:prstGeom prst="rect">
-            <a:avLst/>
-          </a:prstGeom>
-          <a:noFill/>
-        </p:spPr>
-        <p:txBody>
-          <a:bodyPr wrap="square" lIns="45720" rIns="45720" tIns="27432" bIns="27432">
-            <a:spAutoFit/>
-          </a:bodyPr>
-          <a:lstStyle/>
-          <a:p>
-            <a:pPr algn="l">
-              <a:defRPr sz="1000" b="0">
-                <a:solidFill>
-                  <a:srgbClr val="0D2B3E"/>
-                </a:solidFill>
-                <a:latin typeface="Calibri"/>
-              </a:defRPr>
-            </a:pPr>
-            <a:r>
-              <a:t>かかりつけ医機能報告制度と専門医研修は同じ方向を向いている</a:t>
-            </a:r>
-          </a:p>
-        </p:txBody>
-      </p:sp>
-      <p:sp>
-        <p:nvSpPr>
-          <p:cNvPr id="11" name="Rectangle 10"/>
-          <p:cNvSpPr/>
-          <p:nvPr/>
-        </p:nvSpPr>
-        <p:spPr>
-          <a:xfrm>
-            <a:off x="640080" y="2468880"/>
-            <a:ext cx="3931920" cy="548640"/>
-          </a:xfrm>
-          <a:prstGeom prst="rect">
-            <a:avLst/>
-          </a:prstGeom>
-          <a:solidFill>
-            <a:srgbClr val="E89B3B"/>
-          </a:solidFill>
-          <a:ln>
-            <a:noFill/>
-          </a:ln>
-        </p:spPr>
-        <p:style>
-          <a:lnRef idx="1">
-            <a:schemeClr val="accent1"/>
-          </a:lnRef>
-          <a:fillRef idx="3">
-            <a:schemeClr val="accent1"/>
-          </a:fillRef>
-          <a:effectRef idx="2">
-            <a:schemeClr val="accent1"/>
-          </a:effectRef>
-          <a:fontRef idx="minor">
-            <a:schemeClr val="lt1"/>
-          </a:fontRef>
-        </p:style>
-        <p:txBody>
-          <a:bodyPr rtlCol="0" anchor="ctr"/>
-          <a:lstStyle/>
-          <a:p>
-            <a:pPr algn="ctr"/>
-          </a:p>
-        </p:txBody>
-      </p:sp>
-      <p:sp>
-        <p:nvSpPr>
-          <p:cNvPr id="12" name="TextBox 11"/>
-          <p:cNvSpPr txBox="1"/>
-          <p:nvPr/>
-        </p:nvSpPr>
-        <p:spPr>
-          <a:xfrm>
-            <a:off x="777240" y="2487168"/>
-            <a:ext cx="3657600" cy="274320"/>
-          </a:xfrm>
-          <a:prstGeom prst="rect">
-            <a:avLst/>
-          </a:prstGeom>
-          <a:noFill/>
-        </p:spPr>
-        <p:txBody>
-          <a:bodyPr wrap="square" lIns="45720" rIns="45720" tIns="27432" bIns="27432">
-            <a:spAutoFit/>
-          </a:bodyPr>
-          <a:lstStyle/>
-          <a:p>
-            <a:pPr algn="l">
-              <a:defRPr sz="1300" b="1">
-                <a:solidFill>
-                  <a:srgbClr val="0D2B3E"/>
-                </a:solidFill>
-                <a:latin typeface="Calibri"/>
-              </a:defRPr>
-            </a:pPr>
-            <a:r>
-              <a:t>3. あなたの価値</a:t>
-            </a:r>
-          </a:p>
-        </p:txBody>
-      </p:sp>
-      <p:sp>
-        <p:nvSpPr>
-          <p:cNvPr id="13" name="TextBox 12"/>
-          <p:cNvSpPr txBox="1"/>
-          <p:nvPr/>
-        </p:nvSpPr>
-        <p:spPr>
-          <a:xfrm>
-            <a:off x="777240" y="2743200"/>
-            <a:ext cx="3657600" cy="256032"/>
-          </a:xfrm>
-          <a:prstGeom prst="rect">
-            <a:avLst/>
-          </a:prstGeom>
-          <a:noFill/>
-        </p:spPr>
-        <p:txBody>
-          <a:bodyPr wrap="square" lIns="45720" rIns="45720" tIns="27432" bIns="27432">
-            <a:spAutoFit/>
-          </a:bodyPr>
-          <a:lstStyle/>
-          <a:p>
-            <a:pPr algn="l">
-              <a:defRPr sz="1000" b="0">
-                <a:solidFill>
-                  <a:srgbClr val="0D2B3E"/>
-                </a:solidFill>
-                <a:latin typeface="Calibri"/>
-              </a:defRPr>
-            </a:pPr>
-            <a:r>
-              <a:t>総合診療/家庭医療専門医は、これからの医療制度で求められる存在</a:t>
-            </a:r>
-          </a:p>
-        </p:txBody>
-      </p:sp>
-      <p:sp>
-        <p:nvSpPr>
-          <p:cNvPr id="14" name="TextBox 13"/>
-          <p:cNvSpPr txBox="1"/>
-          <p:nvPr/>
-        </p:nvSpPr>
-        <p:spPr>
-          <a:xfrm>
-            <a:off x="4846320" y="1097280"/>
-            <a:ext cx="3931920" cy="274320"/>
-          </a:xfrm>
-          <a:prstGeom prst="rect">
-            <a:avLst/>
-          </a:prstGeom>
-          <a:noFill/>
-        </p:spPr>
-        <p:txBody>
-          <a:bodyPr wrap="square" lIns="45720" rIns="45720" tIns="27432" bIns="27432">
-            <a:spAutoFit/>
-          </a:bodyPr>
-          <a:lstStyle/>
-          <a:p>
-            <a:pPr algn="l">
-              <a:defRPr sz="1400" b="1">
-                <a:solidFill>
-                  <a:srgbClr val="E89B3B"/>
-                </a:solidFill>
-                <a:latin typeface="Calibri"/>
-              </a:defRPr>
-            </a:pPr>
-            <a:r>
-              <a:t>持ち帰りの問い</a:t>
-            </a:r>
-          </a:p>
-        </p:txBody>
-      </p:sp>
-      <p:sp>
-        <p:nvSpPr>
-          <p:cNvPr id="15" name="Rectangle 14"/>
-          <p:cNvSpPr/>
-          <p:nvPr/>
-        </p:nvSpPr>
-        <p:spPr>
-          <a:xfrm>
-            <a:off x="4846320" y="1417320"/>
-            <a:ext cx="54864" cy="822960"/>
-          </a:xfrm>
-          <a:prstGeom prst="rect">
-            <a:avLst/>
-          </a:prstGeom>
-          <a:solidFill>
-            <a:srgbClr val="E89B3B"/>
-          </a:solidFill>
-          <a:ln>
-            <a:noFill/>
-          </a:ln>
-        </p:spPr>
-        <p:style>
-          <a:lnRef idx="1">
-            <a:schemeClr val="accent1"/>
-          </a:lnRef>
-          <a:fillRef idx="3">
-            <a:schemeClr val="accent1"/>
-          </a:fillRef>
-          <a:effectRef idx="2">
-            <a:schemeClr val="accent1"/>
-          </a:effectRef>
-          <a:fontRef idx="minor">
-            <a:schemeClr val="lt1"/>
-          </a:fontRef>
-        </p:style>
-        <p:txBody>
-          <a:bodyPr rtlCol="0" anchor="ctr"/>
-          <a:lstStyle/>
-          <a:p>
-            <a:pPr algn="ctr"/>
-          </a:p>
-        </p:txBody>
-      </p:sp>
-      <p:sp>
-        <p:nvSpPr>
-          <p:cNvPr id="16" name="Rectangle 15"/>
-          <p:cNvSpPr/>
-          <p:nvPr/>
-        </p:nvSpPr>
-        <p:spPr>
-          <a:xfrm>
-            <a:off x="4956048" y="1417320"/>
-            <a:ext cx="3822191" cy="822960"/>
+            <a:off x="566928" y="3474720"/>
+            <a:ext cx="8119872" cy="731520"/>
           </a:xfrm>
           <a:prstGeom prst="rect">
             <a:avLst/>
@@ -7576,14 +6977,14 @@
       </p:sp>
       <p:sp>
         <p:nvSpPr>
-          <p:cNvPr id="17" name="TextBox 16"/>
+          <p:cNvPr id="25" name="TextBox 24"/>
           <p:cNvSpPr txBox="1"/>
           <p:nvPr/>
         </p:nvSpPr>
         <p:spPr>
           <a:xfrm>
-            <a:off x="5074920" y="1490472"/>
-            <a:ext cx="3566160" cy="676656"/>
+            <a:off x="685800" y="3547872"/>
+            <a:ext cx="7863840" cy="585216"/>
           </a:xfrm>
           <a:prstGeom prst="rect">
             <a:avLst/>
@@ -7597,7 +6998,7 @@
           <a:lstStyle/>
           <a:p>
             <a:pPr algn="l">
-              <a:defRPr sz="1100" b="0">
+              <a:defRPr sz="1200" b="0">
                 <a:solidFill>
                   <a:srgbClr val="1A1A2E"/>
                 </a:solidFill>
@@ -7605,25 +7006,25 @@
               </a:defRPr>
             </a:pPr>
             <a:r>
-              <a:t>「自分のポートフォリオで一番自信のある領域と、一番苦手な領域は何か？</a:t>
+              <a:t>自分のポートフォリオで一番自信のある領域と、</a:t>
             </a:r>
             <a:br/>
             <a:r>
-              <a:t> 苦手な領域を、どの臨床場面で経験できるか？」</a:t>
-            </a:r>
-          </a:p>
-        </p:txBody>
-      </p:sp>
-      <p:sp>
-        <p:nvSpPr>
-          <p:cNvPr id="18" name="TextBox 17"/>
+              <a:t>一番苦手な領域は何か？苦手な領域をどの臨床場面で経験できるか？</a:t>
+            </a:r>
+          </a:p>
+        </p:txBody>
+      </p:sp>
+      <p:sp>
+        <p:nvSpPr>
+          <p:cNvPr id="26" name="TextBox 25"/>
           <p:cNvSpPr txBox="1"/>
           <p:nvPr/>
         </p:nvSpPr>
         <p:spPr>
           <a:xfrm>
-            <a:off x="4846320" y="2468880"/>
-            <a:ext cx="3931920" cy="274320"/>
+            <a:off x="640080" y="4663440"/>
+            <a:ext cx="8229600" cy="274320"/>
           </a:xfrm>
           <a:prstGeom prst="rect">
             <a:avLst/>
@@ -7637,116 +7038,15 @@
           <a:lstStyle/>
           <a:p>
             <a:pPr algn="l">
-              <a:defRPr sz="1400" b="1">
-                <a:solidFill>
-                  <a:srgbClr val="E89B3B"/>
+              <a:defRPr sz="800" b="0">
+                <a:solidFill>
+                  <a:srgbClr val="7A8A9A"/>
                 </a:solidFill>
                 <a:latin typeface="Calibri"/>
               </a:defRPr>
             </a:pPr>
             <a:r>
-              <a:t>次のアクション</a:t>
-            </a:r>
-          </a:p>
-        </p:txBody>
-      </p:sp>
-      <p:sp>
-        <p:nvSpPr>
-          <p:cNvPr id="19" name="TextBox 18"/>
-          <p:cNvSpPr txBox="1"/>
-          <p:nvPr/>
-        </p:nvSpPr>
-        <p:spPr>
-          <a:xfrm>
-            <a:off x="4846320" y="2743200"/>
-            <a:ext cx="3931920" cy="1371600"/>
-          </a:xfrm>
-          <a:prstGeom prst="rect">
-            <a:avLst/>
-          </a:prstGeom>
-          <a:noFill/>
-        </p:spPr>
-        <p:txBody>
-          <a:bodyPr wrap="square" lIns="45720" rIns="45720" tIns="27432" bIns="27432">
-            <a:spAutoFit/>
-          </a:bodyPr>
-          <a:lstStyle/>
-          <a:p>
-            <a:pPr>
-              <a:defRPr sz="1100">
-                <a:solidFill>
-                  <a:srgbClr val="F5F0E8"/>
-                </a:solidFill>
-                <a:latin typeface="Calibri"/>
-              </a:defRPr>
-              <a:buChar char="●"/>
-            </a:pPr>
-            <a:r>
-              <a:t>JPCA公式サイトで新16領域の詳細を確認</a:t>
-            </a:r>
-          </a:p>
-          <a:p>
-            <a:pPr>
-              <a:defRPr sz="1100">
-                <a:solidFill>
-                  <a:srgbClr val="F5F0E8"/>
-                </a:solidFill>
-                <a:latin typeface="Calibri"/>
-              </a:defRPr>
-              <a:buChar char="●"/>
-            </a:pPr>
-            <a:r>
-              <a:t>第17回JPCA学術大会（5/29-31 京都）の演題募集チェック</a:t>
-            </a:r>
-          </a:p>
-          <a:p>
-            <a:pPr>
-              <a:defRPr sz="1100">
-                <a:solidFill>
-                  <a:srgbClr val="F5F0E8"/>
-                </a:solidFill>
-                <a:latin typeface="Calibri"/>
-              </a:defRPr>
-              <a:buChar char="●"/>
-            </a:pPr>
-            <a:r>
-              <a:t>指導医とポートフォリオ進捗を振り返る機会を設定</a:t>
-            </a:r>
-          </a:p>
-        </p:txBody>
-      </p:sp>
-      <p:sp>
-        <p:nvSpPr>
-          <p:cNvPr id="20" name="TextBox 19"/>
-          <p:cNvSpPr txBox="1"/>
-          <p:nvPr/>
-        </p:nvSpPr>
-        <p:spPr>
-          <a:xfrm>
-            <a:off x="640080" y="4663440"/>
-            <a:ext cx="8229600" cy="274320"/>
-          </a:xfrm>
-          <a:prstGeom prst="rect">
-            <a:avLst/>
-          </a:prstGeom>
-          <a:noFill/>
-        </p:spPr>
-        <p:txBody>
-          <a:bodyPr wrap="square" lIns="45720" rIns="45720" tIns="27432" bIns="27432">
-            <a:spAutoFit/>
-          </a:bodyPr>
-          <a:lstStyle/>
-          <a:p>
-            <a:pPr algn="l">
-              <a:defRPr sz="800" b="0">
-                <a:solidFill>
-                  <a:srgbClr val="7A8A9A"/>
-                </a:solidFill>
-                <a:latin typeface="Calibri"/>
-              </a:defRPr>
-            </a:pPr>
-            <a:r>
-              <a:t>Scribe Agent | 2026-03-27 | ガニェの9教授事象 | 15分セッション</a:t>
+              <a:t>Scribe Agent | 2026-03-27 | ガニェの9教授事象 | 15分</a:t>
             </a:r>
           </a:p>
         </p:txBody>

--- a/output/education/2026-03-27_family-medicine-board-revision/family-medicine-board-revision_slides_residents.pptx
+++ b/output/education/2026-03-27_family-medicine-board-revision/family-medicine-board-revision_slides_residents.pptx
@@ -3140,7 +3140,9 @@
           <a:bodyPr rtlCol="0" anchor="ctr"/>
           <a:lstStyle/>
           <a:p>
-            <a:pPr algn="ctr"/>
+            <a:pPr algn="ctr">
+              <a:defRPr/>
+            </a:pPr>
           </a:p>
         </p:txBody>
       </p:sp>
@@ -3175,6 +3177,7 @@
               </a:defRPr>
             </a:pPr>
             <a:r>
+              <a:rPr/>
               <a:t>新・家庭医療専門医制度の改訂</a:t>
             </a:r>
           </a:p>
@@ -3188,7 +3191,7 @@
         </p:nvSpPr>
         <p:spPr>
           <a:xfrm>
-            <a:off x="640080" y="868680"/>
+            <a:off x="640080" y="932688"/>
             <a:ext cx="5943600" cy="365760"/>
           </a:xfrm>
           <a:prstGeom prst="rect">
@@ -3211,6 +3214,7 @@
               </a:defRPr>
             </a:pPr>
             <a:r>
+              <a:rPr/>
               <a:t>ポートフォリオ2割削減とかかりつけ医機能報告制度</a:t>
             </a:r>
           </a:p>
@@ -3255,7 +3259,9 @@
           <a:bodyPr rtlCol="0" anchor="ctr"/>
           <a:lstStyle/>
           <a:p>
-            <a:pPr algn="ctr"/>
+            <a:pPr algn="ctr">
+              <a:defRPr/>
+            </a:pPr>
           </a:p>
         </p:txBody>
       </p:sp>
@@ -3290,6 +3296,7 @@
               </a:defRPr>
             </a:pPr>
             <a:r>
+              <a:rPr/>
               <a:t>20 → 16</a:t>
             </a:r>
           </a:p>
@@ -3326,6 +3333,7 @@
               </a:defRPr>
             </a:pPr>
             <a:r>
+              <a:rPr/>
               <a:t>ポートフォリオ領域</a:t>
             </a:r>
           </a:p>
@@ -3362,6 +3370,7 @@
               </a:defRPr>
             </a:pPr>
             <a:r>
+              <a:rPr/>
               <a:t>2割削減</a:t>
             </a:r>
           </a:p>
@@ -3406,7 +3415,9 @@
           <a:bodyPr rtlCol="0" anchor="ctr"/>
           <a:lstStyle/>
           <a:p>
-            <a:pPr algn="ctr"/>
+            <a:pPr algn="ctr">
+              <a:defRPr/>
+            </a:pPr>
           </a:p>
         </p:txBody>
       </p:sp>
@@ -3451,7 +3462,9 @@
           <a:bodyPr rtlCol="0" anchor="ctr"/>
           <a:lstStyle/>
           <a:p>
-            <a:pPr algn="ctr"/>
+            <a:pPr algn="ctr">
+              <a:defRPr/>
+            </a:pPr>
           </a:p>
         </p:txBody>
       </p:sp>
@@ -3486,10 +3499,12 @@
               </a:defRPr>
             </a:pPr>
             <a:r>
+              <a:rPr/>
               <a:t>これは「楽になった」のか？</a:t>
             </a:r>
             <a:br/>
             <a:r>
+              <a:rPr/>
               <a:t>それとも「質がもっと問われる」のか？</a:t>
             </a:r>
           </a:p>
@@ -3504,7 +3519,7 @@
         <p:spPr>
           <a:xfrm>
             <a:off x="640080" y="2743200"/>
-            <a:ext cx="4572000" cy="274320"/>
+            <a:ext cx="4572000" cy="322579"/>
           </a:xfrm>
           <a:prstGeom prst="rect">
             <a:avLst/>
@@ -3526,6 +3541,7 @@
               </a:defRPr>
             </a:pPr>
             <a:r>
+              <a:rPr/>
               <a:t>今日の学習目標（15分）</a:t>
             </a:r>
           </a:p>
@@ -3563,6 +3579,7 @@
               <a:buChar char="●"/>
             </a:pPr>
             <a:r>
+              <a:rPr/>
               <a:t>説明できる — 制度変更の具体的内容と背景</a:t>
             </a:r>
           </a:p>
@@ -3577,6 +3594,7 @@
               <a:buChar char="●"/>
             </a:pPr>
             <a:r>
+              <a:rPr/>
               <a:t>比較できる — 旧制度と新制度の差分を分析</a:t>
             </a:r>
           </a:p>
@@ -3591,6 +3609,7 @@
               <a:buChar char="●"/>
             </a:pPr>
             <a:r>
+              <a:rPr/>
               <a:t>立案できる — ポートフォリオ戦略を描ける</a:t>
             </a:r>
           </a:p>
@@ -3627,6 +3646,7 @@
               </a:defRPr>
             </a:pPr>
             <a:r>
+              <a:rPr/>
               <a:t>JPCA 2024年6月発表 | 2025年3月修了者より適用</a:t>
             </a:r>
           </a:p>
@@ -3697,7 +3717,9 @@
           <a:bodyPr rtlCol="0" anchor="ctr"/>
           <a:lstStyle/>
           <a:p>
-            <a:pPr algn="ctr"/>
+            <a:pPr algn="ctr">
+              <a:defRPr/>
+            </a:pPr>
           </a:p>
         </p:txBody>
       </p:sp>
@@ -3710,7 +3732,7 @@
         <p:spPr>
           <a:xfrm>
             <a:off x="640080" y="365760"/>
-            <a:ext cx="7315200" cy="457200"/>
+            <a:ext cx="7315200" cy="482600"/>
           </a:xfrm>
           <a:prstGeom prst="rect">
             <a:avLst/>
@@ -3732,6 +3754,7 @@
               </a:defRPr>
             </a:pPr>
             <a:r>
+              <a:rPr/>
               <a:t>Quick Poll</a:t>
             </a:r>
           </a:p>
@@ -3778,7 +3801,9 @@
           <a:bodyPr rtlCol="0" anchor="ctr"/>
           <a:lstStyle/>
           <a:p>
-            <a:pPr algn="ctr"/>
+            <a:pPr algn="ctr">
+              <a:defRPr/>
+            </a:pPr>
           </a:p>
         </p:txBody>
       </p:sp>
@@ -3813,6 +3838,7 @@
               </a:defRPr>
             </a:pPr>
             <a:r>
+              <a:rPr/>
               <a:t>✋  新・家庭医療専門医制度のポートフォリオを書いたことがある人？</a:t>
             </a:r>
           </a:p>
@@ -3859,7 +3885,9 @@
           <a:bodyPr rtlCol="0" anchor="ctr"/>
           <a:lstStyle/>
           <a:p>
-            <a:pPr algn="ctr"/>
+            <a:pPr algn="ctr">
+              <a:defRPr/>
+            </a:pPr>
           </a:p>
         </p:txBody>
       </p:sp>
@@ -3894,6 +3922,7 @@
               </a:defRPr>
             </a:pPr>
             <a:r>
+              <a:rPr/>
               <a:t>✋  「かかりつけ医機能報告制度」という言葉を聞いたことがある人？</a:t>
             </a:r>
           </a:p>
@@ -3940,7 +3969,9 @@
           <a:bodyPr rtlCol="0" anchor="ctr"/>
           <a:lstStyle/>
           <a:p>
-            <a:pPr algn="ctr"/>
+            <a:pPr algn="ctr">
+              <a:defRPr/>
+            </a:pPr>
           </a:p>
         </p:txBody>
       </p:sp>
@@ -3975,6 +4006,7 @@
               </a:defRPr>
             </a:pPr>
             <a:r>
+              <a:rPr/>
               <a:t>✋  第17回JPCA学術大会（2026年5月・京都）に参加予定の人？</a:t>
             </a:r>
           </a:p>
@@ -4019,7 +4051,9 @@
           <a:bodyPr rtlCol="0" anchor="ctr"/>
           <a:lstStyle/>
           <a:p>
-            <a:pPr algn="ctr"/>
+            <a:pPr algn="ctr">
+              <a:defRPr/>
+            </a:pPr>
           </a:p>
         </p:txBody>
       </p:sp>
@@ -4064,7 +4098,9 @@
           <a:bodyPr rtlCol="0" anchor="ctr"/>
           <a:lstStyle/>
           <a:p>
-            <a:pPr algn="ctr"/>
+            <a:pPr algn="ctr">
+              <a:defRPr/>
+            </a:pPr>
           </a:p>
         </p:txBody>
       </p:sp>
@@ -4099,10 +4135,12 @@
               </a:defRPr>
             </a:pPr>
             <a:r>
+              <a:rPr/>
               <a:t>専門医制度と医療政策が同時に動いています。</a:t>
             </a:r>
             <a:br/>
             <a:r>
+              <a:rPr/>
               <a:t>「制度を知る」ことは、キャリア戦略そのものです。</a:t>
             </a:r>
           </a:p>
@@ -4173,7 +4211,9 @@
           <a:bodyPr rtlCol="0" anchor="ctr"/>
           <a:lstStyle/>
           <a:p>
-            <a:pPr algn="ctr"/>
+            <a:pPr algn="ctr">
+              <a:defRPr/>
+            </a:pPr>
           </a:p>
         </p:txBody>
       </p:sp>
@@ -4186,7 +4226,7 @@
         <p:spPr>
           <a:xfrm>
             <a:off x="640080" y="274320"/>
-            <a:ext cx="5486400" cy="457200"/>
+            <a:ext cx="5486400" cy="482600"/>
           </a:xfrm>
           <a:prstGeom prst="rect">
             <a:avLst/>
@@ -4208,6 +4248,7 @@
               </a:defRPr>
             </a:pPr>
             <a:r>
+              <a:rPr/>
               <a:t>何が変わった？</a:t>
             </a:r>
           </a:p>
@@ -4252,7 +4293,9 @@
           <a:bodyPr rtlCol="0" anchor="ctr"/>
           <a:lstStyle/>
           <a:p>
-            <a:pPr algn="ctr"/>
+            <a:pPr algn="ctr">
+              <a:defRPr/>
+            </a:pPr>
           </a:p>
         </p:txBody>
       </p:sp>
@@ -4265,7 +4308,7 @@
         <p:spPr>
           <a:xfrm>
             <a:off x="457200" y="960120"/>
-            <a:ext cx="3840480" cy="274320"/>
+            <a:ext cx="3840480" cy="301751"/>
           </a:xfrm>
           <a:prstGeom prst="rect">
             <a:avLst/>
@@ -4287,6 +4330,7 @@
               </a:defRPr>
             </a:pPr>
             <a:r>
+              <a:rPr/>
               <a:t>旧制度</a:t>
             </a:r>
           </a:p>
@@ -4323,6 +4367,7 @@
               </a:defRPr>
             </a:pPr>
             <a:r>
+              <a:rPr/>
               <a:t>20領域</a:t>
             </a:r>
           </a:p>
@@ -4359,6 +4404,7 @@
               </a:defRPr>
             </a:pPr>
             <a:r>
+              <a:rPr/>
               <a:t>学会発表 3件以上</a:t>
             </a:r>
           </a:p>
@@ -4395,6 +4441,7 @@
               </a:defRPr>
             </a:pPr>
             <a:r>
+              <a:rPr/>
               <a:t>→</a:t>
             </a:r>
           </a:p>
@@ -4439,7 +4486,9 @@
           <a:bodyPr rtlCol="0" anchor="ctr"/>
           <a:lstStyle/>
           <a:p>
-            <a:pPr algn="ctr"/>
+            <a:pPr algn="ctr">
+              <a:defRPr/>
+            </a:pPr>
           </a:p>
         </p:txBody>
       </p:sp>
@@ -4452,7 +4501,7 @@
         <p:spPr>
           <a:xfrm>
             <a:off x="5029200" y="960120"/>
-            <a:ext cx="3840480" cy="274320"/>
+            <a:ext cx="3840480" cy="301751"/>
           </a:xfrm>
           <a:prstGeom prst="rect">
             <a:avLst/>
@@ -4474,6 +4523,7 @@
               </a:defRPr>
             </a:pPr>
             <a:r>
+              <a:rPr/>
               <a:t>新制度</a:t>
             </a:r>
           </a:p>
@@ -4510,6 +4560,7 @@
               </a:defRPr>
             </a:pPr>
             <a:r>
+              <a:rPr/>
               <a:t>16領域</a:t>
             </a:r>
           </a:p>
@@ -4546,6 +4597,7 @@
               </a:defRPr>
             </a:pPr>
             <a:r>
+              <a:rPr/>
               <a:t>学会発表 2件以上</a:t>
             </a:r>
           </a:p>
@@ -4590,7 +4642,9 @@
           <a:bodyPr rtlCol="0" anchor="ctr"/>
           <a:lstStyle/>
           <a:p>
-            <a:pPr algn="ctr"/>
+            <a:pPr algn="ctr">
+              <a:defRPr/>
+            </a:pPr>
           </a:p>
         </p:txBody>
       </p:sp>
@@ -4635,7 +4689,9 @@
           <a:bodyPr rtlCol="0" anchor="ctr"/>
           <a:lstStyle/>
           <a:p>
-            <a:pPr algn="ctr"/>
+            <a:pPr algn="ctr">
+              <a:defRPr/>
+            </a:pPr>
           </a:p>
         </p:txBody>
       </p:sp>
@@ -4670,10 +4726,12 @@
               </a:defRPr>
             </a:pPr>
             <a:r>
+              <a:rPr/>
               <a:t>領域が「消えた」のではなく、既存領域に統合された。</a:t>
             </a:r>
             <a:br/>
             <a:r>
+              <a:rPr/>
               <a:t>→ 1つのポートフォリオに求められる多面性と深さがむしろ増している。</a:t>
             </a:r>
           </a:p>
@@ -4710,6 +4768,7 @@
               </a:defRPr>
             </a:pPr>
             <a:r>
+              <a:rPr/>
               <a:t>統合された旧領域:</a:t>
             </a:r>
           </a:p>
@@ -4747,6 +4806,7 @@
               <a:buChar char="●"/>
             </a:pPr>
             <a:r>
+              <a:rPr/>
               <a:t>複雑困難事例 → 多疾患併存(4)等</a:t>
             </a:r>
           </a:p>
@@ -4761,6 +4821,7 @@
               <a:buChar char="●"/>
             </a:pPr>
             <a:r>
+              <a:rPr/>
               <a:t>プロフェッショナリズム → 医療者自身のケア(16)</a:t>
             </a:r>
           </a:p>
@@ -4775,6 +4836,7 @@
               <a:buChar char="●"/>
             </a:pPr>
             <a:r>
+              <a:rPr/>
               <a:t>セクシャルヘルス・思春期 → 各関連領域</a:t>
             </a:r>
           </a:p>
@@ -4789,6 +4851,7 @@
               <a:buChar char="●"/>
             </a:pPr>
             <a:r>
+              <a:rPr/>
               <a:t>緩和ケア・最終段階 → 長期的関係(5)</a:t>
             </a:r>
           </a:p>
@@ -4825,6 +4888,7 @@
               </a:defRPr>
             </a:pPr>
             <a:r>
+              <a:rPr/>
               <a:t>コア16領域は変更なし</a:t>
             </a:r>
           </a:p>
@@ -4862,6 +4926,7 @@
               <a:buChar char="●"/>
             </a:pPr>
             <a:r>
+              <a:rPr/>
               <a:t>1. 未分化な健康問題</a:t>
             </a:r>
           </a:p>
@@ -4876,6 +4941,7 @@
               <a:buChar char="●"/>
             </a:pPr>
             <a:r>
+              <a:rPr/>
               <a:t>2. 予防医学・健康増進</a:t>
             </a:r>
           </a:p>
@@ -4890,6 +4956,7 @@
               <a:buChar char="●"/>
             </a:pPr>
             <a:r>
+              <a:rPr/>
               <a:t>3. 慢性疾患  4. 多疾患併存</a:t>
             </a:r>
           </a:p>
@@ -4904,6 +4971,7 @@
               <a:buChar char="●"/>
             </a:pPr>
             <a:r>
+              <a:rPr/>
               <a:t>5. 長期的全人的関係  6. 患者中心</a:t>
             </a:r>
           </a:p>
@@ -4918,6 +4986,7 @@
               <a:buChar char="●"/>
             </a:pPr>
             <a:r>
+              <a:rPr/>
               <a:t>7. 家族志向  8. 地域志向PC</a:t>
             </a:r>
           </a:p>
@@ -4932,6 +5001,7 @@
               <a:buChar char="●"/>
             </a:pPr>
             <a:r>
+              <a:rPr/>
               <a:t>…16. 医療者自身のケア</a:t>
             </a:r>
           </a:p>
@@ -5002,7 +5072,9 @@
           <a:bodyPr rtlCol="0" anchor="ctr"/>
           <a:lstStyle/>
           <a:p>
-            <a:pPr algn="ctr"/>
+            <a:pPr algn="ctr">
+              <a:defRPr/>
+            </a:pPr>
           </a:p>
         </p:txBody>
       </p:sp>
@@ -5037,6 +5109,7 @@
               </a:defRPr>
             </a:pPr>
             <a:r>
+              <a:rPr/>
               <a:t>かかりつけ医機能報告制度</a:t>
             </a:r>
           </a:p>
@@ -5051,7 +5124,7 @@
         <p:spPr>
           <a:xfrm>
             <a:off x="640080" y="731520"/>
-            <a:ext cx="7315200" cy="274320"/>
+            <a:ext cx="7315200" cy="287020"/>
           </a:xfrm>
           <a:prstGeom prst="rect">
             <a:avLst/>
@@ -5073,6 +5146,7 @@
               </a:defRPr>
             </a:pPr>
             <a:r>
+              <a:rPr/>
               <a:t>2025年4月施行 | 初回報告: 2026年1-3月（G-MIS）</a:t>
             </a:r>
           </a:p>
@@ -5119,7 +5193,9 @@
           <a:bodyPr rtlCol="0" anchor="ctr"/>
           <a:lstStyle/>
           <a:p>
-            <a:pPr algn="ctr"/>
+            <a:pPr algn="ctr">
+              <a:defRPr/>
+            </a:pPr>
           </a:p>
         </p:txBody>
       </p:sp>
@@ -5132,7 +5208,7 @@
         <p:spPr>
           <a:xfrm>
             <a:off x="640080" y="1234440"/>
-            <a:ext cx="3657600" cy="274320"/>
+            <a:ext cx="3657600" cy="301751"/>
           </a:xfrm>
           <a:prstGeom prst="rect">
             <a:avLst/>
@@ -5154,6 +5230,7 @@
               </a:defRPr>
             </a:pPr>
             <a:r>
+              <a:rPr/>
               <a:t>報告制度で求められる能力</a:t>
             </a:r>
           </a:p>
@@ -5191,6 +5268,7 @@
               <a:buChar char="●"/>
             </a:pPr>
             <a:r>
+              <a:rPr/>
               <a:t>17診療領域・40疾患対応力</a:t>
             </a:r>
           </a:p>
@@ -5205,6 +5283,7 @@
               <a:buChar char="●"/>
             </a:pPr>
             <a:r>
+              <a:rPr/>
               <a:t>在宅医療・訪問診療の提供体制</a:t>
             </a:r>
           </a:p>
@@ -5219,6 +5298,7 @@
               <a:buChar char="●"/>
             </a:pPr>
             <a:r>
+              <a:rPr/>
               <a:t>総合診療専門医の配置（報告項目）</a:t>
             </a:r>
           </a:p>
@@ -5233,7 +5313,7 @@
         <p:spPr>
           <a:xfrm>
             <a:off x="4389120" y="1554480"/>
-            <a:ext cx="457200" cy="548640"/>
+            <a:ext cx="457200" cy="660400"/>
           </a:xfrm>
           <a:prstGeom prst="rect">
             <a:avLst/>
@@ -5255,6 +5335,7 @@
               </a:defRPr>
             </a:pPr>
             <a:r>
+              <a:rPr/>
               <a:t>≒</a:t>
             </a:r>
           </a:p>
@@ -5301,7 +5382,9 @@
           <a:bodyPr rtlCol="0" anchor="ctr"/>
           <a:lstStyle/>
           <a:p>
-            <a:pPr algn="ctr"/>
+            <a:pPr algn="ctr">
+              <a:defRPr/>
+            </a:pPr>
           </a:p>
         </p:txBody>
       </p:sp>
@@ -5314,7 +5397,7 @@
         <p:spPr>
           <a:xfrm>
             <a:off x="5212080" y="1234440"/>
-            <a:ext cx="3657600" cy="274320"/>
+            <a:ext cx="3657600" cy="301751"/>
           </a:xfrm>
           <a:prstGeom prst="rect">
             <a:avLst/>
@@ -5336,6 +5419,7 @@
               </a:defRPr>
             </a:pPr>
             <a:r>
+              <a:rPr/>
               <a:t>家庭医療専門医の研修</a:t>
             </a:r>
           </a:p>
@@ -5373,6 +5457,7 @@
               <a:buChar char="●"/>
             </a:pPr>
             <a:r>
+              <a:rPr/>
               <a:t>16ポートフォリオ領域</a:t>
             </a:r>
           </a:p>
@@ -5387,6 +5472,7 @@
               <a:buChar char="●"/>
             </a:pPr>
             <a:r>
+              <a:rPr/>
               <a:t>包括的なプライマリ・ケア能力</a:t>
             </a:r>
           </a:p>
@@ -5401,6 +5487,7 @@
               <a:buChar char="●"/>
             </a:pPr>
             <a:r>
+              <a:rPr/>
               <a:t>地域志向のアプローチ</a:t>
             </a:r>
           </a:p>
@@ -5445,7 +5532,9 @@
           <a:bodyPr rtlCol="0" anchor="ctr"/>
           <a:lstStyle/>
           <a:p>
-            <a:pPr algn="ctr"/>
+            <a:pPr algn="ctr">
+              <a:defRPr/>
+            </a:pPr>
           </a:p>
         </p:txBody>
       </p:sp>
@@ -5490,7 +5579,9 @@
           <a:bodyPr rtlCol="0" anchor="ctr"/>
           <a:lstStyle/>
           <a:p>
-            <a:pPr algn="ctr"/>
+            <a:pPr algn="ctr">
+              <a:defRPr/>
+            </a:pPr>
           </a:p>
         </p:txBody>
       </p:sp>
@@ -5525,10 +5616,12 @@
               </a:defRPr>
             </a:pPr>
             <a:r>
+              <a:rPr/>
               <a:t>あなたの存在が、医療機関の「かかりつけ医機能」を高める。</a:t>
             </a:r>
             <a:br/>
             <a:r>
+              <a:rPr/>
               <a:t>家庭医療専門医の研修で培う能力 ≒ 報告制度で求められる能力。</a:t>
             </a:r>
           </a:p>
@@ -5599,7 +5692,9 @@
           <a:bodyPr rtlCol="0" anchor="ctr"/>
           <a:lstStyle/>
           <a:p>
-            <a:pPr algn="ctr"/>
+            <a:pPr algn="ctr">
+              <a:defRPr/>
+            </a:pPr>
           </a:p>
         </p:txBody>
       </p:sp>
@@ -5634,6 +5729,7 @@
               </a:defRPr>
             </a:pPr>
             <a:r>
+              <a:rPr/>
               <a:t>ペアディスカッション</a:t>
             </a:r>
           </a:p>
@@ -5648,7 +5744,7 @@
         <p:spPr>
           <a:xfrm>
             <a:off x="640080" y="731520"/>
-            <a:ext cx="7315200" cy="274320"/>
+            <a:ext cx="7315200" cy="287020"/>
           </a:xfrm>
           <a:prstGeom prst="rect">
             <a:avLst/>
@@ -5670,6 +5766,7 @@
               </a:defRPr>
             </a:pPr>
             <a:r>
+              <a:rPr/>
               <a:t>3分ペアワーク + 1分シェア | 問いを1つ選んでください</a:t>
             </a:r>
           </a:p>
@@ -5716,7 +5813,9 @@
           <a:bodyPr rtlCol="0" anchor="ctr"/>
           <a:lstStyle/>
           <a:p>
-            <a:pPr algn="ctr"/>
+            <a:pPr algn="ctr">
+              <a:defRPr/>
+            </a:pPr>
           </a:p>
         </p:txBody>
       </p:sp>
@@ -5751,10 +5850,12 @@
               </a:defRPr>
             </a:pPr>
             <a:r>
+              <a:rPr/>
               <a:t>問い A</a:t>
             </a:r>
             <a:br/>
             <a:r>
+              <a:rPr/>
               <a:t>専攻医向け</a:t>
             </a:r>
           </a:p>
@@ -5791,10 +5892,12 @@
               </a:defRPr>
             </a:pPr>
             <a:r>
+              <a:rPr/>
               <a:t>16領域になった今、残りの研修期間で</a:t>
             </a:r>
             <a:br/>
             <a:r>
+              <a:rPr/>
               <a:t>どの領域を「質の高い事例」として書きたいか？</a:t>
             </a:r>
           </a:p>
@@ -5841,7 +5944,9 @@
           <a:bodyPr rtlCol="0" anchor="ctr"/>
           <a:lstStyle/>
           <a:p>
-            <a:pPr algn="ctr"/>
+            <a:pPr algn="ctr">
+              <a:defRPr/>
+            </a:pPr>
           </a:p>
         </p:txBody>
       </p:sp>
@@ -5876,10 +5981,12 @@
               </a:defRPr>
             </a:pPr>
             <a:r>
+              <a:rPr/>
               <a:t>問い B</a:t>
             </a:r>
             <a:br/>
             <a:r>
+              <a:rPr/>
               <a:t>研修医向け</a:t>
             </a:r>
           </a:p>
@@ -5916,10 +6023,12 @@
               </a:defRPr>
             </a:pPr>
             <a:r>
+              <a:rPr/>
               <a:t>かかりつけ医機能報告制度で求められる能力のうち</a:t>
             </a:r>
             <a:br/>
             <a:r>
+              <a:rPr/>
               <a:t>今の研修で意識的に伸ばせるものは何か？</a:t>
             </a:r>
           </a:p>
@@ -5966,7 +6075,9 @@
           <a:bodyPr rtlCol="0" anchor="ctr"/>
           <a:lstStyle/>
           <a:p>
-            <a:pPr algn="ctr"/>
+            <a:pPr algn="ctr">
+              <a:defRPr/>
+            </a:pPr>
           </a:p>
         </p:txBody>
       </p:sp>
@@ -6001,10 +6112,12 @@
               </a:defRPr>
             </a:pPr>
             <a:r>
+              <a:rPr/>
               <a:t>問い C</a:t>
             </a:r>
             <a:br/>
             <a:r>
+              <a:rPr/>
               <a:t>指導医向け</a:t>
             </a:r>
           </a:p>
@@ -6041,10 +6154,12 @@
               </a:defRPr>
             </a:pPr>
             <a:r>
+              <a:rPr/>
               <a:t>ポートフォリオ領域が統合された今、</a:t>
             </a:r>
             <a:br/>
             <a:r>
+              <a:rPr/>
               <a:t>指導でどんな点を強調するか？</a:t>
             </a:r>
           </a:p>
@@ -6115,7 +6230,9 @@
           <a:bodyPr rtlCol="0" anchor="ctr"/>
           <a:lstStyle/>
           <a:p>
-            <a:pPr algn="ctr"/>
+            <a:pPr algn="ctr">
+              <a:defRPr/>
+            </a:pPr>
           </a:p>
         </p:txBody>
       </p:sp>
@@ -6128,7 +6245,7 @@
         <p:spPr>
           <a:xfrm>
             <a:off x="640080" y="182880"/>
-            <a:ext cx="5486400" cy="457200"/>
+            <a:ext cx="5486400" cy="482600"/>
           </a:xfrm>
           <a:prstGeom prst="rect">
             <a:avLst/>
@@ -6150,6 +6267,7 @@
               </a:defRPr>
             </a:pPr>
             <a:r>
+              <a:rPr/>
               <a:t>振り返りと持ち帰り</a:t>
             </a:r>
           </a:p>
@@ -6194,7 +6312,9 @@
           <a:bodyPr rtlCol="0" anchor="ctr"/>
           <a:lstStyle/>
           <a:p>
-            <a:pPr algn="ctr"/>
+            <a:pPr algn="ctr">
+              <a:defRPr/>
+            </a:pPr>
           </a:p>
         </p:txBody>
       </p:sp>
@@ -6229,6 +6349,7 @@
               </a:defRPr>
             </a:pPr>
             <a:r>
+              <a:rPr/>
               <a:t>1. 量から質へ</a:t>
             </a:r>
           </a:p>
@@ -6242,7 +6363,7 @@
         </p:nvSpPr>
         <p:spPr>
           <a:xfrm>
-            <a:off x="777240" y="1143000"/>
+            <a:off x="777240" y="1179576"/>
             <a:ext cx="4389120" cy="274320"/>
           </a:xfrm>
           <a:prstGeom prst="rect">
@@ -6265,6 +6386,7 @@
               </a:defRPr>
             </a:pPr>
             <a:r>
+              <a:rPr/>
               <a:t>20→16領域の削減は、1事例あたりの深さ・多面性を重視する方向</a:t>
             </a:r>
           </a:p>
@@ -6309,7 +6431,9 @@
           <a:bodyPr rtlCol="0" anchor="ctr"/>
           <a:lstStyle/>
           <a:p>
-            <a:pPr algn="ctr"/>
+            <a:pPr algn="ctr">
+              <a:defRPr/>
+            </a:pPr>
           </a:p>
         </p:txBody>
       </p:sp>
@@ -6344,6 +6468,7 @@
               </a:defRPr>
             </a:pPr>
             <a:r>
+              <a:rPr/>
               <a:t>2. 制度と教育の融合</a:t>
             </a:r>
           </a:p>
@@ -6357,7 +6482,7 @@
         </p:nvSpPr>
         <p:spPr>
           <a:xfrm>
-            <a:off x="777240" y="1965960"/>
+            <a:off x="777240" y="2002536"/>
             <a:ext cx="4389120" cy="274320"/>
           </a:xfrm>
           <a:prstGeom prst="rect">
@@ -6380,6 +6505,7 @@
               </a:defRPr>
             </a:pPr>
             <a:r>
+              <a:rPr/>
               <a:t>かかりつけ医機能報告制度と専門医研修は同じ方向を向いている</a:t>
             </a:r>
           </a:p>
@@ -6424,7 +6550,9 @@
           <a:bodyPr rtlCol="0" anchor="ctr"/>
           <a:lstStyle/>
           <a:p>
-            <a:pPr algn="ctr"/>
+            <a:pPr algn="ctr">
+              <a:defRPr/>
+            </a:pPr>
           </a:p>
         </p:txBody>
       </p:sp>
@@ -6459,6 +6587,7 @@
               </a:defRPr>
             </a:pPr>
             <a:r>
+              <a:rPr/>
               <a:t>3. あなたの価値</a:t>
             </a:r>
           </a:p>
@@ -6472,7 +6601,7 @@
         </p:nvSpPr>
         <p:spPr>
           <a:xfrm>
-            <a:off x="777240" y="2788920"/>
+            <a:off x="777240" y="2825496"/>
             <a:ext cx="4389120" cy="274320"/>
           </a:xfrm>
           <a:prstGeom prst="rect">
@@ -6495,6 +6624,7 @@
               </a:defRPr>
             </a:pPr>
             <a:r>
+              <a:rPr/>
               <a:t>総合診療/家庭医療専門医は、これからの医療制度で求められる存在</a:t>
             </a:r>
           </a:p>
@@ -6509,7 +6639,7 @@
         <p:spPr>
           <a:xfrm>
             <a:off x="5486400" y="822960"/>
-            <a:ext cx="3383280" cy="274320"/>
+            <a:ext cx="3383280" cy="340360"/>
           </a:xfrm>
           <a:prstGeom prst="rect">
             <a:avLst/>
@@ -6531,6 +6661,7 @@
               </a:defRPr>
             </a:pPr>
             <a:r>
+              <a:rPr/>
               <a:t>次のアクション</a:t>
             </a:r>
           </a:p>
@@ -6577,7 +6708,9 @@
           <a:bodyPr rtlCol="0" anchor="ctr"/>
           <a:lstStyle/>
           <a:p>
-            <a:pPr algn="ctr"/>
+            <a:pPr algn="ctr">
+              <a:defRPr/>
+            </a:pPr>
           </a:p>
         </p:txBody>
       </p:sp>
@@ -6590,7 +6723,7 @@
         <p:spPr>
           <a:xfrm>
             <a:off x="5623560" y="1207008"/>
-            <a:ext cx="914400" cy="274320"/>
+            <a:ext cx="914400" cy="287020"/>
           </a:xfrm>
           <a:prstGeom prst="rect">
             <a:avLst/>
@@ -6612,6 +6745,7 @@
               </a:defRPr>
             </a:pPr>
             <a:r>
+              <a:rPr/>
               <a:t>今週</a:t>
             </a:r>
           </a:p>
@@ -6648,6 +6782,7 @@
               </a:defRPr>
             </a:pPr>
             <a:r>
+              <a:rPr/>
               <a:t>JPCA公式サイトで新16領域の詳細を確認</a:t>
             </a:r>
           </a:p>
@@ -6694,7 +6829,9 @@
           <a:bodyPr rtlCol="0" anchor="ctr"/>
           <a:lstStyle/>
           <a:p>
-            <a:pPr algn="ctr"/>
+            <a:pPr algn="ctr">
+              <a:defRPr/>
+            </a:pPr>
           </a:p>
         </p:txBody>
       </p:sp>
@@ -6707,7 +6844,7 @@
         <p:spPr>
           <a:xfrm>
             <a:off x="5623560" y="1938528"/>
-            <a:ext cx="914400" cy="274320"/>
+            <a:ext cx="914400" cy="287020"/>
           </a:xfrm>
           <a:prstGeom prst="rect">
             <a:avLst/>
@@ -6729,6 +6866,7 @@
               </a:defRPr>
             </a:pPr>
             <a:r>
+              <a:rPr/>
               <a:t>来月</a:t>
             </a:r>
           </a:p>
@@ -6765,6 +6903,7 @@
               </a:defRPr>
             </a:pPr>
             <a:r>
+              <a:rPr/>
               <a:t>第17回JPCA学術大会（5/29-31 京都）の演題募集チェック</a:t>
             </a:r>
           </a:p>
@@ -6811,7 +6950,9 @@
           <a:bodyPr rtlCol="0" anchor="ctr"/>
           <a:lstStyle/>
           <a:p>
-            <a:pPr algn="ctr"/>
+            <a:pPr algn="ctr">
+              <a:defRPr/>
+            </a:pPr>
           </a:p>
         </p:txBody>
       </p:sp>
@@ -6824,7 +6965,7 @@
         <p:spPr>
           <a:xfrm>
             <a:off x="5623560" y="2670048"/>
-            <a:ext cx="914400" cy="274320"/>
+            <a:ext cx="914400" cy="287020"/>
           </a:xfrm>
           <a:prstGeom prst="rect">
             <a:avLst/>
@@ -6846,6 +6987,7 @@
               </a:defRPr>
             </a:pPr>
             <a:r>
+              <a:rPr/>
               <a:t>今月中</a:t>
             </a:r>
           </a:p>
@@ -6882,6 +7024,7 @@
               </a:defRPr>
             </a:pPr>
             <a:r>
+              <a:rPr/>
               <a:t>指導医とポートフォリオ進捗を振り返る</a:t>
             </a:r>
           </a:p>
@@ -6926,7 +7069,9 @@
           <a:bodyPr rtlCol="0" anchor="ctr"/>
           <a:lstStyle/>
           <a:p>
-            <a:pPr algn="ctr"/>
+            <a:pPr algn="ctr">
+              <a:defRPr/>
+            </a:pPr>
           </a:p>
         </p:txBody>
       </p:sp>
@@ -6971,7 +7116,9 @@
           <a:bodyPr rtlCol="0" anchor="ctr"/>
           <a:lstStyle/>
           <a:p>
-            <a:pPr algn="ctr"/>
+            <a:pPr algn="ctr">
+              <a:defRPr/>
+            </a:pPr>
           </a:p>
         </p:txBody>
       </p:sp>
@@ -7006,10 +7153,12 @@
               </a:defRPr>
             </a:pPr>
             <a:r>
+              <a:rPr/>
               <a:t>自分のポートフォリオで一番自信のある領域と、</a:t>
             </a:r>
             <a:br/>
             <a:r>
+              <a:rPr/>
               <a:t>一番苦手な領域は何か？苦手な領域をどの臨床場面で経験できるか？</a:t>
             </a:r>
           </a:p>
@@ -7046,6 +7195,7 @@
               </a:defRPr>
             </a:pPr>
             <a:r>
+              <a:rPr/>
               <a:t>Scribe Agent | 2026-03-27 | ガニェの9教授事象 | 15分</a:t>
             </a:r>
           </a:p>
